--- a/output/education/2026-03-27_ethics-guideline-revision/ethics-guideline-revision_slides_residents.pptx
+++ b/output/education/2026-03-27_ethics-guideline-revision/ethics-guideline-revision_slides_residents.pptx
@@ -3142,7 +3142,9 @@
           <a:bodyPr rtlCol="0" anchor="ctr"/>
           <a:lstStyle/>
           <a:p>
-            <a:pPr algn="ctr"/>
+            <a:pPr algn="ctr">
+              <a:defRPr/>
+            </a:pPr>
           </a:p>
         </p:txBody>
       </p:sp>
@@ -3155,7 +3157,7 @@
         <p:spPr>
           <a:xfrm>
             <a:off x="365760" y="548640"/>
-            <a:ext cx="8229600" cy="548640"/>
+            <a:ext cx="8229600" cy="589279"/>
           </a:xfrm>
           <a:prstGeom prst="rect">
             <a:avLst/>
@@ -3177,6 +3179,7 @@
               </a:defRPr>
             </a:pPr>
             <a:r>
+              <a:rPr/>
               <a:t>研究倫理指針の一部改正</a:t>
             </a:r>
           </a:p>
@@ -3190,8 +3193,8 @@
         </p:nvSpPr>
         <p:spPr>
           <a:xfrm>
-            <a:off x="365760" y="1051560"/>
-            <a:ext cx="8229600" cy="365760"/>
+            <a:off x="365760" y="1156207"/>
+            <a:ext cx="8229600" cy="375920"/>
           </a:xfrm>
           <a:prstGeom prst="rect">
             <a:avLst/>
@@ -3213,6 +3216,7 @@
               </a:defRPr>
             </a:pPr>
             <a:r>
+              <a:rPr/>
               <a:t>— 研究を始める前に知っておくべきこと</a:t>
             </a:r>
           </a:p>
@@ -3227,7 +3231,7 @@
         <p:spPr>
           <a:xfrm>
             <a:off x="365760" y="1554480"/>
-            <a:ext cx="8229600" cy="274320"/>
+            <a:ext cx="8229600" cy="287020"/>
           </a:xfrm>
           <a:prstGeom prst="rect">
             <a:avLst/>
@@ -3249,6 +3253,7 @@
               </a:defRPr>
             </a:pPr>
             <a:r>
+              <a:rPr/>
               <a:t>研修医・指導医向け ｜ 15分 ｜ 2026-03-27</a:t>
             </a:r>
           </a:p>
@@ -3293,7 +3298,9 @@
           <a:bodyPr rtlCol="0" anchor="ctr"/>
           <a:lstStyle/>
           <a:p>
-            <a:pPr algn="ctr"/>
+            <a:pPr algn="ctr">
+              <a:defRPr/>
+            </a:pPr>
           </a:p>
         </p:txBody>
       </p:sp>
@@ -3338,7 +3345,9 @@
           <a:bodyPr rtlCol="0" anchor="ctr"/>
           <a:lstStyle/>
           <a:p>
-            <a:pPr algn="ctr"/>
+            <a:pPr algn="ctr">
+              <a:defRPr/>
+            </a:pPr>
           </a:p>
         </p:txBody>
       </p:sp>
@@ -3373,14 +3382,17 @@
               </a:defRPr>
             </a:pPr>
             <a:r>
+              <a:rPr/>
               <a:t>2026年度、研究倫理指針が改正されます。</a:t>
             </a:r>
             <a:br/>
             <a:r>
+              <a:rPr/>
               <a:t>文科省・厚労省・経産省の3省庁合同改正。</a:t>
             </a:r>
             <a:br/>
             <a:r>
+              <a:rPr/>
               <a:t>パブリックコメント終了済み。</a:t>
             </a:r>
           </a:p>
@@ -3395,7 +3407,7 @@
         <p:spPr>
           <a:xfrm>
             <a:off x="5760720" y="2194560"/>
-            <a:ext cx="3017520" cy="274320"/>
+            <a:ext cx="3017520" cy="304799"/>
           </a:xfrm>
           <a:prstGeom prst="rect">
             <a:avLst/>
@@ -3417,6 +3429,7 @@
               </a:defRPr>
             </a:pPr>
             <a:r>
+              <a:rPr/>
               <a:t>問い:</a:t>
             </a:r>
           </a:p>
@@ -3453,10 +3466,12 @@
               </a:defRPr>
             </a:pPr>
             <a:r>
+              <a:rPr/>
               <a:t>あなたが今書いている研究計画書、</a:t>
             </a:r>
             <a:br/>
             <a:r>
+              <a:rPr/>
               <a:t>新指針で何が変わるか答えられますか？</a:t>
             </a:r>
           </a:p>
@@ -3493,6 +3508,7 @@
               </a:defRPr>
             </a:pPr>
             <a:r>
+              <a:rPr/>
               <a:t>事象1: 注意の喚起 ｜ ガニェの9教授事象</a:t>
             </a:r>
           </a:p>
@@ -3563,7 +3579,9 @@
           <a:bodyPr rtlCol="0" anchor="ctr"/>
           <a:lstStyle/>
           <a:p>
-            <a:pPr algn="ctr"/>
+            <a:pPr algn="ctr">
+              <a:defRPr/>
+            </a:pPr>
           </a:p>
         </p:txBody>
       </p:sp>
@@ -3576,7 +3594,7 @@
         <p:spPr>
           <a:xfrm>
             <a:off x="365760" y="502920"/>
-            <a:ext cx="8229600" cy="457200"/>
+            <a:ext cx="8229600" cy="518159"/>
           </a:xfrm>
           <a:prstGeom prst="rect">
             <a:avLst/>
@@ -3598,6 +3616,7 @@
               </a:defRPr>
             </a:pPr>
             <a:r>
+              <a:rPr/>
               <a:t>今日の学習目標</a:t>
             </a:r>
           </a:p>
@@ -3612,7 +3631,7 @@
         <p:spPr>
           <a:xfrm>
             <a:off x="365760" y="1097280"/>
-            <a:ext cx="8229600" cy="274320"/>
+            <a:ext cx="8229600" cy="340360"/>
           </a:xfrm>
           <a:prstGeom prst="rect">
             <a:avLst/>
@@ -3634,6 +3653,7 @@
               </a:defRPr>
             </a:pPr>
             <a:r>
+              <a:rPr/>
               <a:t>この15分の後、あなたは:</a:t>
             </a:r>
           </a:p>
@@ -3680,7 +3700,9 @@
           <a:bodyPr rtlCol="0" anchor="ctr"/>
           <a:lstStyle/>
           <a:p>
-            <a:pPr algn="ctr"/>
+            <a:pPr algn="ctr">
+              <a:defRPr/>
+            </a:pPr>
           </a:p>
         </p:txBody>
       </p:sp>
@@ -3693,7 +3715,7 @@
         <p:spPr>
           <a:xfrm>
             <a:off x="594360" y="1719072"/>
-            <a:ext cx="365760" cy="457200"/>
+            <a:ext cx="365760" cy="482600"/>
           </a:xfrm>
           <a:prstGeom prst="rect">
             <a:avLst/>
@@ -3715,6 +3737,7 @@
               </a:defRPr>
             </a:pPr>
             <a:r>
+              <a:rPr/>
               <a:t>1</a:t>
             </a:r>
           </a:p>
@@ -3751,6 +3774,7 @@
               </a:defRPr>
             </a:pPr>
             <a:r>
+              <a:rPr/>
               <a:t>説明できる — 改正で何が変わるのか、3つの柱を述べられる（理解）</a:t>
             </a:r>
           </a:p>
@@ -3797,7 +3821,9 @@
           <a:bodyPr rtlCol="0" anchor="ctr"/>
           <a:lstStyle/>
           <a:p>
-            <a:pPr algn="ctr"/>
+            <a:pPr algn="ctr">
+              <a:defRPr/>
+            </a:pPr>
           </a:p>
         </p:txBody>
       </p:sp>
@@ -3810,7 +3836,7 @@
         <p:spPr>
           <a:xfrm>
             <a:off x="594360" y="2496312"/>
-            <a:ext cx="365760" cy="457200"/>
+            <a:ext cx="365760" cy="482600"/>
           </a:xfrm>
           <a:prstGeom prst="rect">
             <a:avLst/>
@@ -3832,6 +3858,7 @@
               </a:defRPr>
             </a:pPr>
             <a:r>
+              <a:rPr/>
               <a:t>2</a:t>
             </a:r>
           </a:p>
@@ -3868,6 +3895,7 @@
               </a:defRPr>
             </a:pPr>
             <a:r>
+              <a:rPr/>
               <a:t>分析できる — 自分の研究計画に影響する変更点を特定できる（分析）</a:t>
             </a:r>
           </a:p>
@@ -3914,7 +3942,9 @@
           <a:bodyPr rtlCol="0" anchor="ctr"/>
           <a:lstStyle/>
           <a:p>
-            <a:pPr algn="ctr"/>
+            <a:pPr algn="ctr">
+              <a:defRPr/>
+            </a:pPr>
           </a:p>
         </p:txBody>
       </p:sp>
@@ -3927,7 +3957,7 @@
         <p:spPr>
           <a:xfrm>
             <a:off x="594360" y="3273552"/>
-            <a:ext cx="365760" cy="457200"/>
+            <a:ext cx="365760" cy="482600"/>
           </a:xfrm>
           <a:prstGeom prst="rect">
             <a:avLst/>
@@ -3949,6 +3979,7 @@
               </a:defRPr>
             </a:pPr>
             <a:r>
+              <a:rPr/>
               <a:t>3</a:t>
             </a:r>
           </a:p>
@@ -3985,6 +4016,7 @@
               </a:defRPr>
             </a:pPr>
             <a:r>
+              <a:rPr/>
               <a:t>作成できる — 新指針に準拠した研究計画書の骨子を書き始められる（創造）</a:t>
             </a:r>
           </a:p>
@@ -4021,6 +4053,7 @@
               </a:defRPr>
             </a:pPr>
             <a:r>
+              <a:rPr/>
               <a:t>事象2: 学習目標を知らせる</a:t>
             </a:r>
           </a:p>
@@ -4091,7 +4124,9 @@
           <a:bodyPr rtlCol="0" anchor="ctr"/>
           <a:lstStyle/>
           <a:p>
-            <a:pPr algn="ctr"/>
+            <a:pPr algn="ctr">
+              <a:defRPr/>
+            </a:pPr>
           </a:p>
         </p:txBody>
       </p:sp>
@@ -4104,7 +4139,7 @@
         <p:spPr>
           <a:xfrm>
             <a:off x="365760" y="502920"/>
-            <a:ext cx="8229600" cy="457200"/>
+            <a:ext cx="8229600" cy="482600"/>
           </a:xfrm>
           <a:prstGeom prst="rect">
             <a:avLst/>
@@ -4126,6 +4161,7 @@
               </a:defRPr>
             </a:pPr>
             <a:r>
+              <a:rPr/>
               <a:t>まず確認 — 現行指針、どこまで知っていますか？</a:t>
             </a:r>
           </a:p>
@@ -4140,7 +4176,7 @@
         <p:spPr>
           <a:xfrm>
             <a:off x="365760" y="1051560"/>
-            <a:ext cx="2743200" cy="274320"/>
+            <a:ext cx="2743200" cy="340360"/>
           </a:xfrm>
           <a:prstGeom prst="rect">
             <a:avLst/>
@@ -4162,6 +4198,7 @@
               </a:defRPr>
             </a:pPr>
             <a:r>
+              <a:rPr/>
               <a:t>Quick Poll（挙手）</a:t>
             </a:r>
           </a:p>
@@ -4199,6 +4236,7 @@
               <a:buChar char="●"/>
             </a:pPr>
             <a:r>
+              <a:rPr/>
               <a:t>「人を対象とする生命科学・医学系研究に関する倫理指針」を読んだことがある人？</a:t>
             </a:r>
           </a:p>
@@ -4213,6 +4251,7 @@
               <a:buChar char="●"/>
             </a:pPr>
             <a:r>
+              <a:rPr/>
               <a:t>ICとオプトアウトの違いを説明できる人？</a:t>
             </a:r>
           </a:p>
@@ -4227,6 +4266,7 @@
               <a:buChar char="●"/>
             </a:pPr>
             <a:r>
+              <a:rPr/>
               <a:t>自分の研究で仮名加工情報を扱ったことがある人？</a:t>
             </a:r>
           </a:p>
@@ -4271,7 +4311,9 @@
           <a:bodyPr rtlCol="0" anchor="ctr"/>
           <a:lstStyle/>
           <a:p>
-            <a:pPr algn="ctr"/>
+            <a:pPr algn="ctr">
+              <a:defRPr/>
+            </a:pPr>
           </a:p>
         </p:txBody>
       </p:sp>
@@ -4316,7 +4358,9 @@
           <a:bodyPr rtlCol="0" anchor="ctr"/>
           <a:lstStyle/>
           <a:p>
-            <a:pPr algn="ctr"/>
+            <a:pPr algn="ctr">
+              <a:defRPr/>
+            </a:pPr>
           </a:p>
         </p:txBody>
       </p:sp>
@@ -4351,10 +4395,12 @@
               </a:defRPr>
             </a:pPr>
             <a:r>
+              <a:rPr/>
               <a:t>今日は「同意のとり方」と「個人情報の種類」の2つを軸に、</a:t>
             </a:r>
             <a:br/>
             <a:r>
+              <a:rPr/>
               <a:t>改正のポイントを整理します。</a:t>
             </a:r>
           </a:p>
@@ -4369,7 +4415,7 @@
         <p:spPr>
           <a:xfrm>
             <a:off x="5303520" y="1051560"/>
-            <a:ext cx="3657600" cy="274320"/>
+            <a:ext cx="3657600" cy="322579"/>
           </a:xfrm>
           <a:prstGeom prst="rect">
             <a:avLst/>
@@ -4391,6 +4437,7 @@
               </a:defRPr>
             </a:pPr>
             <a:r>
+              <a:rPr/>
               <a:t>現行指針の基本構造</a:t>
             </a:r>
           </a:p>
@@ -4703,6 +4750,7 @@
               </a:defRPr>
             </a:pPr>
             <a:r>
+              <a:rPr/>
               <a:t>事象3: 前提条件の想起</a:t>
             </a:r>
           </a:p>
@@ -4773,7 +4821,9 @@
           <a:bodyPr rtlCol="0" anchor="ctr"/>
           <a:lstStyle/>
           <a:p>
-            <a:pPr algn="ctr"/>
+            <a:pPr algn="ctr">
+              <a:defRPr/>
+            </a:pPr>
           </a:p>
         </p:txBody>
       </p:sp>
@@ -4786,7 +4836,7 @@
         <p:spPr>
           <a:xfrm>
             <a:off x="365760" y="502920"/>
-            <a:ext cx="8229600" cy="457200"/>
+            <a:ext cx="8229600" cy="518159"/>
           </a:xfrm>
           <a:prstGeom prst="rect">
             <a:avLst/>
@@ -4808,6 +4858,7 @@
               </a:defRPr>
             </a:pPr>
             <a:r>
+              <a:rPr/>
               <a:t>改正の3つの柱</a:t>
             </a:r>
           </a:p>
@@ -4822,7 +4873,7 @@
         <p:spPr>
           <a:xfrm>
             <a:off x="457200" y="1097280"/>
-            <a:ext cx="731520" cy="274320"/>
+            <a:ext cx="731520" cy="304799"/>
           </a:xfrm>
           <a:prstGeom prst="rect">
             <a:avLst/>
@@ -4844,6 +4895,7 @@
               </a:defRPr>
             </a:pPr>
             <a:r>
+              <a:rPr/>
               <a:t>柱1</a:t>
             </a:r>
           </a:p>
@@ -4857,8 +4909,8 @@
         </p:nvSpPr>
         <p:spPr>
           <a:xfrm>
-            <a:off x="457200" y="1371600"/>
-            <a:ext cx="2560320" cy="274320"/>
+            <a:off x="457200" y="1420367"/>
+            <a:ext cx="2560320" cy="322579"/>
           </a:xfrm>
           <a:prstGeom prst="rect">
             <a:avLst/>
@@ -4880,6 +4932,7 @@
               </a:defRPr>
             </a:pPr>
             <a:r>
+              <a:rPr/>
               <a:t>同意手続きの簡素化・一元化</a:t>
             </a:r>
           </a:p>
@@ -4893,7 +4946,7 @@
         </p:nvSpPr>
         <p:spPr>
           <a:xfrm>
-            <a:off x="457200" y="1691640"/>
+            <a:off x="457200" y="1761234"/>
             <a:ext cx="2560320" cy="731520"/>
           </a:xfrm>
           <a:prstGeom prst="rect">
@@ -4916,10 +4969,12 @@
               </a:defRPr>
             </a:pPr>
             <a:r>
+              <a:rPr/>
               <a:t>改正前: IC手続きが複雑に分岐</a:t>
             </a:r>
             <a:br/>
             <a:r>
+              <a:rPr/>
               <a:t>改正後: ICとオプトアウトに二元化</a:t>
             </a:r>
           </a:p>
@@ -4934,7 +4989,7 @@
         <p:spPr>
           <a:xfrm>
             <a:off x="3291840" y="1097280"/>
-            <a:ext cx="731520" cy="274320"/>
+            <a:ext cx="731520" cy="304799"/>
           </a:xfrm>
           <a:prstGeom prst="rect">
             <a:avLst/>
@@ -4956,6 +5011,7 @@
               </a:defRPr>
             </a:pPr>
             <a:r>
+              <a:rPr/>
               <a:t>柱2</a:t>
             </a:r>
           </a:p>
@@ -4969,7 +5025,7 @@
         </p:nvSpPr>
         <p:spPr>
           <a:xfrm>
-            <a:off x="3291840" y="1371600"/>
+            <a:off x="3291840" y="1420367"/>
             <a:ext cx="2560320" cy="457200"/>
           </a:xfrm>
           <a:prstGeom prst="rect">
@@ -4992,10 +5048,12 @@
               </a:defRPr>
             </a:pPr>
             <a:r>
+              <a:rPr/>
               <a:t>仮名加工情報・匿名加工情報の</a:t>
             </a:r>
             <a:br/>
             <a:r>
+              <a:rPr/>
               <a:t>取扱い明確化</a:t>
             </a:r>
           </a:p>
@@ -5236,7 +5294,7 @@
         <p:spPr>
           <a:xfrm>
             <a:off x="6400800" y="1097280"/>
-            <a:ext cx="731520" cy="274320"/>
+            <a:ext cx="731520" cy="304799"/>
           </a:xfrm>
           <a:prstGeom prst="rect">
             <a:avLst/>
@@ -5258,6 +5316,7 @@
               </a:defRPr>
             </a:pPr>
             <a:r>
+              <a:rPr/>
               <a:t>柱3</a:t>
             </a:r>
           </a:p>
@@ -5271,7 +5330,7 @@
         </p:nvSpPr>
         <p:spPr>
           <a:xfrm>
-            <a:off x="6400800" y="1371600"/>
+            <a:off x="6400800" y="1420367"/>
             <a:ext cx="2377440" cy="457200"/>
           </a:xfrm>
           <a:prstGeom prst="rect">
@@ -5294,10 +5353,12 @@
               </a:defRPr>
             </a:pPr>
             <a:r>
+              <a:rPr/>
               <a:t>包括同意からオプトアウトへの</a:t>
             </a:r>
             <a:br/>
             <a:r>
+              <a:rPr/>
               <a:t>移行ルール</a:t>
             </a:r>
           </a:p>
@@ -5334,14 +5395,17 @@
               </a:defRPr>
             </a:pPr>
             <a:r>
+              <a:rPr/>
               <a:t>改正前: 包括同意の扱いが不明確</a:t>
             </a:r>
             <a:br/>
             <a:r>
+              <a:rPr/>
               <a:t>改正後: 包括同意 + オプトアウト</a:t>
             </a:r>
             <a:br/>
             <a:r>
+              <a:rPr/>
               <a:t>= 新たなICなしで研究利用可能</a:t>
             </a:r>
           </a:p>
@@ -5378,6 +5442,7 @@
               </a:defRPr>
             </a:pPr>
             <a:r>
+              <a:rPr/>
               <a:t>事象4: 新しい内容の提示</a:t>
             </a:r>
           </a:p>
@@ -5448,7 +5513,9 @@
           <a:bodyPr rtlCol="0" anchor="ctr"/>
           <a:lstStyle/>
           <a:p>
-            <a:pPr algn="ctr"/>
+            <a:pPr algn="ctr">
+              <a:defRPr/>
+            </a:pPr>
           </a:p>
         </p:txBody>
       </p:sp>
@@ -5461,7 +5528,7 @@
         <p:spPr>
           <a:xfrm>
             <a:off x="365760" y="457200"/>
-            <a:ext cx="8229600" cy="457200"/>
+            <a:ext cx="8229600" cy="482600"/>
           </a:xfrm>
           <a:prstGeom prst="rect">
             <a:avLst/>
@@ -5483,6 +5550,7 @@
               </a:defRPr>
             </a:pPr>
             <a:r>
+              <a:rPr/>
               <a:t>同意の3類型を整理する</a:t>
             </a:r>
           </a:p>
@@ -5917,7 +5985,7 @@
         <p:spPr>
           <a:xfrm>
             <a:off x="5669280" y="1005840"/>
-            <a:ext cx="3200400" cy="274320"/>
+            <a:ext cx="3200400" cy="322579"/>
           </a:xfrm>
           <a:prstGeom prst="rect">
             <a:avLst/>
@@ -5939,6 +6007,7 @@
               </a:defRPr>
             </a:pPr>
             <a:r>
+              <a:rPr/>
               <a:t>判断フローチャート</a:t>
             </a:r>
           </a:p>
@@ -5985,7 +6054,9 @@
           <a:bodyPr rtlCol="0" anchor="ctr"/>
           <a:lstStyle/>
           <a:p>
-            <a:pPr algn="ctr"/>
+            <a:pPr algn="ctr">
+              <a:defRPr/>
+            </a:pPr>
           </a:p>
         </p:txBody>
       </p:sp>
@@ -6020,41 +6091,50 @@
               </a:defRPr>
             </a:pPr>
             <a:r>
+              <a:rPr/>
               <a:t>研究で使うデータは？</a:t>
             </a:r>
             <a:br/>
             <a:br/>
             <a:r>
+              <a:rPr/>
               <a:t>├ 新規採取・侵襲あり</a:t>
             </a:r>
             <a:br/>
             <a:r>
+              <a:rPr/>
               <a:t>│  → IC必須</a:t>
             </a:r>
             <a:br/>
             <a:br/>
             <a:r>
+              <a:rPr/>
               <a:t>├ 既存の試料・情報</a:t>
             </a:r>
             <a:br/>
             <a:r>
+              <a:rPr/>
               <a:t>│  ├ 匿名加工情報 → 同意不要</a:t>
             </a:r>
             <a:br/>
             <a:r>
+              <a:rPr/>
               <a:t>│  ├ 仮名加工（自機関）→ オプトアウト</a:t>
             </a:r>
             <a:br/>
             <a:r>
+              <a:rPr/>
               <a:t>│  └ その他 → オプトアウトが基本</a:t>
             </a:r>
             <a:br/>
             <a:br/>
             <a:r>
+              <a:rPr/>
               <a:t>└ 包括同意取得済み</a:t>
             </a:r>
             <a:br/>
             <a:r>
+              <a:rPr/>
               <a:t>   → 範囲内特定 + オプトアウト → 利用可</a:t>
             </a:r>
           </a:p>
@@ -6091,6 +6171,7 @@
               </a:defRPr>
             </a:pPr>
             <a:r>
+              <a:rPr/>
               <a:t>事象5: 学習の指針を与える</a:t>
             </a:r>
           </a:p>
@@ -6161,7 +6242,9 @@
           <a:bodyPr rtlCol="0" anchor="ctr"/>
           <a:lstStyle/>
           <a:p>
-            <a:pPr algn="ctr"/>
+            <a:pPr algn="ctr">
+              <a:defRPr/>
+            </a:pPr>
           </a:p>
         </p:txBody>
       </p:sp>
@@ -6174,7 +6257,7 @@
         <p:spPr>
           <a:xfrm>
             <a:off x="365760" y="502920"/>
-            <a:ext cx="8229600" cy="457200"/>
+            <a:ext cx="8229600" cy="518159"/>
           </a:xfrm>
           <a:prstGeom prst="rect">
             <a:avLst/>
@@ -6196,6 +6279,7 @@
               </a:defRPr>
             </a:pPr>
             <a:r>
+              <a:rPr/>
               <a:t>ミニ研究計画書ワーク</a:t>
             </a:r>
           </a:p>
@@ -6209,8 +6293,8 @@
         </p:nvSpPr>
         <p:spPr>
           <a:xfrm>
-            <a:off x="365760" y="1005840"/>
-            <a:ext cx="8229600" cy="274320"/>
+            <a:off x="365760" y="1039367"/>
+            <a:ext cx="8229600" cy="322579"/>
           </a:xfrm>
           <a:prstGeom prst="rect">
             <a:avLst/>
@@ -6232,6 +6316,7 @@
               </a:defRPr>
             </a:pPr>
             <a:r>
+              <a:rPr/>
               <a:t>ペアワーク（4分）: シナリオを1つ選び、研究計画書の骨子を作成</a:t>
             </a:r>
           </a:p>
@@ -6278,7 +6363,9 @@
           <a:bodyPr rtlCol="0" anchor="ctr"/>
           <a:lstStyle/>
           <a:p>
-            <a:pPr algn="ctr"/>
+            <a:pPr algn="ctr">
+              <a:defRPr/>
+            </a:pPr>
           </a:p>
         </p:txBody>
       </p:sp>
@@ -6291,7 +6378,7 @@
         <p:spPr>
           <a:xfrm>
             <a:off x="502920" y="1554480"/>
-            <a:ext cx="2423160" cy="274320"/>
+            <a:ext cx="2423160" cy="287020"/>
           </a:xfrm>
           <a:prstGeom prst="rect">
             <a:avLst/>
@@ -6313,6 +6400,7 @@
               </a:defRPr>
             </a:pPr>
             <a:r>
+              <a:rPr/>
               <a:t>A: カルテ後方視的研究</a:t>
             </a:r>
           </a:p>
@@ -6349,14 +6437,17 @@
               </a:defRPr>
             </a:pPr>
             <a:r>
+              <a:rPr/>
               <a:t>糖尿病患者の治療アウトカムを</a:t>
             </a:r>
             <a:br/>
             <a:r>
+              <a:rPr/>
               <a:t>過去5年分のカルテデータで解析。</a:t>
             </a:r>
             <a:br/>
             <a:r>
+              <a:rPr/>
               <a:t>対象: 自施設約500名。侵襲なし。</a:t>
             </a:r>
           </a:p>
@@ -6403,7 +6494,9 @@
           <a:bodyPr rtlCol="0" anchor="ctr"/>
           <a:lstStyle/>
           <a:p>
-            <a:pPr algn="ctr"/>
+            <a:pPr algn="ctr">
+              <a:defRPr/>
+            </a:pPr>
           </a:p>
         </p:txBody>
       </p:sp>
@@ -6416,7 +6509,7 @@
         <p:spPr>
           <a:xfrm>
             <a:off x="3383279" y="1554480"/>
-            <a:ext cx="2423160" cy="274320"/>
+            <a:ext cx="2423160" cy="287020"/>
           </a:xfrm>
           <a:prstGeom prst="rect">
             <a:avLst/>
@@ -6438,6 +6531,7 @@
               </a:defRPr>
             </a:pPr>
             <a:r>
+              <a:rPr/>
               <a:t>B: 多施設バイオバンク研究</a:t>
             </a:r>
           </a:p>
@@ -6474,14 +6568,17 @@
               </a:defRPr>
             </a:pPr>
             <a:r>
+              <a:rPr/>
               <a:t>バイオバンク保管の血液検体</a:t>
             </a:r>
             <a:br/>
             <a:r>
+              <a:rPr/>
               <a:t>（包括同意取得済み）で</a:t>
             </a:r>
             <a:br/>
             <a:r>
+              <a:rPr/>
               <a:t>新バイオマーカー探索。</a:t>
             </a:r>
           </a:p>
@@ -6528,7 +6625,9 @@
           <a:bodyPr rtlCol="0" anchor="ctr"/>
           <a:lstStyle/>
           <a:p>
-            <a:pPr algn="ctr"/>
+            <a:pPr algn="ctr">
+              <a:defRPr/>
+            </a:pPr>
           </a:p>
         </p:txBody>
       </p:sp>
@@ -6541,7 +6640,7 @@
         <p:spPr>
           <a:xfrm>
             <a:off x="6263640" y="1554480"/>
-            <a:ext cx="2423160" cy="274320"/>
+            <a:ext cx="2423160" cy="287020"/>
           </a:xfrm>
           <a:prstGeom prst="rect">
             <a:avLst/>
@@ -6563,6 +6662,7 @@
               </a:defRPr>
             </a:pPr>
             <a:r>
+              <a:rPr/>
               <a:t>C: AI診断支援ツール精度評価</a:t>
             </a:r>
           </a:p>
@@ -6599,14 +6699,17 @@
               </a:defRPr>
             </a:pPr>
             <a:r>
+              <a:rPr/>
               <a:t>既存画像データ（匿名化済み）で</a:t>
             </a:r>
             <a:br/>
             <a:r>
+              <a:rPr/>
               <a:t>AI診断ツールの精度を検証。</a:t>
             </a:r>
             <a:br/>
             <a:r>
+              <a:rPr/>
               <a:t>他施設からのデータ提供あり。</a:t>
             </a:r>
           </a:p>
@@ -6621,7 +6724,7 @@
         <p:spPr>
           <a:xfrm>
             <a:off x="365760" y="3200400"/>
-            <a:ext cx="1828800" cy="274320"/>
+            <a:ext cx="1828800" cy="287020"/>
           </a:xfrm>
           <a:prstGeom prst="rect">
             <a:avLst/>
@@ -6643,6 +6746,7 @@
               </a:defRPr>
             </a:pPr>
             <a:r>
+              <a:rPr/>
               <a:t>記入シート項目:</a:t>
             </a:r>
           </a:p>
@@ -6680,6 +6784,7 @@
               <a:buChar char="●"/>
             </a:pPr>
             <a:r>
+              <a:rPr/>
               <a:t>研究タイトル / 研究デザイン / 対象者</a:t>
             </a:r>
           </a:p>
@@ -6694,6 +6799,7 @@
               <a:buChar char="●"/>
             </a:pPr>
             <a:r>
+              <a:rPr/>
               <a:t>データの種類（個人情報/仮名加工/匿名加工）★</a:t>
             </a:r>
           </a:p>
@@ -6708,6 +6814,7 @@
               <a:buChar char="●"/>
             </a:pPr>
             <a:r>
+              <a:rPr/>
               <a:t>同意の方法（IC/オプトアウト/不要）★</a:t>
             </a:r>
           </a:p>
@@ -6722,6 +6829,7 @@
               <a:buChar char="●"/>
             </a:pPr>
             <a:r>
+              <a:rPr/>
               <a:t>改正で変わるポイント / 倫理審査の要否</a:t>
             </a:r>
           </a:p>
@@ -6758,6 +6866,7 @@
               </a:defRPr>
             </a:pPr>
             <a:r>
+              <a:rPr/>
               <a:t>事象6: 練習の機会を設ける</a:t>
             </a:r>
           </a:p>
@@ -6828,7 +6937,9 @@
           <a:bodyPr rtlCol="0" anchor="ctr"/>
           <a:lstStyle/>
           <a:p>
-            <a:pPr algn="ctr"/>
+            <a:pPr algn="ctr">
+              <a:defRPr/>
+            </a:pPr>
           </a:p>
         </p:txBody>
       </p:sp>
@@ -6841,7 +6952,7 @@
         <p:spPr>
           <a:xfrm>
             <a:off x="365760" y="457200"/>
-            <a:ext cx="8229600" cy="457200"/>
+            <a:ext cx="8229600" cy="482600"/>
           </a:xfrm>
           <a:prstGeom prst="rect">
             <a:avLst/>
@@ -6863,6 +6974,7 @@
               </a:defRPr>
             </a:pPr>
             <a:r>
+              <a:rPr/>
               <a:t>フィードバック — 各シナリオの答え合わせ</a:t>
             </a:r>
           </a:p>
@@ -7297,7 +7409,7 @@
         <p:spPr>
           <a:xfrm>
             <a:off x="365760" y="2926080"/>
-            <a:ext cx="4572000" cy="274320"/>
+            <a:ext cx="4572000" cy="340360"/>
           </a:xfrm>
           <a:prstGeom prst="rect">
             <a:avLst/>
@@ -7319,6 +7431,7 @@
               </a:defRPr>
             </a:pPr>
             <a:r>
+              <a:rPr/>
               <a:t>振り返りの問い</a:t>
             </a:r>
           </a:p>
@@ -7356,6 +7469,7 @@
               <a:buChar char="●"/>
             </a:pPr>
             <a:r>
+              <a:rPr/>
               <a:t>あなたが選んだシナリオで、改正前後で手続きはどう変わりましたか？</a:t>
             </a:r>
           </a:p>
@@ -7370,6 +7484,7 @@
               <a:buChar char="●"/>
             </a:pPr>
             <a:r>
+              <a:rPr/>
               <a:t>その変更は研究を進めやすくする方向？ 慎重にする方向？</a:t>
             </a:r>
           </a:p>
@@ -7406,6 +7521,7 @@
               </a:defRPr>
             </a:pPr>
             <a:r>
+              <a:rPr/>
               <a:t>事象7-8: フィードバック + 学習成果の評価</a:t>
             </a:r>
           </a:p>
@@ -7476,7 +7592,9 @@
           <a:bodyPr rtlCol="0" anchor="ctr"/>
           <a:lstStyle/>
           <a:p>
-            <a:pPr algn="ctr"/>
+            <a:pPr algn="ctr">
+              <a:defRPr/>
+            </a:pPr>
           </a:p>
         </p:txBody>
       </p:sp>
@@ -7489,7 +7607,7 @@
         <p:spPr>
           <a:xfrm>
             <a:off x="365760" y="502920"/>
-            <a:ext cx="8229600" cy="457200"/>
+            <a:ext cx="8229600" cy="518159"/>
           </a:xfrm>
           <a:prstGeom prst="rect">
             <a:avLst/>
@@ -7511,6 +7629,7 @@
               </a:defRPr>
             </a:pPr>
             <a:r>
+              <a:rPr/>
               <a:t>持ち帰り — 明日から使える3つのアクション</a:t>
             </a:r>
           </a:p>
@@ -7525,7 +7644,7 @@
         <p:spPr>
           <a:xfrm>
             <a:off x="365760" y="1097280"/>
-            <a:ext cx="4572000" cy="274320"/>
+            <a:ext cx="4572000" cy="340360"/>
           </a:xfrm>
           <a:prstGeom prst="rect">
             <a:avLst/>
@@ -7547,6 +7666,7 @@
               </a:defRPr>
             </a:pPr>
             <a:r>
+              <a:rPr/>
               <a:t>今日のまとめ: 3つの変更</a:t>
             </a:r>
           </a:p>
@@ -7561,7 +7681,7 @@
         <p:spPr>
           <a:xfrm>
             <a:off x="457200" y="1508760"/>
-            <a:ext cx="274320" cy="365760"/>
+            <a:ext cx="274320" cy="411479"/>
           </a:xfrm>
           <a:prstGeom prst="rect">
             <a:avLst/>
@@ -7583,6 +7703,7 @@
               </a:defRPr>
             </a:pPr>
             <a:r>
+              <a:rPr/>
               <a:t>1.</a:t>
             </a:r>
           </a:p>
@@ -7619,6 +7740,7 @@
               </a:defRPr>
             </a:pPr>
             <a:r>
+              <a:rPr/>
               <a:t>同意手続きの二元化 — IC とオプトアウトの2本柱にシンプル化</a:t>
             </a:r>
           </a:p>
@@ -7633,7 +7755,7 @@
         <p:spPr>
           <a:xfrm>
             <a:off x="457200" y="2011680"/>
-            <a:ext cx="274320" cy="365760"/>
+            <a:ext cx="274320" cy="411479"/>
           </a:xfrm>
           <a:prstGeom prst="rect">
             <a:avLst/>
@@ -7655,6 +7777,7 @@
               </a:defRPr>
             </a:pPr>
             <a:r>
+              <a:rPr/>
               <a:t>2.</a:t>
             </a:r>
           </a:p>
@@ -7691,6 +7814,7 @@
               </a:defRPr>
             </a:pPr>
             <a:r>
+              <a:rPr/>
               <a:t>仮名加工情報のオプトアウト利用 — 自機関作成ならICなしでOK</a:t>
             </a:r>
           </a:p>
@@ -7705,7 +7829,7 @@
         <p:spPr>
           <a:xfrm>
             <a:off x="457200" y="2514600"/>
-            <a:ext cx="274320" cy="365760"/>
+            <a:ext cx="274320" cy="411479"/>
           </a:xfrm>
           <a:prstGeom prst="rect">
             <a:avLst/>
@@ -7727,6 +7851,7 @@
               </a:defRPr>
             </a:pPr>
             <a:r>
+              <a:rPr/>
               <a:t>3.</a:t>
             </a:r>
           </a:p>
@@ -7763,6 +7888,7 @@
               </a:defRPr>
             </a:pPr>
             <a:r>
+              <a:rPr/>
               <a:t>匿名加工情報の制限撤廃 — より幅広いデータ利活用が可能に</a:t>
             </a:r>
           </a:p>
@@ -7777,7 +7903,7 @@
         <p:spPr>
           <a:xfrm>
             <a:off x="365760" y="3200400"/>
-            <a:ext cx="4572000" cy="274320"/>
+            <a:ext cx="4572000" cy="322579"/>
           </a:xfrm>
           <a:prstGeom prst="rect">
             <a:avLst/>
@@ -7799,6 +7925,7 @@
               </a:defRPr>
             </a:pPr>
             <a:r>
+              <a:rPr/>
               <a:t>あなたの次のアクション（1つ選んでください）</a:t>
             </a:r>
           </a:p>
@@ -7836,6 +7963,7 @@
               <a:buChar char="☐"/>
             </a:pPr>
             <a:r>
+              <a:rPr/>
               <a:t>今すぐ: 自分の研究の同意手続きが改正でどう変わるか確認する</a:t>
             </a:r>
           </a:p>
@@ -7850,6 +7978,7 @@
               <a:buChar char="☐"/>
             </a:pPr>
             <a:r>
+              <a:rPr/>
               <a:t>今週中: 倫理審査委員会の事務局に新指針への移行スケジュールを問い合わせる</a:t>
             </a:r>
           </a:p>
@@ -7864,6 +7993,7 @@
               <a:buChar char="☐"/>
             </a:pPr>
             <a:r>
+              <a:rPr/>
               <a:t>来月: 新指針に準拠した研究計画書のドラフトを書いてみる</a:t>
             </a:r>
           </a:p>
@@ -7900,6 +8030,7 @@
               </a:defRPr>
             </a:pPr>
             <a:r>
+              <a:rPr/>
               <a:t>※ 本教材は2026年3月27日時点の情報に基づいています。施行は2026年度中の予定。</a:t>
             </a:r>
           </a:p>

--- a/output/education/2026-03-27_ethics-guideline-revision/ethics-guideline-revision_slides_residents.pptx
+++ b/output/education/2026-03-27_ethics-guideline-revision/ethics-guideline-revision_slides_residents.pptx
@@ -3105,14 +3105,90 @@
       <p:grpSpPr/>
       <p:sp>
         <p:nvSpPr>
-          <p:cNvPr id="2" name="Rectangle 1"/>
+          <p:cNvPr id="2" name="TextBox 1"/>
+          <p:cNvSpPr txBox="1"/>
+          <p:nvPr/>
+        </p:nvSpPr>
+        <p:spPr>
+          <a:xfrm>
+            <a:off x="457200" y="274320"/>
+            <a:ext cx="8229600" cy="457200"/>
+          </a:xfrm>
+          <a:prstGeom prst="rect">
+            <a:avLst/>
+          </a:prstGeom>
+          <a:noFill/>
+        </p:spPr>
+        <p:txBody>
+          <a:bodyPr wrap="square" lIns="45720" rIns="45720" tIns="27432" bIns="27432">
+            <a:spAutoFit/>
+          </a:bodyPr>
+          <a:lstStyle/>
+          <a:p>
+            <a:pPr algn="l">
+              <a:defRPr sz="1400" b="0">
+                <a:solidFill>
+                  <a:srgbClr val="7A8A9A"/>
+                </a:solidFill>
+                <a:latin typeface="Calibri"/>
+              </a:defRPr>
+            </a:pPr>
+            <a:r>
+              <a:t>研究倫理指針が変わります</a:t>
+            </a:r>
+          </a:p>
+        </p:txBody>
+      </p:sp>
+      <p:sp>
+        <p:nvSpPr>
+          <p:cNvPr id="3" name="TextBox 2"/>
+          <p:cNvSpPr txBox="1"/>
+          <p:nvPr/>
+        </p:nvSpPr>
+        <p:spPr>
+          <a:xfrm>
+            <a:off x="457200" y="914400"/>
+            <a:ext cx="8229600" cy="1371600"/>
+          </a:xfrm>
+          <a:prstGeom prst="rect">
+            <a:avLst/>
+          </a:prstGeom>
+          <a:noFill/>
+        </p:spPr>
+        <p:txBody>
+          <a:bodyPr wrap="square" lIns="45720" rIns="45720" tIns="27432" bIns="27432">
+            <a:spAutoFit/>
+          </a:bodyPr>
+          <a:lstStyle/>
+          <a:p>
+            <a:pPr algn="ctr">
+              <a:defRPr sz="3200" b="1">
+                <a:solidFill>
+                  <a:srgbClr val="E89B3B"/>
+                </a:solidFill>
+                <a:latin typeface="Calibri"/>
+              </a:defRPr>
+            </a:pPr>
+            <a:r>
+              <a:t>あなたの研究計画書</a:t>
+            </a:r>
+            <a:br/>
+            <a:r>
+              <a:t>そのまま通りますか？</a:t>
+            </a:r>
+          </a:p>
+        </p:txBody>
+      </p:sp>
+      <p:sp>
+        <p:nvSpPr>
+          <p:cNvPr id="4" name="Rectangle 3"/>
           <p:cNvSpPr/>
           <p:nvPr/>
         </p:nvSpPr>
         <p:spPr>
           <a:xfrm>
-            <a:off x="365760" y="274320"/>
-            <a:ext cx="2286000" cy="73152"/>
+            <a:off x="2743200" y="2560320"/>
+            <a:ext cx="3657600" cy="54864"/>
           </a:xfrm>
           <a:prstGeom prst="rect">
             <a:avLst/>
@@ -3142,22 +3218,20 @@
           <a:bodyPr rtlCol="0" anchor="ctr"/>
           <a:lstStyle/>
           <a:p>
-            <a:pPr algn="ctr">
-              <a:defRPr/>
-            </a:pPr>
-          </a:p>
-        </p:txBody>
-      </p:sp>
-      <p:sp>
-        <p:nvSpPr>
-          <p:cNvPr id="3" name="TextBox 2"/>
+            <a:pPr algn="ctr"/>
+          </a:p>
+        </p:txBody>
+      </p:sp>
+      <p:sp>
+        <p:nvSpPr>
+          <p:cNvPr id="5" name="TextBox 4"/>
           <p:cNvSpPr txBox="1"/>
           <p:nvPr/>
         </p:nvSpPr>
         <p:spPr>
           <a:xfrm>
-            <a:off x="365760" y="548640"/>
-            <a:ext cx="8229600" cy="589279"/>
+            <a:off x="1371600" y="2926080"/>
+            <a:ext cx="6400800" cy="1371600"/>
           </a:xfrm>
           <a:prstGeom prst="rect">
             <a:avLst/>
@@ -3165,96 +3239,50 @@
           <a:noFill/>
         </p:spPr>
         <p:txBody>
-          <a:bodyPr wrap="square">
+          <a:bodyPr wrap="square" lIns="45720" rIns="45720" tIns="27432" bIns="27432">
             <a:spAutoFit/>
           </a:bodyPr>
           <a:lstStyle/>
           <a:p>
-            <a:pPr algn="l">
-              <a:defRPr sz="2800" b="1">
+            <a:pPr>
+              <a:defRPr sz="1300">
                 <a:solidFill>
                   <a:srgbClr val="F5F0E8"/>
                 </a:solidFill>
                 <a:latin typeface="Calibri"/>
               </a:defRPr>
+              <a:buChar char="●"/>
             </a:pPr>
             <a:r>
-              <a:rPr/>
-              <a:t>研究倫理指針の一部改正</a:t>
-            </a:r>
-          </a:p>
-        </p:txBody>
-      </p:sp>
-      <p:sp>
-        <p:nvSpPr>
-          <p:cNvPr id="4" name="TextBox 3"/>
-          <p:cNvSpPr txBox="1"/>
-          <p:nvPr/>
-        </p:nvSpPr>
-        <p:spPr>
-          <a:xfrm>
-            <a:off x="365760" y="1156207"/>
-            <a:ext cx="8229600" cy="375920"/>
-          </a:xfrm>
-          <a:prstGeom prst="rect">
-            <a:avLst/>
-          </a:prstGeom>
-          <a:noFill/>
-        </p:spPr>
-        <p:txBody>
-          <a:bodyPr wrap="square">
-            <a:spAutoFit/>
-          </a:bodyPr>
-          <a:lstStyle/>
-          <a:p>
-            <a:pPr algn="l">
-              <a:defRPr sz="1600" b="0">
-                <a:solidFill>
-                  <a:srgbClr val="E89B3B"/>
+              <a:t>文科省・厚労省・経産省の3省合同改正</a:t>
+            </a:r>
+          </a:p>
+          <a:p>
+            <a:pPr>
+              <a:defRPr sz="1300">
+                <a:solidFill>
+                  <a:srgbClr val="F5F0E8"/>
                 </a:solidFill>
                 <a:latin typeface="Calibri"/>
               </a:defRPr>
+              <a:buChar char="●"/>
             </a:pPr>
             <a:r>
-              <a:rPr/>
-              <a:t>— 研究を始める前に知っておくべきこと</a:t>
-            </a:r>
-          </a:p>
-        </p:txBody>
-      </p:sp>
-      <p:sp>
-        <p:nvSpPr>
-          <p:cNvPr id="5" name="TextBox 4"/>
-          <p:cNvSpPr txBox="1"/>
-          <p:nvPr/>
-        </p:nvSpPr>
-        <p:spPr>
-          <a:xfrm>
-            <a:off x="365760" y="1554480"/>
-            <a:ext cx="8229600" cy="287020"/>
-          </a:xfrm>
-          <a:prstGeom prst="rect">
-            <a:avLst/>
-          </a:prstGeom>
-          <a:noFill/>
-        </p:spPr>
-        <p:txBody>
-          <a:bodyPr wrap="square">
-            <a:spAutoFit/>
-          </a:bodyPr>
-          <a:lstStyle/>
-          <a:p>
-            <a:pPr algn="l">
-              <a:defRPr sz="1100" b="0">
-                <a:solidFill>
-                  <a:srgbClr val="7A8A9A"/>
+              <a:t>パブコメ: 2025年12月〜2026年1月（終了済み）</a:t>
+            </a:r>
+          </a:p>
+          <a:p>
+            <a:pPr>
+              <a:defRPr sz="1300">
+                <a:solidFill>
+                  <a:srgbClr val="F5F0E8"/>
                 </a:solidFill>
                 <a:latin typeface="Calibri"/>
               </a:defRPr>
+              <a:buChar char="●"/>
             </a:pPr>
             <a:r>
-              <a:rPr/>
-              <a:t>研修医・指導医向け ｜ 15分 ｜ 2026-03-27</a:t>
+              <a:t>2026年度中に施行予定</a:t>
             </a:r>
           </a:p>
         </p:txBody>
@@ -3267,8 +3295,8 @@
         </p:nvSpPr>
         <p:spPr>
           <a:xfrm>
-            <a:off x="365760" y="2194560"/>
-            <a:ext cx="54864" cy="1097280"/>
+            <a:off x="457200" y="4389120"/>
+            <a:ext cx="54864" cy="548640"/>
           </a:xfrm>
           <a:prstGeom prst="rect">
             <a:avLst/>
@@ -3298,9 +3326,7 @@
           <a:bodyPr rtlCol="0" anchor="ctr"/>
           <a:lstStyle/>
           <a:p>
-            <a:pPr algn="ctr">
-              <a:defRPr/>
-            </a:pPr>
+            <a:pPr algn="ctr"/>
           </a:p>
         </p:txBody>
       </p:sp>
@@ -3312,8 +3338,8 @@
         </p:nvSpPr>
         <p:spPr>
           <a:xfrm>
-            <a:off x="475488" y="2194560"/>
-            <a:ext cx="4919472" cy="1097280"/>
+            <a:off x="566928" y="4389120"/>
+            <a:ext cx="8119872" cy="548640"/>
           </a:xfrm>
           <a:prstGeom prst="rect">
             <a:avLst/>
@@ -3345,9 +3371,7 @@
           <a:bodyPr rtlCol="0" anchor="ctr"/>
           <a:lstStyle/>
           <a:p>
-            <a:pPr algn="ctr">
-              <a:defRPr/>
-            </a:pPr>
+            <a:pPr algn="ctr"/>
           </a:p>
         </p:txBody>
       </p:sp>
@@ -3359,8 +3383,8 @@
         </p:nvSpPr>
         <p:spPr>
           <a:xfrm>
-            <a:off x="594360" y="2267712"/>
-            <a:ext cx="4663440" cy="950976"/>
+            <a:off x="685800" y="4462272"/>
+            <a:ext cx="7863840" cy="402335"/>
           </a:xfrm>
           <a:prstGeom prst="rect">
             <a:avLst/>
@@ -3368,13 +3392,13 @@
           <a:noFill/>
         </p:spPr>
         <p:txBody>
-          <a:bodyPr wrap="square">
+          <a:bodyPr wrap="square" lIns="45720" rIns="45720" tIns="27432" bIns="27432">
             <a:spAutoFit/>
           </a:bodyPr>
           <a:lstStyle/>
           <a:p>
             <a:pPr algn="l">
-              <a:defRPr sz="1200" b="0">
+              <a:defRPr sz="1100" b="0">
                 <a:solidFill>
                   <a:srgbClr val="1A1A2E"/>
                 </a:solidFill>
@@ -3382,134 +3406,7 @@
               </a:defRPr>
             </a:pPr>
             <a:r>
-              <a:rPr/>
-              <a:t>2026年度、研究倫理指針が改正されます。</a:t>
-            </a:r>
-            <a:br/>
-            <a:r>
-              <a:rPr/>
-              <a:t>文科省・厚労省・経産省の3省庁合同改正。</a:t>
-            </a:r>
-            <a:br/>
-            <a:r>
-              <a:rPr/>
-              <a:t>パブリックコメント終了済み。</a:t>
-            </a:r>
-          </a:p>
-        </p:txBody>
-      </p:sp>
-      <p:sp>
-        <p:nvSpPr>
-          <p:cNvPr id="9" name="TextBox 8"/>
-          <p:cNvSpPr txBox="1"/>
-          <p:nvPr/>
-        </p:nvSpPr>
-        <p:spPr>
-          <a:xfrm>
-            <a:off x="5760720" y="2194560"/>
-            <a:ext cx="3017520" cy="304799"/>
-          </a:xfrm>
-          <a:prstGeom prst="rect">
-            <a:avLst/>
-          </a:prstGeom>
-          <a:noFill/>
-        </p:spPr>
-        <p:txBody>
-          <a:bodyPr wrap="square">
-            <a:spAutoFit/>
-          </a:bodyPr>
-          <a:lstStyle/>
-          <a:p>
-            <a:pPr algn="l">
-              <a:defRPr sz="1200" b="1">
-                <a:solidFill>
-                  <a:srgbClr val="E89B3B"/>
-                </a:solidFill>
-                <a:latin typeface="Calibri"/>
-              </a:defRPr>
-            </a:pPr>
-            <a:r>
-              <a:rPr/>
-              <a:t>問い:</a:t>
-            </a:r>
-          </a:p>
-        </p:txBody>
-      </p:sp>
-      <p:sp>
-        <p:nvSpPr>
-          <p:cNvPr id="10" name="TextBox 9"/>
-          <p:cNvSpPr txBox="1"/>
-          <p:nvPr/>
-        </p:nvSpPr>
-        <p:spPr>
-          <a:xfrm>
-            <a:off x="5760720" y="2514600"/>
-            <a:ext cx="3017520" cy="731520"/>
-          </a:xfrm>
-          <a:prstGeom prst="rect">
-            <a:avLst/>
-          </a:prstGeom>
-          <a:noFill/>
-        </p:spPr>
-        <p:txBody>
-          <a:bodyPr wrap="square">
-            <a:spAutoFit/>
-          </a:bodyPr>
-          <a:lstStyle/>
-          <a:p>
-            <a:pPr algn="l">
-              <a:defRPr sz="1300" b="0">
-                <a:solidFill>
-                  <a:srgbClr val="F5F0E8"/>
-                </a:solidFill>
-                <a:latin typeface="Calibri"/>
-              </a:defRPr>
-            </a:pPr>
-            <a:r>
-              <a:rPr/>
-              <a:t>あなたが今書いている研究計画書、</a:t>
-            </a:r>
-            <a:br/>
-            <a:r>
-              <a:rPr/>
-              <a:t>新指針で何が変わるか答えられますか？</a:t>
-            </a:r>
-          </a:p>
-        </p:txBody>
-      </p:sp>
-      <p:sp>
-        <p:nvSpPr>
-          <p:cNvPr id="11" name="TextBox 10"/>
-          <p:cNvSpPr txBox="1"/>
-          <p:nvPr/>
-        </p:nvSpPr>
-        <p:spPr>
-          <a:xfrm>
-            <a:off x="365760" y="4663440"/>
-            <a:ext cx="5486400" cy="274320"/>
-          </a:xfrm>
-          <a:prstGeom prst="rect">
-            <a:avLst/>
-          </a:prstGeom>
-          <a:noFill/>
-        </p:spPr>
-        <p:txBody>
-          <a:bodyPr wrap="square">
-            <a:spAutoFit/>
-          </a:bodyPr>
-          <a:lstStyle/>
-          <a:p>
-            <a:pPr algn="l">
-              <a:defRPr sz="800" b="0">
-                <a:solidFill>
-                  <a:srgbClr val="7A8A9A"/>
-                </a:solidFill>
-                <a:latin typeface="Calibri"/>
-              </a:defRPr>
-            </a:pPr>
-            <a:r>
-              <a:rPr/>
-              <a:t>事象1: 注意の喚起 ｜ ガニェの9教授事象</a:t>
+              <a:t>指針が「複雑かつ難解」で研究を停滞させていた → シンプルに再設計</a:t>
             </a:r>
           </a:p>
         </p:txBody>
@@ -3523,6 +3420,462 @@
 </file>
 
 <file path=ppt/slides/slide2.xml><?xml version="1.0" encoding="utf-8"?>
+<p:sld xmlns:a="http://schemas.openxmlformats.org/drawingml/2006/main" xmlns:p="http://schemas.openxmlformats.org/presentationml/2006/main" xmlns:r="http://schemas.openxmlformats.org/officeDocument/2006/relationships">
+  <p:cSld>
+    <p:bg>
+      <p:bgPr>
+        <a:solidFill>
+          <a:srgbClr val="F5F0E8"/>
+        </a:solidFill>
+        <a:effectLst/>
+      </p:bgPr>
+    </p:bg>
+    <p:spTree>
+      <p:nvGrpSpPr>
+        <p:cNvPr id="1" name=""/>
+        <p:cNvGrpSpPr/>
+        <p:nvPr/>
+      </p:nvGrpSpPr>
+      <p:grpSpPr/>
+      <p:sp>
+        <p:nvSpPr>
+          <p:cNvPr id="2" name="TextBox 1"/>
+          <p:cNvSpPr txBox="1"/>
+          <p:nvPr/>
+        </p:nvSpPr>
+        <p:spPr>
+          <a:xfrm>
+            <a:off x="457200" y="274320"/>
+            <a:ext cx="8229600" cy="457200"/>
+          </a:xfrm>
+          <a:prstGeom prst="rect">
+            <a:avLst/>
+          </a:prstGeom>
+          <a:noFill/>
+        </p:spPr>
+        <p:txBody>
+          <a:bodyPr wrap="square" lIns="45720" rIns="45720" tIns="27432" bIns="27432">
+            <a:spAutoFit/>
+          </a:bodyPr>
+          <a:lstStyle/>
+          <a:p>
+            <a:pPr algn="l">
+              <a:defRPr sz="2400" b="1">
+                <a:solidFill>
+                  <a:srgbClr val="1A1A2E"/>
+                </a:solidFill>
+                <a:latin typeface="Calibri"/>
+              </a:defRPr>
+            </a:pPr>
+            <a:r>
+              <a:t>今日の学習目標（15分）</a:t>
+            </a:r>
+          </a:p>
+        </p:txBody>
+      </p:sp>
+      <p:sp>
+        <p:nvSpPr>
+          <p:cNvPr id="3" name="Rectangle 2"/>
+          <p:cNvSpPr/>
+          <p:nvPr/>
+        </p:nvSpPr>
+        <p:spPr>
+          <a:xfrm>
+            <a:off x="457200" y="777240"/>
+            <a:ext cx="1828800" cy="54864"/>
+          </a:xfrm>
+          <a:prstGeom prst="rect">
+            <a:avLst/>
+          </a:prstGeom>
+          <a:solidFill>
+            <a:srgbClr val="E89B3B"/>
+          </a:solidFill>
+          <a:ln>
+            <a:noFill/>
+          </a:ln>
+        </p:spPr>
+        <p:style>
+          <a:lnRef idx="1">
+            <a:schemeClr val="accent1"/>
+          </a:lnRef>
+          <a:fillRef idx="3">
+            <a:schemeClr val="accent1"/>
+          </a:fillRef>
+          <a:effectRef idx="2">
+            <a:schemeClr val="accent1"/>
+          </a:effectRef>
+          <a:fontRef idx="minor">
+            <a:schemeClr val="lt1"/>
+          </a:fontRef>
+        </p:style>
+        <p:txBody>
+          <a:bodyPr rtlCol="0" anchor="ctr"/>
+          <a:lstStyle/>
+          <a:p>
+            <a:pPr algn="ctr"/>
+          </a:p>
+        </p:txBody>
+      </p:sp>
+      <p:sp>
+        <p:nvSpPr>
+          <p:cNvPr id="4" name="Rectangle 3"/>
+          <p:cNvSpPr/>
+          <p:nvPr/>
+        </p:nvSpPr>
+        <p:spPr>
+          <a:xfrm>
+            <a:off x="731520" y="1371600"/>
+            <a:ext cx="7680960" cy="822960"/>
+          </a:xfrm>
+          <a:prstGeom prst="rect">
+            <a:avLst/>
+          </a:prstGeom>
+          <a:solidFill>
+            <a:srgbClr val="FFFFFF"/>
+          </a:solidFill>
+          <a:ln w="12700">
+            <a:solidFill>
+              <a:srgbClr val="4EB8A9"/>
+            </a:solidFill>
+          </a:ln>
+        </p:spPr>
+        <p:style>
+          <a:lnRef idx="1">
+            <a:schemeClr val="accent1"/>
+          </a:lnRef>
+          <a:fillRef idx="3">
+            <a:schemeClr val="accent1"/>
+          </a:fillRef>
+          <a:effectRef idx="2">
+            <a:schemeClr val="accent1"/>
+          </a:effectRef>
+          <a:fontRef idx="minor">
+            <a:schemeClr val="lt1"/>
+          </a:fontRef>
+        </p:style>
+        <p:txBody>
+          <a:bodyPr rtlCol="0" anchor="ctr"/>
+          <a:lstStyle/>
+          <a:p>
+            <a:pPr algn="ctr"/>
+          </a:p>
+        </p:txBody>
+      </p:sp>
+      <p:sp>
+        <p:nvSpPr>
+          <p:cNvPr id="5" name="TextBox 4"/>
+          <p:cNvSpPr txBox="1"/>
+          <p:nvPr/>
+        </p:nvSpPr>
+        <p:spPr>
+          <a:xfrm>
+            <a:off x="914400" y="1463040"/>
+            <a:ext cx="1828800" cy="548640"/>
+          </a:xfrm>
+          <a:prstGeom prst="rect">
+            <a:avLst/>
+          </a:prstGeom>
+          <a:noFill/>
+        </p:spPr>
+        <p:txBody>
+          <a:bodyPr wrap="square" lIns="45720" rIns="45720" tIns="27432" bIns="27432">
+            <a:spAutoFit/>
+          </a:bodyPr>
+          <a:lstStyle/>
+          <a:p>
+            <a:pPr algn="l">
+              <a:defRPr sz="2000" b="1">
+                <a:solidFill>
+                  <a:srgbClr val="E89B3B"/>
+                </a:solidFill>
+                <a:latin typeface="Calibri"/>
+              </a:defRPr>
+            </a:pPr>
+            <a:r>
+              <a:t>説明できる</a:t>
+            </a:r>
+          </a:p>
+        </p:txBody>
+      </p:sp>
+      <p:sp>
+        <p:nvSpPr>
+          <p:cNvPr id="6" name="TextBox 5"/>
+          <p:cNvSpPr txBox="1"/>
+          <p:nvPr/>
+        </p:nvSpPr>
+        <p:spPr>
+          <a:xfrm>
+            <a:off x="2743200" y="1508760"/>
+            <a:ext cx="5486400" cy="548640"/>
+          </a:xfrm>
+          <a:prstGeom prst="rect">
+            <a:avLst/>
+          </a:prstGeom>
+          <a:noFill/>
+        </p:spPr>
+        <p:txBody>
+          <a:bodyPr wrap="square" lIns="45720" rIns="45720" tIns="27432" bIns="27432">
+            <a:spAutoFit/>
+          </a:bodyPr>
+          <a:lstStyle/>
+          <a:p>
+            <a:pPr algn="l">
+              <a:defRPr sz="1400" b="0">
+                <a:solidFill>
+                  <a:srgbClr val="1A1A2E"/>
+                </a:solidFill>
+                <a:latin typeface="Calibri"/>
+              </a:defRPr>
+            </a:pPr>
+            <a:r>
+              <a:t>改正の3つの柱を述べられる</a:t>
+            </a:r>
+          </a:p>
+        </p:txBody>
+      </p:sp>
+      <p:sp>
+        <p:nvSpPr>
+          <p:cNvPr id="7" name="Rectangle 6"/>
+          <p:cNvSpPr/>
+          <p:nvPr/>
+        </p:nvSpPr>
+        <p:spPr>
+          <a:xfrm>
+            <a:off x="731520" y="2377440"/>
+            <a:ext cx="7680960" cy="822960"/>
+          </a:xfrm>
+          <a:prstGeom prst="rect">
+            <a:avLst/>
+          </a:prstGeom>
+          <a:solidFill>
+            <a:srgbClr val="FFFFFF"/>
+          </a:solidFill>
+          <a:ln w="12700">
+            <a:solidFill>
+              <a:srgbClr val="4EB8A9"/>
+            </a:solidFill>
+          </a:ln>
+        </p:spPr>
+        <p:style>
+          <a:lnRef idx="1">
+            <a:schemeClr val="accent1"/>
+          </a:lnRef>
+          <a:fillRef idx="3">
+            <a:schemeClr val="accent1"/>
+          </a:fillRef>
+          <a:effectRef idx="2">
+            <a:schemeClr val="accent1"/>
+          </a:effectRef>
+          <a:fontRef idx="minor">
+            <a:schemeClr val="lt1"/>
+          </a:fontRef>
+        </p:style>
+        <p:txBody>
+          <a:bodyPr rtlCol="0" anchor="ctr"/>
+          <a:lstStyle/>
+          <a:p>
+            <a:pPr algn="ctr"/>
+          </a:p>
+        </p:txBody>
+      </p:sp>
+      <p:sp>
+        <p:nvSpPr>
+          <p:cNvPr id="8" name="TextBox 7"/>
+          <p:cNvSpPr txBox="1"/>
+          <p:nvPr/>
+        </p:nvSpPr>
+        <p:spPr>
+          <a:xfrm>
+            <a:off x="914400" y="2468880"/>
+            <a:ext cx="1828800" cy="548640"/>
+          </a:xfrm>
+          <a:prstGeom prst="rect">
+            <a:avLst/>
+          </a:prstGeom>
+          <a:noFill/>
+        </p:spPr>
+        <p:txBody>
+          <a:bodyPr wrap="square" lIns="45720" rIns="45720" tIns="27432" bIns="27432">
+            <a:spAutoFit/>
+          </a:bodyPr>
+          <a:lstStyle/>
+          <a:p>
+            <a:pPr algn="l">
+              <a:defRPr sz="2000" b="1">
+                <a:solidFill>
+                  <a:srgbClr val="E89B3B"/>
+                </a:solidFill>
+                <a:latin typeface="Calibri"/>
+              </a:defRPr>
+            </a:pPr>
+            <a:r>
+              <a:t>分析できる</a:t>
+            </a:r>
+          </a:p>
+        </p:txBody>
+      </p:sp>
+      <p:sp>
+        <p:nvSpPr>
+          <p:cNvPr id="9" name="TextBox 8"/>
+          <p:cNvSpPr txBox="1"/>
+          <p:nvPr/>
+        </p:nvSpPr>
+        <p:spPr>
+          <a:xfrm>
+            <a:off x="2743200" y="2514600"/>
+            <a:ext cx="5486400" cy="548640"/>
+          </a:xfrm>
+          <a:prstGeom prst="rect">
+            <a:avLst/>
+          </a:prstGeom>
+          <a:noFill/>
+        </p:spPr>
+        <p:txBody>
+          <a:bodyPr wrap="square" lIns="45720" rIns="45720" tIns="27432" bIns="27432">
+            <a:spAutoFit/>
+          </a:bodyPr>
+          <a:lstStyle/>
+          <a:p>
+            <a:pPr algn="l">
+              <a:defRPr sz="1400" b="0">
+                <a:solidFill>
+                  <a:srgbClr val="1A1A2E"/>
+                </a:solidFill>
+                <a:latin typeface="Calibri"/>
+              </a:defRPr>
+            </a:pPr>
+            <a:r>
+              <a:t>自分の研究に影響する変更点を特定できる</a:t>
+            </a:r>
+          </a:p>
+        </p:txBody>
+      </p:sp>
+      <p:sp>
+        <p:nvSpPr>
+          <p:cNvPr id="10" name="Rectangle 9"/>
+          <p:cNvSpPr/>
+          <p:nvPr/>
+        </p:nvSpPr>
+        <p:spPr>
+          <a:xfrm>
+            <a:off x="731520" y="3383280"/>
+            <a:ext cx="7680960" cy="822960"/>
+          </a:xfrm>
+          <a:prstGeom prst="rect">
+            <a:avLst/>
+          </a:prstGeom>
+          <a:solidFill>
+            <a:srgbClr val="FFFFFF"/>
+          </a:solidFill>
+          <a:ln w="12700">
+            <a:solidFill>
+              <a:srgbClr val="4EB8A9"/>
+            </a:solidFill>
+          </a:ln>
+        </p:spPr>
+        <p:style>
+          <a:lnRef idx="1">
+            <a:schemeClr val="accent1"/>
+          </a:lnRef>
+          <a:fillRef idx="3">
+            <a:schemeClr val="accent1"/>
+          </a:fillRef>
+          <a:effectRef idx="2">
+            <a:schemeClr val="accent1"/>
+          </a:effectRef>
+          <a:fontRef idx="minor">
+            <a:schemeClr val="lt1"/>
+          </a:fontRef>
+        </p:style>
+        <p:txBody>
+          <a:bodyPr rtlCol="0" anchor="ctr"/>
+          <a:lstStyle/>
+          <a:p>
+            <a:pPr algn="ctr"/>
+          </a:p>
+        </p:txBody>
+      </p:sp>
+      <p:sp>
+        <p:nvSpPr>
+          <p:cNvPr id="11" name="TextBox 10"/>
+          <p:cNvSpPr txBox="1"/>
+          <p:nvPr/>
+        </p:nvSpPr>
+        <p:spPr>
+          <a:xfrm>
+            <a:off x="914400" y="3474720"/>
+            <a:ext cx="1828800" cy="548640"/>
+          </a:xfrm>
+          <a:prstGeom prst="rect">
+            <a:avLst/>
+          </a:prstGeom>
+          <a:noFill/>
+        </p:spPr>
+        <p:txBody>
+          <a:bodyPr wrap="square" lIns="45720" rIns="45720" tIns="27432" bIns="27432">
+            <a:spAutoFit/>
+          </a:bodyPr>
+          <a:lstStyle/>
+          <a:p>
+            <a:pPr algn="l">
+              <a:defRPr sz="2000" b="1">
+                <a:solidFill>
+                  <a:srgbClr val="E89B3B"/>
+                </a:solidFill>
+                <a:latin typeface="Calibri"/>
+              </a:defRPr>
+            </a:pPr>
+            <a:r>
+              <a:t>書ける</a:t>
+            </a:r>
+          </a:p>
+        </p:txBody>
+      </p:sp>
+      <p:sp>
+        <p:nvSpPr>
+          <p:cNvPr id="12" name="TextBox 11"/>
+          <p:cNvSpPr txBox="1"/>
+          <p:nvPr/>
+        </p:nvSpPr>
+        <p:spPr>
+          <a:xfrm>
+            <a:off x="2743200" y="3520440"/>
+            <a:ext cx="5486400" cy="548640"/>
+          </a:xfrm>
+          <a:prstGeom prst="rect">
+            <a:avLst/>
+          </a:prstGeom>
+          <a:noFill/>
+        </p:spPr>
+        <p:txBody>
+          <a:bodyPr wrap="square" lIns="45720" rIns="45720" tIns="27432" bIns="27432">
+            <a:spAutoFit/>
+          </a:bodyPr>
+          <a:lstStyle/>
+          <a:p>
+            <a:pPr algn="l">
+              <a:defRPr sz="1400" b="0">
+                <a:solidFill>
+                  <a:srgbClr val="1A1A2E"/>
+                </a:solidFill>
+                <a:latin typeface="Calibri"/>
+              </a:defRPr>
+            </a:pPr>
+            <a:r>
+              <a:t>新指針に準拠した研究計画書の骨子を書き始められる</a:t>
+            </a:r>
+          </a:p>
+        </p:txBody>
+      </p:sp>
+    </p:spTree>
+  </p:cSld>
+  <p:clrMapOvr>
+    <a:masterClrMapping/>
+  </p:clrMapOvr>
+</p:sld>
+</file>
+
+<file path=ppt/slides/slide3.xml><?xml version="1.0" encoding="utf-8"?>
 <p:sld xmlns:a="http://schemas.openxmlformats.org/drawingml/2006/main" xmlns:p="http://schemas.openxmlformats.org/presentationml/2006/main" xmlns:r="http://schemas.openxmlformats.org/officeDocument/2006/relationships">
   <p:cSld>
     <p:bg>
@@ -3542,20 +3895,56 @@
       <p:grpSpPr/>
       <p:sp>
         <p:nvSpPr>
-          <p:cNvPr id="2" name="Rectangle 1"/>
+          <p:cNvPr id="2" name="TextBox 1"/>
+          <p:cNvSpPr txBox="1"/>
+          <p:nvPr/>
+        </p:nvSpPr>
+        <p:spPr>
+          <a:xfrm>
+            <a:off x="457200" y="274320"/>
+            <a:ext cx="8229600" cy="457200"/>
+          </a:xfrm>
+          <a:prstGeom prst="rect">
+            <a:avLst/>
+          </a:prstGeom>
+          <a:noFill/>
+        </p:spPr>
+        <p:txBody>
+          <a:bodyPr wrap="square" lIns="45720" rIns="45720" tIns="27432" bIns="27432">
+            <a:spAutoFit/>
+          </a:bodyPr>
+          <a:lstStyle/>
+          <a:p>
+            <a:pPr algn="l">
+              <a:defRPr sz="2400" b="1">
+                <a:solidFill>
+                  <a:srgbClr val="F5F0E8"/>
+                </a:solidFill>
+                <a:latin typeface="Calibri"/>
+              </a:defRPr>
+            </a:pPr>
+            <a:r>
+              <a:t>Quick Poll</a:t>
+            </a:r>
+          </a:p>
+        </p:txBody>
+      </p:sp>
+      <p:sp>
+        <p:nvSpPr>
+          <p:cNvPr id="3" name="Rectangle 2"/>
           <p:cNvSpPr/>
           <p:nvPr/>
         </p:nvSpPr>
         <p:spPr>
           <a:xfrm>
-            <a:off x="365760" y="274320"/>
-            <a:ext cx="2286000" cy="73152"/>
+            <a:off x="457200" y="777240"/>
+            <a:ext cx="1828800" cy="54864"/>
           </a:xfrm>
           <a:prstGeom prst="rect">
             <a:avLst/>
           </a:prstGeom>
           <a:solidFill>
-            <a:srgbClr val="4EB8A9"/>
+            <a:srgbClr val="E89B3B"/>
           </a:solidFill>
           <a:ln>
             <a:noFill/>
@@ -3579,96 +3968,20 @@
           <a:bodyPr rtlCol="0" anchor="ctr"/>
           <a:lstStyle/>
           <a:p>
-            <a:pPr algn="ctr">
-              <a:defRPr/>
-            </a:pPr>
-          </a:p>
-        </p:txBody>
-      </p:sp>
-      <p:sp>
-        <p:nvSpPr>
-          <p:cNvPr id="3" name="TextBox 2"/>
-          <p:cNvSpPr txBox="1"/>
-          <p:nvPr/>
-        </p:nvSpPr>
-        <p:spPr>
-          <a:xfrm>
-            <a:off x="365760" y="502920"/>
-            <a:ext cx="8229600" cy="518159"/>
-          </a:xfrm>
-          <a:prstGeom prst="rect">
-            <a:avLst/>
-          </a:prstGeom>
-          <a:noFill/>
-        </p:spPr>
-        <p:txBody>
-          <a:bodyPr wrap="square">
-            <a:spAutoFit/>
-          </a:bodyPr>
-          <a:lstStyle/>
-          <a:p>
-            <a:pPr algn="l">
-              <a:defRPr sz="2400" b="1">
-                <a:solidFill>
-                  <a:srgbClr val="F5F0E8"/>
-                </a:solidFill>
-                <a:latin typeface="Calibri"/>
-              </a:defRPr>
-            </a:pPr>
-            <a:r>
-              <a:rPr/>
-              <a:t>今日の学習目標</a:t>
-            </a:r>
-          </a:p>
-        </p:txBody>
-      </p:sp>
-      <p:sp>
-        <p:nvSpPr>
-          <p:cNvPr id="4" name="TextBox 3"/>
-          <p:cNvSpPr txBox="1"/>
-          <p:nvPr/>
-        </p:nvSpPr>
-        <p:spPr>
-          <a:xfrm>
-            <a:off x="365760" y="1097280"/>
-            <a:ext cx="8229600" cy="340360"/>
-          </a:xfrm>
-          <a:prstGeom prst="rect">
-            <a:avLst/>
-          </a:prstGeom>
-          <a:noFill/>
-        </p:spPr>
-        <p:txBody>
-          <a:bodyPr wrap="square">
-            <a:spAutoFit/>
-          </a:bodyPr>
-          <a:lstStyle/>
-          <a:p>
-            <a:pPr algn="l">
-              <a:defRPr sz="1400" b="0">
-                <a:solidFill>
-                  <a:srgbClr val="7A8A9A"/>
-                </a:solidFill>
-                <a:latin typeface="Calibri"/>
-              </a:defRPr>
-            </a:pPr>
-            <a:r>
-              <a:rPr/>
-              <a:t>この15分の後、あなたは:</a:t>
-            </a:r>
-          </a:p>
-        </p:txBody>
-      </p:sp>
-      <p:sp>
-        <p:nvSpPr>
-          <p:cNvPr id="5" name="Rectangle 4"/>
+            <a:pPr algn="ctr"/>
+          </a:p>
+        </p:txBody>
+      </p:sp>
+      <p:sp>
+        <p:nvSpPr>
+          <p:cNvPr id="4" name="Rectangle 3"/>
           <p:cNvSpPr/>
           <p:nvPr/>
         </p:nvSpPr>
         <p:spPr>
           <a:xfrm>
-            <a:off x="457200" y="1645920"/>
-            <a:ext cx="8229600" cy="640080"/>
+            <a:off x="731520" y="1280160"/>
+            <a:ext cx="7680960" cy="640080"/>
           </a:xfrm>
           <a:prstGeom prst="rect">
             <a:avLst/>
@@ -3700,22 +4013,20 @@
           <a:bodyPr rtlCol="0" anchor="ctr"/>
           <a:lstStyle/>
           <a:p>
-            <a:pPr algn="ctr">
-              <a:defRPr/>
-            </a:pPr>
-          </a:p>
-        </p:txBody>
-      </p:sp>
-      <p:sp>
-        <p:nvSpPr>
-          <p:cNvPr id="6" name="TextBox 5"/>
+            <a:pPr algn="ctr"/>
+          </a:p>
+        </p:txBody>
+      </p:sp>
+      <p:sp>
+        <p:nvSpPr>
+          <p:cNvPr id="5" name="TextBox 4"/>
           <p:cNvSpPr txBox="1"/>
           <p:nvPr/>
         </p:nvSpPr>
         <p:spPr>
           <a:xfrm>
-            <a:off x="594360" y="1719072"/>
-            <a:ext cx="365760" cy="482600"/>
+            <a:off x="914400" y="1371600"/>
+            <a:ext cx="7315200" cy="457200"/>
           </a:xfrm>
           <a:prstGeom prst="rect">
             <a:avLst/>
@@ -3723,73 +4034,35 @@
           <a:noFill/>
         </p:spPr>
         <p:txBody>
-          <a:bodyPr wrap="square">
+          <a:bodyPr wrap="square" lIns="45720" rIns="45720" tIns="27432" bIns="27432">
             <a:spAutoFit/>
           </a:bodyPr>
           <a:lstStyle/>
           <a:p>
             <a:pPr algn="l">
-              <a:defRPr sz="2200" b="1">
-                <a:solidFill>
-                  <a:srgbClr val="E89B3B"/>
+              <a:defRPr sz="1600" b="0">
+                <a:solidFill>
+                  <a:srgbClr val="F5F0E8"/>
                 </a:solidFill>
                 <a:latin typeface="Calibri"/>
               </a:defRPr>
             </a:pPr>
             <a:r>
-              <a:rPr/>
-              <a:t>1</a:t>
-            </a:r>
-          </a:p>
-        </p:txBody>
-      </p:sp>
-      <p:sp>
-        <p:nvSpPr>
-          <p:cNvPr id="7" name="TextBox 6"/>
-          <p:cNvSpPr txBox="1"/>
-          <p:nvPr/>
-        </p:nvSpPr>
-        <p:spPr>
-          <a:xfrm>
-            <a:off x="1005840" y="1755648"/>
-            <a:ext cx="7498079" cy="457200"/>
-          </a:xfrm>
-          <a:prstGeom prst="rect">
-            <a:avLst/>
-          </a:prstGeom>
-          <a:noFill/>
-        </p:spPr>
-        <p:txBody>
-          <a:bodyPr wrap="square">
-            <a:spAutoFit/>
-          </a:bodyPr>
-          <a:lstStyle/>
-          <a:p>
-            <a:pPr algn="l">
-              <a:defRPr sz="1400" b="0">
-                <a:solidFill>
-                  <a:srgbClr val="F5F0E8"/>
-                </a:solidFill>
-                <a:latin typeface="Calibri"/>
-              </a:defRPr>
-            </a:pPr>
-            <a:r>
-              <a:rPr/>
-              <a:t>説明できる — 改正で何が変わるのか、3つの柱を述べられる（理解）</a:t>
-            </a:r>
-          </a:p>
-        </p:txBody>
-      </p:sp>
-      <p:sp>
-        <p:nvSpPr>
-          <p:cNvPr id="8" name="Rectangle 7"/>
+              <a:t>✋  倫理指針を読んだことがある人？</a:t>
+            </a:r>
+          </a:p>
+        </p:txBody>
+      </p:sp>
+      <p:sp>
+        <p:nvSpPr>
+          <p:cNvPr id="6" name="Rectangle 5"/>
           <p:cNvSpPr/>
           <p:nvPr/>
         </p:nvSpPr>
         <p:spPr>
           <a:xfrm>
-            <a:off x="457200" y="2423160"/>
-            <a:ext cx="8229600" cy="640080"/>
+            <a:off x="731520" y="2103120"/>
+            <a:ext cx="7680960" cy="640080"/>
           </a:xfrm>
           <a:prstGeom prst="rect">
             <a:avLst/>
@@ -3821,22 +4094,20 @@
           <a:bodyPr rtlCol="0" anchor="ctr"/>
           <a:lstStyle/>
           <a:p>
-            <a:pPr algn="ctr">
-              <a:defRPr/>
-            </a:pPr>
-          </a:p>
-        </p:txBody>
-      </p:sp>
-      <p:sp>
-        <p:nvSpPr>
-          <p:cNvPr id="9" name="TextBox 8"/>
+            <a:pPr algn="ctr"/>
+          </a:p>
+        </p:txBody>
+      </p:sp>
+      <p:sp>
+        <p:nvSpPr>
+          <p:cNvPr id="7" name="TextBox 6"/>
           <p:cNvSpPr txBox="1"/>
           <p:nvPr/>
         </p:nvSpPr>
         <p:spPr>
           <a:xfrm>
-            <a:off x="594360" y="2496312"/>
-            <a:ext cx="365760" cy="482600"/>
+            <a:off x="914400" y="2194560"/>
+            <a:ext cx="7315200" cy="457200"/>
           </a:xfrm>
           <a:prstGeom prst="rect">
             <a:avLst/>
@@ -3844,73 +4115,35 @@
           <a:noFill/>
         </p:spPr>
         <p:txBody>
-          <a:bodyPr wrap="square">
+          <a:bodyPr wrap="square" lIns="45720" rIns="45720" tIns="27432" bIns="27432">
             <a:spAutoFit/>
           </a:bodyPr>
           <a:lstStyle/>
           <a:p>
             <a:pPr algn="l">
-              <a:defRPr sz="2200" b="1">
-                <a:solidFill>
-                  <a:srgbClr val="4EB8A9"/>
+              <a:defRPr sz="1600" b="0">
+                <a:solidFill>
+                  <a:srgbClr val="F5F0E8"/>
                 </a:solidFill>
                 <a:latin typeface="Calibri"/>
               </a:defRPr>
             </a:pPr>
             <a:r>
-              <a:rPr/>
-              <a:t>2</a:t>
-            </a:r>
-          </a:p>
-        </p:txBody>
-      </p:sp>
-      <p:sp>
-        <p:nvSpPr>
-          <p:cNvPr id="10" name="TextBox 9"/>
-          <p:cNvSpPr txBox="1"/>
-          <p:nvPr/>
-        </p:nvSpPr>
-        <p:spPr>
-          <a:xfrm>
-            <a:off x="1005840" y="2532888"/>
-            <a:ext cx="7498079" cy="457200"/>
-          </a:xfrm>
-          <a:prstGeom prst="rect">
-            <a:avLst/>
-          </a:prstGeom>
-          <a:noFill/>
-        </p:spPr>
-        <p:txBody>
-          <a:bodyPr wrap="square">
-            <a:spAutoFit/>
-          </a:bodyPr>
-          <a:lstStyle/>
-          <a:p>
-            <a:pPr algn="l">
-              <a:defRPr sz="1400" b="0">
-                <a:solidFill>
-                  <a:srgbClr val="F5F0E8"/>
-                </a:solidFill>
-                <a:latin typeface="Calibri"/>
-              </a:defRPr>
-            </a:pPr>
-            <a:r>
-              <a:rPr/>
-              <a:t>分析できる — 自分の研究計画に影響する変更点を特定できる（分析）</a:t>
-            </a:r>
-          </a:p>
-        </p:txBody>
-      </p:sp>
-      <p:sp>
-        <p:nvSpPr>
-          <p:cNvPr id="11" name="Rectangle 10"/>
+              <a:t>✋  ICとオプトアウトの違いを説明できる人？</a:t>
+            </a:r>
+          </a:p>
+        </p:txBody>
+      </p:sp>
+      <p:sp>
+        <p:nvSpPr>
+          <p:cNvPr id="8" name="Rectangle 7"/>
           <p:cNvSpPr/>
           <p:nvPr/>
         </p:nvSpPr>
         <p:spPr>
           <a:xfrm>
-            <a:off x="457200" y="3200400"/>
-            <a:ext cx="8229600" cy="640080"/>
+            <a:off x="731520" y="2926080"/>
+            <a:ext cx="7680960" cy="640080"/>
           </a:xfrm>
           <a:prstGeom prst="rect">
             <a:avLst/>
@@ -3942,9 +4175,131 @@
           <a:bodyPr rtlCol="0" anchor="ctr"/>
           <a:lstStyle/>
           <a:p>
-            <a:pPr algn="ctr">
-              <a:defRPr/>
+            <a:pPr algn="ctr"/>
+          </a:p>
+        </p:txBody>
+      </p:sp>
+      <p:sp>
+        <p:nvSpPr>
+          <p:cNvPr id="9" name="TextBox 8"/>
+          <p:cNvSpPr txBox="1"/>
+          <p:nvPr/>
+        </p:nvSpPr>
+        <p:spPr>
+          <a:xfrm>
+            <a:off x="914400" y="3017520"/>
+            <a:ext cx="7315200" cy="457200"/>
+          </a:xfrm>
+          <a:prstGeom prst="rect">
+            <a:avLst/>
+          </a:prstGeom>
+          <a:noFill/>
+        </p:spPr>
+        <p:txBody>
+          <a:bodyPr wrap="square" lIns="45720" rIns="45720" tIns="27432" bIns="27432">
+            <a:spAutoFit/>
+          </a:bodyPr>
+          <a:lstStyle/>
+          <a:p>
+            <a:pPr algn="l">
+              <a:defRPr sz="1600" b="0">
+                <a:solidFill>
+                  <a:srgbClr val="F5F0E8"/>
+                </a:solidFill>
+                <a:latin typeface="Calibri"/>
+              </a:defRPr>
             </a:pPr>
+            <a:r>
+              <a:t>✋  仮名加工情報を扱ったことがある人？</a:t>
+            </a:r>
+          </a:p>
+        </p:txBody>
+      </p:sp>
+      <p:sp>
+        <p:nvSpPr>
+          <p:cNvPr id="10" name="Rectangle 9"/>
+          <p:cNvSpPr/>
+          <p:nvPr/>
+        </p:nvSpPr>
+        <p:spPr>
+          <a:xfrm>
+            <a:off x="457200" y="3931920"/>
+            <a:ext cx="54864" cy="548640"/>
+          </a:xfrm>
+          <a:prstGeom prst="rect">
+            <a:avLst/>
+          </a:prstGeom>
+          <a:solidFill>
+            <a:srgbClr val="E89B3B"/>
+          </a:solidFill>
+          <a:ln>
+            <a:noFill/>
+          </a:ln>
+        </p:spPr>
+        <p:style>
+          <a:lnRef idx="1">
+            <a:schemeClr val="accent1"/>
+          </a:lnRef>
+          <a:fillRef idx="3">
+            <a:schemeClr val="accent1"/>
+          </a:fillRef>
+          <a:effectRef idx="2">
+            <a:schemeClr val="accent1"/>
+          </a:effectRef>
+          <a:fontRef idx="minor">
+            <a:schemeClr val="lt1"/>
+          </a:fontRef>
+        </p:style>
+        <p:txBody>
+          <a:bodyPr rtlCol="0" anchor="ctr"/>
+          <a:lstStyle/>
+          <a:p>
+            <a:pPr algn="ctr"/>
+          </a:p>
+        </p:txBody>
+      </p:sp>
+      <p:sp>
+        <p:nvSpPr>
+          <p:cNvPr id="11" name="Rectangle 10"/>
+          <p:cNvSpPr/>
+          <p:nvPr/>
+        </p:nvSpPr>
+        <p:spPr>
+          <a:xfrm>
+            <a:off x="566928" y="3931920"/>
+            <a:ext cx="8119872" cy="548640"/>
+          </a:xfrm>
+          <a:prstGeom prst="rect">
+            <a:avLst/>
+          </a:prstGeom>
+          <a:solidFill>
+            <a:srgbClr val="FFFFFF"/>
+          </a:solidFill>
+          <a:ln w="12700">
+            <a:solidFill>
+              <a:srgbClr val="4EB8A9"/>
+            </a:solidFill>
+          </a:ln>
+        </p:spPr>
+        <p:style>
+          <a:lnRef idx="1">
+            <a:schemeClr val="accent1"/>
+          </a:lnRef>
+          <a:fillRef idx="3">
+            <a:schemeClr val="accent1"/>
+          </a:fillRef>
+          <a:effectRef idx="2">
+            <a:schemeClr val="accent1"/>
+          </a:effectRef>
+          <a:fontRef idx="minor">
+            <a:schemeClr val="lt1"/>
+          </a:fontRef>
+        </p:style>
+        <p:txBody>
+          <a:bodyPr rtlCol="0" anchor="ctr"/>
+          <a:lstStyle/>
+          <a:p>
+            <a:pPr algn="ctr"/>
           </a:p>
         </p:txBody>
       </p:sp>
@@ -3956,8 +4311,8 @@
         </p:nvSpPr>
         <p:spPr>
           <a:xfrm>
-            <a:off x="594360" y="3273552"/>
-            <a:ext cx="365760" cy="482600"/>
+            <a:off x="685800" y="4005072"/>
+            <a:ext cx="7863840" cy="402335"/>
           </a:xfrm>
           <a:prstGeom prst="rect">
             <a:avLst/>
@@ -3965,96 +4320,21 @@
           <a:noFill/>
         </p:spPr>
         <p:txBody>
-          <a:bodyPr wrap="square">
+          <a:bodyPr wrap="square" lIns="45720" rIns="45720" tIns="27432" bIns="27432">
             <a:spAutoFit/>
           </a:bodyPr>
           <a:lstStyle/>
           <a:p>
             <a:pPr algn="l">
-              <a:defRPr sz="2200" b="1">
-                <a:solidFill>
-                  <a:srgbClr val="4EB8A9"/>
-                </a:solidFill>
-                <a:latin typeface="Calibri"/>
+              <a:defRPr sz="1200" b="0">
+                <a:solidFill>
+                  <a:srgbClr val="1A1A2E"/>
+                </a:solidFill>
+                <a:latin typeface="Georgia"/>
               </a:defRPr>
             </a:pPr>
             <a:r>
-              <a:rPr/>
-              <a:t>3</a:t>
-            </a:r>
-          </a:p>
-        </p:txBody>
-      </p:sp>
-      <p:sp>
-        <p:nvSpPr>
-          <p:cNvPr id="13" name="TextBox 12"/>
-          <p:cNvSpPr txBox="1"/>
-          <p:nvPr/>
-        </p:nvSpPr>
-        <p:spPr>
-          <a:xfrm>
-            <a:off x="1005840" y="3310128"/>
-            <a:ext cx="7498079" cy="457200"/>
-          </a:xfrm>
-          <a:prstGeom prst="rect">
-            <a:avLst/>
-          </a:prstGeom>
-          <a:noFill/>
-        </p:spPr>
-        <p:txBody>
-          <a:bodyPr wrap="square">
-            <a:spAutoFit/>
-          </a:bodyPr>
-          <a:lstStyle/>
-          <a:p>
-            <a:pPr algn="l">
-              <a:defRPr sz="1400" b="0">
-                <a:solidFill>
-                  <a:srgbClr val="F5F0E8"/>
-                </a:solidFill>
-                <a:latin typeface="Calibri"/>
-              </a:defRPr>
-            </a:pPr>
-            <a:r>
-              <a:rPr/>
-              <a:t>作成できる — 新指針に準拠した研究計画書の骨子を書き始められる（創造）</a:t>
-            </a:r>
-          </a:p>
-        </p:txBody>
-      </p:sp>
-      <p:sp>
-        <p:nvSpPr>
-          <p:cNvPr id="14" name="TextBox 13"/>
-          <p:cNvSpPr txBox="1"/>
-          <p:nvPr/>
-        </p:nvSpPr>
-        <p:spPr>
-          <a:xfrm>
-            <a:off x="365760" y="4663440"/>
-            <a:ext cx="5486400" cy="274320"/>
-          </a:xfrm>
-          <a:prstGeom prst="rect">
-            <a:avLst/>
-          </a:prstGeom>
-          <a:noFill/>
-        </p:spPr>
-        <p:txBody>
-          <a:bodyPr wrap="square">
-            <a:spAutoFit/>
-          </a:bodyPr>
-          <a:lstStyle/>
-          <a:p>
-            <a:pPr algn="l">
-              <a:defRPr sz="800" b="0">
-                <a:solidFill>
-                  <a:srgbClr val="7A8A9A"/>
-                </a:solidFill>
-                <a:latin typeface="Calibri"/>
-              </a:defRPr>
-            </a:pPr>
-            <a:r>
-              <a:rPr/>
-              <a:t>事象2: 学習目標を知らせる</a:t>
+              <a:t>今日は「同意のとり方」と「個人情報の種類」の2軸で整理します。</a:t>
             </a:r>
           </a:p>
         </p:txBody>
@@ -4067,7 +4347,7 @@
 </p:sld>
 </file>
 
-<file path=ppt/slides/slide3.xml><?xml version="1.0" encoding="utf-8"?>
+<file path=ppt/slides/slide4.xml><?xml version="1.0" encoding="utf-8"?>
 <p:sld xmlns:a="http://schemas.openxmlformats.org/drawingml/2006/main" xmlns:p="http://schemas.openxmlformats.org/presentationml/2006/main" xmlns:r="http://schemas.openxmlformats.org/officeDocument/2006/relationships">
   <p:cSld>
     <p:bg>
@@ -4087,14 +4367,50 @@
       <p:grpSpPr/>
       <p:sp>
         <p:nvSpPr>
-          <p:cNvPr id="2" name="Rectangle 1"/>
+          <p:cNvPr id="2" name="TextBox 1"/>
+          <p:cNvSpPr txBox="1"/>
+          <p:nvPr/>
+        </p:nvSpPr>
+        <p:spPr>
+          <a:xfrm>
+            <a:off x="457200" y="182880"/>
+            <a:ext cx="8229600" cy="457200"/>
+          </a:xfrm>
+          <a:prstGeom prst="rect">
+            <a:avLst/>
+          </a:prstGeom>
+          <a:noFill/>
+        </p:spPr>
+        <p:txBody>
+          <a:bodyPr wrap="square" lIns="45720" rIns="45720" tIns="27432" bIns="27432">
+            <a:spAutoFit/>
+          </a:bodyPr>
+          <a:lstStyle/>
+          <a:p>
+            <a:pPr algn="l">
+              <a:defRPr sz="2400" b="1">
+                <a:solidFill>
+                  <a:srgbClr val="1A1A2E"/>
+                </a:solidFill>
+                <a:latin typeface="Calibri"/>
+              </a:defRPr>
+            </a:pPr>
+            <a:r>
+              <a:t>改正の3つの柱</a:t>
+            </a:r>
+          </a:p>
+        </p:txBody>
+      </p:sp>
+      <p:sp>
+        <p:nvSpPr>
+          <p:cNvPr id="3" name="Rectangle 2"/>
           <p:cNvSpPr/>
           <p:nvPr/>
         </p:nvSpPr>
         <p:spPr>
           <a:xfrm>
-            <a:off x="365760" y="274320"/>
-            <a:ext cx="2286000" cy="73152"/>
+            <a:off x="457200" y="658368"/>
+            <a:ext cx="1828800" cy="54864"/>
           </a:xfrm>
           <a:prstGeom prst="rect">
             <a:avLst/>
@@ -4124,164 +4440,65 @@
           <a:bodyPr rtlCol="0" anchor="ctr"/>
           <a:lstStyle/>
           <a:p>
-            <a:pPr algn="ctr">
-              <a:defRPr/>
-            </a:pPr>
-          </a:p>
-        </p:txBody>
-      </p:sp>
-      <p:sp>
-        <p:nvSpPr>
-          <p:cNvPr id="3" name="TextBox 2"/>
-          <p:cNvSpPr txBox="1"/>
-          <p:nvPr/>
-        </p:nvSpPr>
-        <p:spPr>
-          <a:xfrm>
-            <a:off x="365760" y="502920"/>
-            <a:ext cx="8229600" cy="482600"/>
-          </a:xfrm>
-          <a:prstGeom prst="rect">
-            <a:avLst/>
-          </a:prstGeom>
-          <a:noFill/>
-        </p:spPr>
-        <p:txBody>
-          <a:bodyPr wrap="square">
-            <a:spAutoFit/>
-          </a:bodyPr>
-          <a:lstStyle/>
-          <a:p>
-            <a:pPr algn="l">
-              <a:defRPr sz="2200" b="1">
-                <a:solidFill>
-                  <a:srgbClr val="1A1A2E"/>
-                </a:solidFill>
-                <a:latin typeface="Calibri"/>
-              </a:defRPr>
-            </a:pPr>
-            <a:r>
-              <a:rPr/>
-              <a:t>まず確認 — 現行指針、どこまで知っていますか？</a:t>
-            </a:r>
-          </a:p>
-        </p:txBody>
-      </p:sp>
-      <p:sp>
-        <p:nvSpPr>
-          <p:cNvPr id="4" name="TextBox 3"/>
-          <p:cNvSpPr txBox="1"/>
-          <p:nvPr/>
-        </p:nvSpPr>
-        <p:spPr>
-          <a:xfrm>
-            <a:off x="365760" y="1051560"/>
-            <a:ext cx="2743200" cy="340360"/>
-          </a:xfrm>
-          <a:prstGeom prst="rect">
-            <a:avLst/>
-          </a:prstGeom>
-          <a:noFill/>
-        </p:spPr>
-        <p:txBody>
-          <a:bodyPr wrap="square">
-            <a:spAutoFit/>
-          </a:bodyPr>
-          <a:lstStyle/>
-          <a:p>
-            <a:pPr algn="l">
-              <a:defRPr sz="1400" b="1">
-                <a:solidFill>
-                  <a:srgbClr val="E89B3B"/>
-                </a:solidFill>
-                <a:latin typeface="Calibri"/>
-              </a:defRPr>
-            </a:pPr>
-            <a:r>
-              <a:rPr/>
-              <a:t>Quick Poll（挙手）</a:t>
-            </a:r>
-          </a:p>
-        </p:txBody>
-      </p:sp>
-      <p:sp>
-        <p:nvSpPr>
-          <p:cNvPr id="5" name="TextBox 4"/>
-          <p:cNvSpPr txBox="1"/>
-          <p:nvPr/>
-        </p:nvSpPr>
-        <p:spPr>
-          <a:xfrm>
-            <a:off x="457200" y="1463040"/>
-            <a:ext cx="4572000" cy="1371600"/>
-          </a:xfrm>
-          <a:prstGeom prst="rect">
-            <a:avLst/>
-          </a:prstGeom>
-          <a:noFill/>
-        </p:spPr>
-        <p:txBody>
-          <a:bodyPr wrap="square">
-            <a:spAutoFit/>
-          </a:bodyPr>
-          <a:lstStyle/>
-          <a:p>
-            <a:pPr>
-              <a:defRPr sz="1200">
-                <a:solidFill>
-                  <a:srgbClr val="1A1A2E"/>
-                </a:solidFill>
-                <a:latin typeface="Calibri"/>
-              </a:defRPr>
-              <a:buChar char="●"/>
-            </a:pPr>
-            <a:r>
-              <a:rPr/>
-              <a:t>「人を対象とする生命科学・医学系研究に関する倫理指針」を読んだことがある人？</a:t>
-            </a:r>
-          </a:p>
-          <a:p>
-            <a:pPr>
-              <a:defRPr sz="1200">
-                <a:solidFill>
-                  <a:srgbClr val="1A1A2E"/>
-                </a:solidFill>
-                <a:latin typeface="Calibri"/>
-              </a:defRPr>
-              <a:buChar char="●"/>
-            </a:pPr>
-            <a:r>
-              <a:rPr/>
-              <a:t>ICとオプトアウトの違いを説明できる人？</a:t>
-            </a:r>
-          </a:p>
-          <a:p>
-            <a:pPr>
-              <a:defRPr sz="1200">
-                <a:solidFill>
-                  <a:srgbClr val="1A1A2E"/>
-                </a:solidFill>
-                <a:latin typeface="Calibri"/>
-              </a:defRPr>
-              <a:buChar char="●"/>
-            </a:pPr>
-            <a:r>
-              <a:rPr/>
-              <a:t>自分の研究で仮名加工情報を扱ったことがある人？</a:t>
-            </a:r>
-          </a:p>
-        </p:txBody>
-      </p:sp>
-      <p:sp>
-        <p:nvSpPr>
-          <p:cNvPr id="6" name="Rectangle 5"/>
+            <a:pPr algn="ctr"/>
+          </a:p>
+        </p:txBody>
+      </p:sp>
+      <p:sp>
+        <p:nvSpPr>
+          <p:cNvPr id="4" name="Rectangle 3"/>
           <p:cNvSpPr/>
           <p:nvPr/>
         </p:nvSpPr>
         <p:spPr>
           <a:xfrm>
-            <a:off x="365760" y="3017520"/>
-            <a:ext cx="54864" cy="640080"/>
+            <a:off x="457200" y="914400"/>
+            <a:ext cx="8229600" cy="1188720"/>
+          </a:xfrm>
+          <a:prstGeom prst="rect">
+            <a:avLst/>
+          </a:prstGeom>
+          <a:solidFill>
+            <a:srgbClr val="E8F0F0"/>
+          </a:solidFill>
+          <a:ln w="12700">
+            <a:solidFill>
+              <a:srgbClr val="4EB8A9"/>
+            </a:solidFill>
+          </a:ln>
+        </p:spPr>
+        <p:style>
+          <a:lnRef idx="1">
+            <a:schemeClr val="accent1"/>
+          </a:lnRef>
+          <a:fillRef idx="3">
+            <a:schemeClr val="accent1"/>
+          </a:fillRef>
+          <a:effectRef idx="2">
+            <a:schemeClr val="accent1"/>
+          </a:effectRef>
+          <a:fontRef idx="minor">
+            <a:schemeClr val="lt1"/>
+          </a:fontRef>
+        </p:style>
+        <p:txBody>
+          <a:bodyPr rtlCol="0" anchor="ctr"/>
+          <a:lstStyle/>
+          <a:p>
+            <a:pPr algn="ctr"/>
+          </a:p>
+        </p:txBody>
+      </p:sp>
+      <p:sp>
+        <p:nvSpPr>
+          <p:cNvPr id="5" name="Rectangle 4"/>
+          <p:cNvSpPr/>
+          <p:nvPr/>
+        </p:nvSpPr>
+        <p:spPr>
+          <a:xfrm>
+            <a:off x="640080" y="1051560"/>
+            <a:ext cx="548640" cy="548640"/>
           </a:xfrm>
           <a:prstGeom prst="rect">
             <a:avLst/>
@@ -4311,28 +4528,138 @@
           <a:bodyPr rtlCol="0" anchor="ctr"/>
           <a:lstStyle/>
           <a:p>
+            <a:pPr algn="ctr"/>
+          </a:p>
+        </p:txBody>
+      </p:sp>
+      <p:sp>
+        <p:nvSpPr>
+          <p:cNvPr id="6" name="TextBox 5"/>
+          <p:cNvSpPr txBox="1"/>
+          <p:nvPr/>
+        </p:nvSpPr>
+        <p:spPr>
+          <a:xfrm>
+            <a:off x="640080" y="1051560"/>
+            <a:ext cx="548640" cy="548640"/>
+          </a:xfrm>
+          <a:prstGeom prst="rect">
+            <a:avLst/>
+          </a:prstGeom>
+          <a:noFill/>
+        </p:spPr>
+        <p:txBody>
+          <a:bodyPr wrap="square" lIns="45720" rIns="45720" tIns="27432" bIns="27432">
+            <a:spAutoFit/>
+          </a:bodyPr>
+          <a:lstStyle/>
+          <a:p>
             <a:pPr algn="ctr">
-              <a:defRPr/>
+              <a:defRPr sz="2400" b="1">
+                <a:solidFill>
+                  <a:srgbClr val="0D2B3E"/>
+                </a:solidFill>
+                <a:latin typeface="Calibri"/>
+              </a:defRPr>
             </a:pPr>
-          </a:p>
-        </p:txBody>
-      </p:sp>
-      <p:sp>
-        <p:nvSpPr>
-          <p:cNvPr id="7" name="Rectangle 6"/>
+            <a:r>
+              <a:t>1</a:t>
+            </a:r>
+          </a:p>
+        </p:txBody>
+      </p:sp>
+      <p:sp>
+        <p:nvSpPr>
+          <p:cNvPr id="7" name="TextBox 6"/>
+          <p:cNvSpPr txBox="1"/>
+          <p:nvPr/>
+        </p:nvSpPr>
+        <p:spPr>
+          <a:xfrm>
+            <a:off x="1371600" y="1005840"/>
+            <a:ext cx="3657600" cy="457200"/>
+          </a:xfrm>
+          <a:prstGeom prst="rect">
+            <a:avLst/>
+          </a:prstGeom>
+          <a:noFill/>
+        </p:spPr>
+        <p:txBody>
+          <a:bodyPr wrap="square" lIns="45720" rIns="45720" tIns="27432" bIns="27432">
+            <a:spAutoFit/>
+          </a:bodyPr>
+          <a:lstStyle/>
+          <a:p>
+            <a:pPr algn="l">
+              <a:defRPr sz="1600" b="1">
+                <a:solidFill>
+                  <a:srgbClr val="1A1A2E"/>
+                </a:solidFill>
+                <a:latin typeface="Calibri"/>
+              </a:defRPr>
+            </a:pPr>
+            <a:r>
+              <a:t>同意手続きの簡素化</a:t>
+            </a:r>
+          </a:p>
+        </p:txBody>
+      </p:sp>
+      <p:sp>
+        <p:nvSpPr>
+          <p:cNvPr id="8" name="TextBox 7"/>
+          <p:cNvSpPr txBox="1"/>
+          <p:nvPr/>
+        </p:nvSpPr>
+        <p:spPr>
+          <a:xfrm>
+            <a:off x="1371600" y="1417320"/>
+            <a:ext cx="6858000" cy="548640"/>
+          </a:xfrm>
+          <a:prstGeom prst="rect">
+            <a:avLst/>
+          </a:prstGeom>
+          <a:noFill/>
+        </p:spPr>
+        <p:txBody>
+          <a:bodyPr wrap="square" lIns="45720" rIns="45720" tIns="27432" bIns="27432">
+            <a:spAutoFit/>
+          </a:bodyPr>
+          <a:lstStyle/>
+          <a:p>
+            <a:pPr algn="l">
+              <a:defRPr sz="1100" b="0">
+                <a:solidFill>
+                  <a:srgbClr val="1A1A2E"/>
+                </a:solidFill>
+                <a:latin typeface="Calibri"/>
+              </a:defRPr>
+            </a:pPr>
+            <a:r>
+              <a:t>ICとオプトアウトの二元化</a:t>
+            </a:r>
+            <a:br/>
+            <a:r>
+              <a:t>場面ごとの分岐ルール → シンプルに</a:t>
+            </a:r>
+          </a:p>
+        </p:txBody>
+      </p:sp>
+      <p:sp>
+        <p:nvSpPr>
+          <p:cNvPr id="9" name="Rectangle 8"/>
           <p:cNvSpPr/>
           <p:nvPr/>
         </p:nvSpPr>
         <p:spPr>
           <a:xfrm>
-            <a:off x="475488" y="3017520"/>
-            <a:ext cx="4645152" cy="640080"/>
+            <a:off x="457200" y="2286000"/>
+            <a:ext cx="8229600" cy="1188720"/>
           </a:xfrm>
           <a:prstGeom prst="rect">
             <a:avLst/>
           </a:prstGeom>
           <a:solidFill>
-            <a:srgbClr val="FFFFFF"/>
+            <a:srgbClr val="E8F0F0"/>
           </a:solidFill>
           <a:ln w="12700">
             <a:solidFill>
@@ -4358,22 +4685,63 @@
           <a:bodyPr rtlCol="0" anchor="ctr"/>
           <a:lstStyle/>
           <a:p>
-            <a:pPr algn="ctr">
-              <a:defRPr/>
-            </a:pPr>
-          </a:p>
-        </p:txBody>
-      </p:sp>
-      <p:sp>
-        <p:nvSpPr>
-          <p:cNvPr id="8" name="TextBox 7"/>
+            <a:pPr algn="ctr"/>
+          </a:p>
+        </p:txBody>
+      </p:sp>
+      <p:sp>
+        <p:nvSpPr>
+          <p:cNvPr id="10" name="Rectangle 9"/>
+          <p:cNvSpPr/>
+          <p:nvPr/>
+        </p:nvSpPr>
+        <p:spPr>
+          <a:xfrm>
+            <a:off x="640080" y="2423160"/>
+            <a:ext cx="548640" cy="548640"/>
+          </a:xfrm>
+          <a:prstGeom prst="rect">
+            <a:avLst/>
+          </a:prstGeom>
+          <a:solidFill>
+            <a:srgbClr val="E89B3B"/>
+          </a:solidFill>
+          <a:ln>
+            <a:noFill/>
+          </a:ln>
+        </p:spPr>
+        <p:style>
+          <a:lnRef idx="1">
+            <a:schemeClr val="accent1"/>
+          </a:lnRef>
+          <a:fillRef idx="3">
+            <a:schemeClr val="accent1"/>
+          </a:fillRef>
+          <a:effectRef idx="2">
+            <a:schemeClr val="accent1"/>
+          </a:effectRef>
+          <a:fontRef idx="minor">
+            <a:schemeClr val="lt1"/>
+          </a:fontRef>
+        </p:style>
+        <p:txBody>
+          <a:bodyPr rtlCol="0" anchor="ctr"/>
+          <a:lstStyle/>
+          <a:p>
+            <a:pPr algn="ctr"/>
+          </a:p>
+        </p:txBody>
+      </p:sp>
+      <p:sp>
+        <p:nvSpPr>
+          <p:cNvPr id="11" name="TextBox 10"/>
           <p:cNvSpPr txBox="1"/>
           <p:nvPr/>
         </p:nvSpPr>
         <p:spPr>
           <a:xfrm>
-            <a:off x="594360" y="3090672"/>
-            <a:ext cx="4389120" cy="493775"/>
+            <a:off x="640080" y="2423160"/>
+            <a:ext cx="548640" cy="548640"/>
           </a:xfrm>
           <a:prstGeom prst="rect">
             <a:avLst/>
@@ -4381,41 +4749,199 @@
           <a:noFill/>
         </p:spPr>
         <p:txBody>
-          <a:bodyPr wrap="square">
+          <a:bodyPr wrap="square" lIns="45720" rIns="45720" tIns="27432" bIns="27432">
             <a:spAutoFit/>
           </a:bodyPr>
           <a:lstStyle/>
           <a:p>
+            <a:pPr algn="ctr">
+              <a:defRPr sz="2400" b="1">
+                <a:solidFill>
+                  <a:srgbClr val="0D2B3E"/>
+                </a:solidFill>
+                <a:latin typeface="Calibri"/>
+              </a:defRPr>
+            </a:pPr>
+            <a:r>
+              <a:t>2</a:t>
+            </a:r>
+          </a:p>
+        </p:txBody>
+      </p:sp>
+      <p:sp>
+        <p:nvSpPr>
+          <p:cNvPr id="12" name="TextBox 11"/>
+          <p:cNvSpPr txBox="1"/>
+          <p:nvPr/>
+        </p:nvSpPr>
+        <p:spPr>
+          <a:xfrm>
+            <a:off x="1371600" y="2377440"/>
+            <a:ext cx="3657600" cy="457200"/>
+          </a:xfrm>
+          <a:prstGeom prst="rect">
+            <a:avLst/>
+          </a:prstGeom>
+          <a:noFill/>
+        </p:spPr>
+        <p:txBody>
+          <a:bodyPr wrap="square" lIns="45720" rIns="45720" tIns="27432" bIns="27432">
+            <a:spAutoFit/>
+          </a:bodyPr>
+          <a:lstStyle/>
+          <a:p>
+            <a:pPr algn="l">
+              <a:defRPr sz="1600" b="1">
+                <a:solidFill>
+                  <a:srgbClr val="1A1A2E"/>
+                </a:solidFill>
+                <a:latin typeface="Calibri"/>
+              </a:defRPr>
+            </a:pPr>
+            <a:r>
+              <a:t>仮名加工情報の活用拡大</a:t>
+            </a:r>
+          </a:p>
+        </p:txBody>
+      </p:sp>
+      <p:sp>
+        <p:nvSpPr>
+          <p:cNvPr id="13" name="TextBox 12"/>
+          <p:cNvSpPr txBox="1"/>
+          <p:nvPr/>
+        </p:nvSpPr>
+        <p:spPr>
+          <a:xfrm>
+            <a:off x="1371600" y="2788920"/>
+            <a:ext cx="6858000" cy="548640"/>
+          </a:xfrm>
+          <a:prstGeom prst="rect">
+            <a:avLst/>
+          </a:prstGeom>
+          <a:noFill/>
+        </p:spPr>
+        <p:txBody>
+          <a:bodyPr wrap="square" lIns="45720" rIns="45720" tIns="27432" bIns="27432">
+            <a:spAutoFit/>
+          </a:bodyPr>
+          <a:lstStyle/>
+          <a:p>
             <a:pPr algn="l">
               <a:defRPr sz="1100" b="0">
                 <a:solidFill>
                   <a:srgbClr val="1A1A2E"/>
                 </a:solidFill>
-                <a:latin typeface="Georgia"/>
+                <a:latin typeface="Calibri"/>
               </a:defRPr>
             </a:pPr>
             <a:r>
-              <a:rPr/>
-              <a:t>今日は「同意のとり方」と「個人情報の種類」の2つを軸に、</a:t>
+              <a:t>自機関で作成 → ICなし（オプトアウト）でOK</a:t>
             </a:r>
             <a:br/>
             <a:r>
-              <a:rPr/>
-              <a:t>改正のポイントを整理します。</a:t>
-            </a:r>
-          </a:p>
-        </p:txBody>
-      </p:sp>
-      <p:sp>
-        <p:nvSpPr>
-          <p:cNvPr id="9" name="TextBox 8"/>
+              <a:t>匿名加工情報の利用制限を撤廃</a:t>
+            </a:r>
+          </a:p>
+        </p:txBody>
+      </p:sp>
+      <p:sp>
+        <p:nvSpPr>
+          <p:cNvPr id="14" name="Rectangle 13"/>
+          <p:cNvSpPr/>
+          <p:nvPr/>
+        </p:nvSpPr>
+        <p:spPr>
+          <a:xfrm>
+            <a:off x="457200" y="3657600"/>
+            <a:ext cx="8229600" cy="1188720"/>
+          </a:xfrm>
+          <a:prstGeom prst="rect">
+            <a:avLst/>
+          </a:prstGeom>
+          <a:solidFill>
+            <a:srgbClr val="E8F0F0"/>
+          </a:solidFill>
+          <a:ln w="12700">
+            <a:solidFill>
+              <a:srgbClr val="4EB8A9"/>
+            </a:solidFill>
+          </a:ln>
+        </p:spPr>
+        <p:style>
+          <a:lnRef idx="1">
+            <a:schemeClr val="accent1"/>
+          </a:lnRef>
+          <a:fillRef idx="3">
+            <a:schemeClr val="accent1"/>
+          </a:fillRef>
+          <a:effectRef idx="2">
+            <a:schemeClr val="accent1"/>
+          </a:effectRef>
+          <a:fontRef idx="minor">
+            <a:schemeClr val="lt1"/>
+          </a:fontRef>
+        </p:style>
+        <p:txBody>
+          <a:bodyPr rtlCol="0" anchor="ctr"/>
+          <a:lstStyle/>
+          <a:p>
+            <a:pPr algn="ctr"/>
+          </a:p>
+        </p:txBody>
+      </p:sp>
+      <p:sp>
+        <p:nvSpPr>
+          <p:cNvPr id="15" name="Rectangle 14"/>
+          <p:cNvSpPr/>
+          <p:nvPr/>
+        </p:nvSpPr>
+        <p:spPr>
+          <a:xfrm>
+            <a:off x="640080" y="3794760"/>
+            <a:ext cx="548640" cy="548640"/>
+          </a:xfrm>
+          <a:prstGeom prst="rect">
+            <a:avLst/>
+          </a:prstGeom>
+          <a:solidFill>
+            <a:srgbClr val="E89B3B"/>
+          </a:solidFill>
+          <a:ln>
+            <a:noFill/>
+          </a:ln>
+        </p:spPr>
+        <p:style>
+          <a:lnRef idx="1">
+            <a:schemeClr val="accent1"/>
+          </a:lnRef>
+          <a:fillRef idx="3">
+            <a:schemeClr val="accent1"/>
+          </a:fillRef>
+          <a:effectRef idx="2">
+            <a:schemeClr val="accent1"/>
+          </a:effectRef>
+          <a:fontRef idx="minor">
+            <a:schemeClr val="lt1"/>
+          </a:fontRef>
+        </p:style>
+        <p:txBody>
+          <a:bodyPr rtlCol="0" anchor="ctr"/>
+          <a:lstStyle/>
+          <a:p>
+            <a:pPr algn="ctr"/>
+          </a:p>
+        </p:txBody>
+      </p:sp>
+      <p:sp>
+        <p:nvSpPr>
+          <p:cNvPr id="16" name="TextBox 15"/>
           <p:cNvSpPr txBox="1"/>
           <p:nvPr/>
         </p:nvSpPr>
         <p:spPr>
           <a:xfrm>
-            <a:off x="5303520" y="1051560"/>
-            <a:ext cx="3657600" cy="322579"/>
+            <a:off x="640080" y="3794760"/>
+            <a:ext cx="548640" cy="548640"/>
           </a:xfrm>
           <a:prstGeom prst="rect">
             <a:avLst/>
@@ -4423,312 +4949,35 @@
           <a:noFill/>
         </p:spPr>
         <p:txBody>
-          <a:bodyPr wrap="square">
+          <a:bodyPr wrap="square" lIns="45720" rIns="45720" tIns="27432" bIns="27432">
             <a:spAutoFit/>
           </a:bodyPr>
           <a:lstStyle/>
           <a:p>
-            <a:pPr algn="l">
-              <a:defRPr sz="1300" b="1">
-                <a:solidFill>
-                  <a:srgbClr val="1A1A2E"/>
+            <a:pPr algn="ctr">
+              <a:defRPr sz="2400" b="1">
+                <a:solidFill>
+                  <a:srgbClr val="0D2B3E"/>
                 </a:solidFill>
                 <a:latin typeface="Calibri"/>
               </a:defRPr>
             </a:pPr>
             <a:r>
-              <a:rPr/>
-              <a:t>現行指針の基本構造</a:t>
-            </a:r>
-          </a:p>
-        </p:txBody>
-      </p:sp>
-      <p:graphicFrame>
-        <p:nvGraphicFramePr>
-          <p:cNvPr id="10" name="Table 9"/>
-          <p:cNvGraphicFramePr>
-            <a:graphicFrameLocks noGrp="1"/>
-          </p:cNvGraphicFramePr>
-          <p:nvPr/>
-        </p:nvGraphicFramePr>
-        <p:xfrm>
-          <a:off x="5303520" y="1417320"/>
-          <a:ext cx="3474720" cy="1600200"/>
-        </p:xfrm>
-        <a:graphic>
-          <a:graphicData uri="http://schemas.openxmlformats.org/drawingml/2006/table">
-            <a:tbl>
-              <a:tblPr firstRow="1" bandRow="1">
-                <a:tableStyleId>{5C22544A-7EE6-4342-B048-85BDC9FD1C3A}</a:tableStyleId>
-              </a:tblPr>
-              <a:tblGrid>
-                <a:gridCol w="731520"/>
-                <a:gridCol w="2743200"/>
-              </a:tblGrid>
-              <a:tr h="320040">
-                <a:tc>
-                  <a:txBody>
-                    <a:bodyPr/>
-                    <a:lstStyle/>
-                    <a:p>
-                      <a:pPr>
-                        <a:defRPr sz="900" b="1">
-                          <a:solidFill>
-                            <a:srgbClr val="F5F0E8"/>
-                          </a:solidFill>
-                          <a:latin typeface="Calibri"/>
-                        </a:defRPr>
-                      </a:pPr>
-                      <a:r>
-                        <a:t>章</a:t>
-                      </a:r>
-                    </a:p>
-                  </a:txBody>
-                  <a:tcPr>
-                    <a:solidFill>
-                      <a:srgbClr val="0D2B3E"/>
-                    </a:solidFill>
-                  </a:tcPr>
-                </a:tc>
-                <a:tc>
-                  <a:txBody>
-                    <a:bodyPr/>
-                    <a:lstStyle/>
-                    <a:p>
-                      <a:pPr>
-                        <a:defRPr sz="900" b="1">
-                          <a:solidFill>
-                            <a:srgbClr val="F5F0E8"/>
-                          </a:solidFill>
-                          <a:latin typeface="Calibri"/>
-                        </a:defRPr>
-                      </a:pPr>
-                      <a:r>
-                        <a:t>内容</a:t>
-                      </a:r>
-                    </a:p>
-                  </a:txBody>
-                  <a:tcPr>
-                    <a:solidFill>
-                      <a:srgbClr val="0D2B3E"/>
-                    </a:solidFill>
-                  </a:tcPr>
-                </a:tc>
-              </a:tr>
-              <a:tr h="320040">
-                <a:tc>
-                  <a:txBody>
-                    <a:bodyPr/>
-                    <a:lstStyle/>
-                    <a:p>
-                      <a:pPr>
-                        <a:defRPr sz="900">
-                          <a:solidFill>
-                            <a:srgbClr val="1A1A2E"/>
-                          </a:solidFill>
-                          <a:latin typeface="Calibri"/>
-                        </a:defRPr>
-                      </a:pPr>
-                      <a:r>
-                        <a:t>第1章</a:t>
-                      </a:r>
-                    </a:p>
-                  </a:txBody>
-                  <a:tcPr>
-                    <a:solidFill>
-                      <a:srgbClr val="E8F0F0"/>
-                    </a:solidFill>
-                  </a:tcPr>
-                </a:tc>
-                <a:tc>
-                  <a:txBody>
-                    <a:bodyPr/>
-                    <a:lstStyle/>
-                    <a:p>
-                      <a:pPr>
-                        <a:defRPr sz="900">
-                          <a:solidFill>
-                            <a:srgbClr val="1A1A2E"/>
-                          </a:solidFill>
-                          <a:latin typeface="Calibri"/>
-                        </a:defRPr>
-                      </a:pPr>
-                      <a:r>
-                        <a:t>総則（目的・適用範囲・定義）</a:t>
-                      </a:r>
-                    </a:p>
-                  </a:txBody>
-                  <a:tcPr>
-                    <a:solidFill>
-                      <a:srgbClr val="E8F0F0"/>
-                    </a:solidFill>
-                  </a:tcPr>
-                </a:tc>
-              </a:tr>
-              <a:tr h="320040">
-                <a:tc>
-                  <a:txBody>
-                    <a:bodyPr/>
-                    <a:lstStyle/>
-                    <a:p>
-                      <a:pPr>
-                        <a:defRPr sz="900">
-                          <a:solidFill>
-                            <a:srgbClr val="1A1A2E"/>
-                          </a:solidFill>
-                          <a:latin typeface="Calibri"/>
-                        </a:defRPr>
-                      </a:pPr>
-                      <a:r>
-                        <a:t>第2〜7章</a:t>
-                      </a:r>
-                    </a:p>
-                  </a:txBody>
-                  <a:tcPr>
-                    <a:solidFill>
-                      <a:srgbClr val="F5F0E8"/>
-                    </a:solidFill>
-                  </a:tcPr>
-                </a:tc>
-                <a:tc>
-                  <a:txBody>
-                    <a:bodyPr/>
-                    <a:lstStyle/>
-                    <a:p>
-                      <a:pPr>
-                        <a:defRPr sz="900">
-                          <a:solidFill>
-                            <a:srgbClr val="1A1A2E"/>
-                          </a:solidFill>
-                          <a:latin typeface="Calibri"/>
-                        </a:defRPr>
-                      </a:pPr>
-                      <a:r>
-                        <a:t>研究実施の手続（計画書・IC・試料管理等）</a:t>
-                      </a:r>
-                    </a:p>
-                  </a:txBody>
-                  <a:tcPr>
-                    <a:solidFill>
-                      <a:srgbClr val="F5F0E8"/>
-                    </a:solidFill>
-                  </a:tcPr>
-                </a:tc>
-              </a:tr>
-              <a:tr h="320040">
-                <a:tc>
-                  <a:txBody>
-                    <a:bodyPr/>
-                    <a:lstStyle/>
-                    <a:p>
-                      <a:pPr>
-                        <a:defRPr sz="900">
-                          <a:solidFill>
-                            <a:srgbClr val="1A1A2E"/>
-                          </a:solidFill>
-                          <a:latin typeface="Calibri"/>
-                        </a:defRPr>
-                      </a:pPr>
-                      <a:r>
-                        <a:t>第8章</a:t>
-                      </a:r>
-                    </a:p>
-                  </a:txBody>
-                  <a:tcPr>
-                    <a:solidFill>
-                      <a:srgbClr val="E8F0F0"/>
-                    </a:solidFill>
-                  </a:tcPr>
-                </a:tc>
-                <a:tc>
-                  <a:txBody>
-                    <a:bodyPr/>
-                    <a:lstStyle/>
-                    <a:p>
-                      <a:pPr>
-                        <a:defRPr sz="900">
-                          <a:solidFill>
-                            <a:srgbClr val="1A1A2E"/>
-                          </a:solidFill>
-                          <a:latin typeface="Calibri"/>
-                        </a:defRPr>
-                      </a:pPr>
-                      <a:r>
-                        <a:t>倫理審査委員会</a:t>
-                      </a:r>
-                    </a:p>
-                  </a:txBody>
-                  <a:tcPr>
-                    <a:solidFill>
-                      <a:srgbClr val="E8F0F0"/>
-                    </a:solidFill>
-                  </a:tcPr>
-                </a:tc>
-              </a:tr>
-              <a:tr h="320040">
-                <a:tc>
-                  <a:txBody>
-                    <a:bodyPr/>
-                    <a:lstStyle/>
-                    <a:p>
-                      <a:pPr>
-                        <a:defRPr sz="900">
-                          <a:solidFill>
-                            <a:srgbClr val="1A1A2E"/>
-                          </a:solidFill>
-                          <a:latin typeface="Calibri"/>
-                        </a:defRPr>
-                      </a:pPr>
-                      <a:r>
-                        <a:t>第9章</a:t>
-                      </a:r>
-                    </a:p>
-                  </a:txBody>
-                  <a:tcPr>
-                    <a:solidFill>
-                      <a:srgbClr val="F5F0E8"/>
-                    </a:solidFill>
-                  </a:tcPr>
-                </a:tc>
-                <a:tc>
-                  <a:txBody>
-                    <a:bodyPr/>
-                    <a:lstStyle/>
-                    <a:p>
-                      <a:pPr>
-                        <a:defRPr sz="900">
-                          <a:solidFill>
-                            <a:srgbClr val="1A1A2E"/>
-                          </a:solidFill>
-                          <a:latin typeface="Calibri"/>
-                        </a:defRPr>
-                      </a:pPr>
-                      <a:r>
-                        <a:t>個人情報等・匿名加工情報の取扱い</a:t>
-                      </a:r>
-                    </a:p>
-                  </a:txBody>
-                  <a:tcPr>
-                    <a:solidFill>
-                      <a:srgbClr val="F5F0E8"/>
-                    </a:solidFill>
-                  </a:tcPr>
-                </a:tc>
-              </a:tr>
-            </a:tbl>
-          </a:graphicData>
-        </a:graphic>
-      </p:graphicFrame>
-      <p:sp>
-        <p:nvSpPr>
-          <p:cNvPr id="11" name="TextBox 10"/>
+              <a:t>3</a:t>
+            </a:r>
+          </a:p>
+        </p:txBody>
+      </p:sp>
+      <p:sp>
+        <p:nvSpPr>
+          <p:cNvPr id="17" name="TextBox 16"/>
           <p:cNvSpPr txBox="1"/>
           <p:nvPr/>
         </p:nvSpPr>
         <p:spPr>
           <a:xfrm>
-            <a:off x="365760" y="4663440"/>
-            <a:ext cx="5486400" cy="274320"/>
+            <a:off x="1371600" y="3749039"/>
+            <a:ext cx="3657600" cy="457200"/>
           </a:xfrm>
           <a:prstGeom prst="rect">
             <a:avLst/>
@@ -4736,22 +4985,61 @@
           <a:noFill/>
         </p:spPr>
         <p:txBody>
-          <a:bodyPr wrap="square">
+          <a:bodyPr wrap="square" lIns="45720" rIns="45720" tIns="27432" bIns="27432">
             <a:spAutoFit/>
           </a:bodyPr>
           <a:lstStyle/>
           <a:p>
             <a:pPr algn="l">
-              <a:defRPr sz="800" b="0">
-                <a:solidFill>
-                  <a:srgbClr val="7A8A9A"/>
+              <a:defRPr sz="1600" b="1">
+                <a:solidFill>
+                  <a:srgbClr val="1A1A2E"/>
                 </a:solidFill>
                 <a:latin typeface="Calibri"/>
               </a:defRPr>
             </a:pPr>
             <a:r>
-              <a:rPr/>
-              <a:t>事象3: 前提条件の想起</a:t>
+              <a:t>包括同意のルール明確化</a:t>
+            </a:r>
+          </a:p>
+        </p:txBody>
+      </p:sp>
+      <p:sp>
+        <p:nvSpPr>
+          <p:cNvPr id="18" name="TextBox 17"/>
+          <p:cNvSpPr txBox="1"/>
+          <p:nvPr/>
+        </p:nvSpPr>
+        <p:spPr>
+          <a:xfrm>
+            <a:off x="1371600" y="4160520"/>
+            <a:ext cx="6858000" cy="548640"/>
+          </a:xfrm>
+          <a:prstGeom prst="rect">
+            <a:avLst/>
+          </a:prstGeom>
+          <a:noFill/>
+        </p:spPr>
+        <p:txBody>
+          <a:bodyPr wrap="square" lIns="45720" rIns="45720" tIns="27432" bIns="27432">
+            <a:spAutoFit/>
+          </a:bodyPr>
+          <a:lstStyle/>
+          <a:p>
+            <a:pPr algn="l">
+              <a:defRPr sz="1100" b="0">
+                <a:solidFill>
+                  <a:srgbClr val="1A1A2E"/>
+                </a:solidFill>
+                <a:latin typeface="Calibri"/>
+              </a:defRPr>
+            </a:pPr>
+            <a:r>
+              <a:t>包括同意だけでは不十分</a:t>
+            </a:r>
+            <a:br/>
+            <a:r>
+              <a:t>+ オプトアウト手続きが必要に</a:t>
             </a:r>
           </a:p>
         </p:txBody>
@@ -4764,7 +5052,7 @@
 </p:sld>
 </file>
 
-<file path=ppt/slides/slide4.xml><?xml version="1.0" encoding="utf-8"?>
+<file path=ppt/slides/slide5.xml><?xml version="1.0" encoding="utf-8"?>
 <p:sld xmlns:a="http://schemas.openxmlformats.org/drawingml/2006/main" xmlns:p="http://schemas.openxmlformats.org/presentationml/2006/main" xmlns:r="http://schemas.openxmlformats.org/officeDocument/2006/relationships">
   <p:cSld>
     <p:bg>
@@ -4784,14 +5072,50 @@
       <p:grpSpPr/>
       <p:sp>
         <p:nvSpPr>
-          <p:cNvPr id="2" name="Rectangle 1"/>
+          <p:cNvPr id="2" name="TextBox 1"/>
+          <p:cNvSpPr txBox="1"/>
+          <p:nvPr/>
+        </p:nvSpPr>
+        <p:spPr>
+          <a:xfrm>
+            <a:off x="457200" y="182880"/>
+            <a:ext cx="8229600" cy="457200"/>
+          </a:xfrm>
+          <a:prstGeom prst="rect">
+            <a:avLst/>
+          </a:prstGeom>
+          <a:noFill/>
+        </p:spPr>
+        <p:txBody>
+          <a:bodyPr wrap="square" lIns="45720" rIns="45720" tIns="27432" bIns="27432">
+            <a:spAutoFit/>
+          </a:bodyPr>
+          <a:lstStyle/>
+          <a:p>
+            <a:pPr algn="l">
+              <a:defRPr sz="2200" b="1">
+                <a:solidFill>
+                  <a:srgbClr val="F5F0E8"/>
+                </a:solidFill>
+                <a:latin typeface="Calibri"/>
+              </a:defRPr>
+            </a:pPr>
+            <a:r>
+              <a:t>あなたの研究、どの同意が必要？</a:t>
+            </a:r>
+          </a:p>
+        </p:txBody>
+      </p:sp>
+      <p:sp>
+        <p:nvSpPr>
+          <p:cNvPr id="3" name="Rectangle 2"/>
           <p:cNvSpPr/>
           <p:nvPr/>
         </p:nvSpPr>
         <p:spPr>
           <a:xfrm>
-            <a:off x="365760" y="274320"/>
-            <a:ext cx="2286000" cy="73152"/>
+            <a:off x="457200" y="658368"/>
+            <a:ext cx="1828800" cy="54864"/>
           </a:xfrm>
           <a:prstGeom prst="rect">
             <a:avLst/>
@@ -4821,22 +5145,63 @@
           <a:bodyPr rtlCol="0" anchor="ctr"/>
           <a:lstStyle/>
           <a:p>
-            <a:pPr algn="ctr">
-              <a:defRPr/>
-            </a:pPr>
-          </a:p>
-        </p:txBody>
-      </p:sp>
-      <p:sp>
-        <p:nvSpPr>
-          <p:cNvPr id="3" name="TextBox 2"/>
+            <a:pPr algn="ctr"/>
+          </a:p>
+        </p:txBody>
+      </p:sp>
+      <p:sp>
+        <p:nvSpPr>
+          <p:cNvPr id="4" name="Rectangle 3"/>
+          <p:cNvSpPr/>
+          <p:nvPr/>
+        </p:nvSpPr>
+        <p:spPr>
+          <a:xfrm>
+            <a:off x="2286000" y="914400"/>
+            <a:ext cx="4572000" cy="548640"/>
+          </a:xfrm>
+          <a:prstGeom prst="rect">
+            <a:avLst/>
+          </a:prstGeom>
+          <a:solidFill>
+            <a:srgbClr val="E89B3B"/>
+          </a:solidFill>
+          <a:ln>
+            <a:noFill/>
+          </a:ln>
+        </p:spPr>
+        <p:style>
+          <a:lnRef idx="1">
+            <a:schemeClr val="accent1"/>
+          </a:lnRef>
+          <a:fillRef idx="3">
+            <a:schemeClr val="accent1"/>
+          </a:fillRef>
+          <a:effectRef idx="2">
+            <a:schemeClr val="accent1"/>
+          </a:effectRef>
+          <a:fontRef idx="minor">
+            <a:schemeClr val="lt1"/>
+          </a:fontRef>
+        </p:style>
+        <p:txBody>
+          <a:bodyPr rtlCol="0" anchor="ctr"/>
+          <a:lstStyle/>
+          <a:p>
+            <a:pPr algn="ctr"/>
+          </a:p>
+        </p:txBody>
+      </p:sp>
+      <p:sp>
+        <p:nvSpPr>
+          <p:cNvPr id="5" name="TextBox 4"/>
           <p:cNvSpPr txBox="1"/>
           <p:nvPr/>
         </p:nvSpPr>
         <p:spPr>
           <a:xfrm>
-            <a:off x="365760" y="502920"/>
-            <a:ext cx="8229600" cy="518159"/>
+            <a:off x="2286000" y="960120"/>
+            <a:ext cx="4572000" cy="457200"/>
           </a:xfrm>
           <a:prstGeom prst="rect">
             <a:avLst/>
@@ -4844,36 +5209,78 @@
           <a:noFill/>
         </p:spPr>
         <p:txBody>
-          <a:bodyPr wrap="square">
+          <a:bodyPr wrap="square" lIns="45720" rIns="45720" tIns="27432" bIns="27432">
             <a:spAutoFit/>
           </a:bodyPr>
           <a:lstStyle/>
           <a:p>
-            <a:pPr algn="l">
-              <a:defRPr sz="2400" b="1">
-                <a:solidFill>
-                  <a:srgbClr val="F5F0E8"/>
+            <a:pPr algn="ctr">
+              <a:defRPr sz="1600" b="1">
+                <a:solidFill>
+                  <a:srgbClr val="0D2B3E"/>
                 </a:solidFill>
                 <a:latin typeface="Calibri"/>
               </a:defRPr>
             </a:pPr>
             <a:r>
-              <a:rPr/>
-              <a:t>改正の3つの柱</a:t>
-            </a:r>
-          </a:p>
-        </p:txBody>
-      </p:sp>
-      <p:sp>
-        <p:nvSpPr>
-          <p:cNvPr id="4" name="TextBox 3"/>
+              <a:t>研究で使うデータは？</a:t>
+            </a:r>
+          </a:p>
+        </p:txBody>
+      </p:sp>
+      <p:sp>
+        <p:nvSpPr>
+          <p:cNvPr id="6" name="Rectangle 5"/>
+          <p:cNvSpPr/>
+          <p:nvPr/>
+        </p:nvSpPr>
+        <p:spPr>
+          <a:xfrm>
+            <a:off x="274320" y="1828800"/>
+            <a:ext cx="3840480" cy="822960"/>
+          </a:xfrm>
+          <a:prstGeom prst="rect">
+            <a:avLst/>
+          </a:prstGeom>
+          <a:solidFill>
+            <a:srgbClr val="0D2B3E"/>
+          </a:solidFill>
+          <a:ln>
+            <a:noFill/>
+          </a:ln>
+        </p:spPr>
+        <p:style>
+          <a:lnRef idx="1">
+            <a:schemeClr val="accent1"/>
+          </a:lnRef>
+          <a:fillRef idx="3">
+            <a:schemeClr val="accent1"/>
+          </a:fillRef>
+          <a:effectRef idx="2">
+            <a:schemeClr val="accent1"/>
+          </a:effectRef>
+          <a:fontRef idx="minor">
+            <a:schemeClr val="lt1"/>
+          </a:fontRef>
+        </p:style>
+        <p:txBody>
+          <a:bodyPr rtlCol="0" anchor="ctr"/>
+          <a:lstStyle/>
+          <a:p>
+            <a:pPr algn="ctr"/>
+          </a:p>
+        </p:txBody>
+      </p:sp>
+      <p:sp>
+        <p:nvSpPr>
+          <p:cNvPr id="7" name="TextBox 6"/>
           <p:cNvSpPr txBox="1"/>
           <p:nvPr/>
         </p:nvSpPr>
         <p:spPr>
           <a:xfrm>
-            <a:off x="457200" y="1097280"/>
-            <a:ext cx="731520" cy="304799"/>
+            <a:off x="457200" y="1874519"/>
+            <a:ext cx="2286000" cy="731520"/>
           </a:xfrm>
           <a:prstGeom prst="rect">
             <a:avLst/>
@@ -4881,36 +5288,39 @@
           <a:noFill/>
         </p:spPr>
         <p:txBody>
-          <a:bodyPr wrap="square">
+          <a:bodyPr wrap="square" lIns="45720" rIns="45720" tIns="27432" bIns="27432">
             <a:spAutoFit/>
           </a:bodyPr>
           <a:lstStyle/>
           <a:p>
             <a:pPr algn="l">
-              <a:defRPr sz="1200" b="1">
-                <a:solidFill>
-                  <a:srgbClr val="E89B3B"/>
+              <a:defRPr sz="1200" b="0">
+                <a:solidFill>
+                  <a:srgbClr val="F5F0E8"/>
                 </a:solidFill>
                 <a:latin typeface="Calibri"/>
               </a:defRPr>
             </a:pPr>
             <a:r>
-              <a:rPr/>
-              <a:t>柱1</a:t>
-            </a:r>
-          </a:p>
-        </p:txBody>
-      </p:sp>
-      <p:sp>
-        <p:nvSpPr>
-          <p:cNvPr id="5" name="TextBox 4"/>
+              <a:t>新規に採取する試料</a:t>
+            </a:r>
+            <a:br/>
+            <a:r>
+              <a:t>侵襲を伴う</a:t>
+            </a:r>
+          </a:p>
+        </p:txBody>
+      </p:sp>
+      <p:sp>
+        <p:nvSpPr>
+          <p:cNvPr id="8" name="TextBox 7"/>
           <p:cNvSpPr txBox="1"/>
           <p:nvPr/>
         </p:nvSpPr>
         <p:spPr>
           <a:xfrm>
-            <a:off x="457200" y="1420367"/>
-            <a:ext cx="2560320" cy="322579"/>
+            <a:off x="2743200" y="1965960"/>
+            <a:ext cx="1188720" cy="457200"/>
           </a:xfrm>
           <a:prstGeom prst="rect">
             <a:avLst/>
@@ -4918,36 +5328,78 @@
           <a:noFill/>
         </p:spPr>
         <p:txBody>
-          <a:bodyPr wrap="square">
+          <a:bodyPr wrap="square" lIns="45720" rIns="45720" tIns="27432" bIns="27432">
             <a:spAutoFit/>
           </a:bodyPr>
           <a:lstStyle/>
           <a:p>
             <a:pPr algn="l">
-              <a:defRPr sz="1300" b="1">
-                <a:solidFill>
-                  <a:srgbClr val="F5F0E8"/>
+              <a:defRPr sz="1400" b="1">
+                <a:solidFill>
+                  <a:srgbClr val="E89B3B"/>
                 </a:solidFill>
                 <a:latin typeface="Calibri"/>
               </a:defRPr>
             </a:pPr>
             <a:r>
-              <a:rPr/>
-              <a:t>同意手続きの簡素化・一元化</a:t>
-            </a:r>
-          </a:p>
-        </p:txBody>
-      </p:sp>
-      <p:sp>
-        <p:nvSpPr>
-          <p:cNvPr id="6" name="TextBox 5"/>
+              <a:t>→ IC必須</a:t>
+            </a:r>
+          </a:p>
+        </p:txBody>
+      </p:sp>
+      <p:sp>
+        <p:nvSpPr>
+          <p:cNvPr id="9" name="Rectangle 8"/>
+          <p:cNvSpPr/>
+          <p:nvPr/>
+        </p:nvSpPr>
+        <p:spPr>
+          <a:xfrm>
+            <a:off x="4572000" y="1828800"/>
+            <a:ext cx="4297680" cy="822960"/>
+          </a:xfrm>
+          <a:prstGeom prst="rect">
+            <a:avLst/>
+          </a:prstGeom>
+          <a:solidFill>
+            <a:srgbClr val="0D2B3E"/>
+          </a:solidFill>
+          <a:ln>
+            <a:noFill/>
+          </a:ln>
+        </p:spPr>
+        <p:style>
+          <a:lnRef idx="1">
+            <a:schemeClr val="accent1"/>
+          </a:lnRef>
+          <a:fillRef idx="3">
+            <a:schemeClr val="accent1"/>
+          </a:fillRef>
+          <a:effectRef idx="2">
+            <a:schemeClr val="accent1"/>
+          </a:effectRef>
+          <a:fontRef idx="minor">
+            <a:schemeClr val="lt1"/>
+          </a:fontRef>
+        </p:style>
+        <p:txBody>
+          <a:bodyPr rtlCol="0" anchor="ctr"/>
+          <a:lstStyle/>
+          <a:p>
+            <a:pPr algn="ctr"/>
+          </a:p>
+        </p:txBody>
+      </p:sp>
+      <p:sp>
+        <p:nvSpPr>
+          <p:cNvPr id="10" name="TextBox 9"/>
           <p:cNvSpPr txBox="1"/>
           <p:nvPr/>
         </p:nvSpPr>
         <p:spPr>
           <a:xfrm>
-            <a:off x="457200" y="1761234"/>
-            <a:ext cx="2560320" cy="731520"/>
+            <a:off x="4754880" y="1874519"/>
+            <a:ext cx="2286000" cy="731520"/>
           </a:xfrm>
           <a:prstGeom prst="rect">
             <a:avLst/>
@@ -4955,41 +5407,35 @@
           <a:noFill/>
         </p:spPr>
         <p:txBody>
-          <a:bodyPr wrap="square">
+          <a:bodyPr wrap="square" lIns="45720" rIns="45720" tIns="27432" bIns="27432">
             <a:spAutoFit/>
           </a:bodyPr>
           <a:lstStyle/>
           <a:p>
             <a:pPr algn="l">
-              <a:defRPr sz="1000" b="0">
-                <a:solidFill>
-                  <a:srgbClr val="7A8A9A"/>
+              <a:defRPr sz="1200" b="0">
+                <a:solidFill>
+                  <a:srgbClr val="F5F0E8"/>
                 </a:solidFill>
                 <a:latin typeface="Calibri"/>
               </a:defRPr>
             </a:pPr>
             <a:r>
-              <a:rPr/>
-              <a:t>改正前: IC手続きが複雑に分岐</a:t>
-            </a:r>
-            <a:br/>
-            <a:r>
-              <a:rPr/>
-              <a:t>改正後: ICとオプトアウトに二元化</a:t>
-            </a:r>
-          </a:p>
-        </p:txBody>
-      </p:sp>
-      <p:sp>
-        <p:nvSpPr>
-          <p:cNvPr id="7" name="TextBox 6"/>
+              <a:t>既存の試料・情報</a:t>
+            </a:r>
+          </a:p>
+        </p:txBody>
+      </p:sp>
+      <p:sp>
+        <p:nvSpPr>
+          <p:cNvPr id="11" name="TextBox 10"/>
           <p:cNvSpPr txBox="1"/>
           <p:nvPr/>
         </p:nvSpPr>
         <p:spPr>
           <a:xfrm>
-            <a:off x="3291840" y="1097280"/>
-            <a:ext cx="731520" cy="304799"/>
+            <a:off x="7315200" y="1965960"/>
+            <a:ext cx="1371600" cy="457200"/>
           </a:xfrm>
           <a:prstGeom prst="rect">
             <a:avLst/>
@@ -4997,13 +5443,13 @@
           <a:noFill/>
         </p:spPr>
         <p:txBody>
-          <a:bodyPr wrap="square">
+          <a:bodyPr wrap="square" lIns="45720" rIns="45720" tIns="27432" bIns="27432">
             <a:spAutoFit/>
           </a:bodyPr>
           <a:lstStyle/>
           <a:p>
             <a:pPr algn="l">
-              <a:defRPr sz="1200" b="1">
+              <a:defRPr sz="1400" b="1">
                 <a:solidFill>
                   <a:srgbClr val="E89B3B"/>
                 </a:solidFill>
@@ -5011,22 +5457,21 @@
               </a:defRPr>
             </a:pPr>
             <a:r>
-              <a:rPr/>
-              <a:t>柱2</a:t>
-            </a:r>
-          </a:p>
-        </p:txBody>
-      </p:sp>
-      <p:sp>
-        <p:nvSpPr>
-          <p:cNvPr id="8" name="TextBox 7"/>
+              <a:t>→ 下へ</a:t>
+            </a:r>
+          </a:p>
+        </p:txBody>
+      </p:sp>
+      <p:sp>
+        <p:nvSpPr>
+          <p:cNvPr id="12" name="TextBox 11"/>
           <p:cNvSpPr txBox="1"/>
           <p:nvPr/>
         </p:nvSpPr>
         <p:spPr>
           <a:xfrm>
-            <a:off x="3291840" y="1420367"/>
-            <a:ext cx="2560320" cy="457200"/>
+            <a:off x="457200" y="2926080"/>
+            <a:ext cx="4114800" cy="365760"/>
           </a:xfrm>
           <a:prstGeom prst="rect">
             <a:avLst/>
@@ -5034,13 +5479,13 @@
           <a:noFill/>
         </p:spPr>
         <p:txBody>
-          <a:bodyPr wrap="square">
+          <a:bodyPr wrap="square" lIns="45720" rIns="45720" tIns="27432" bIns="27432">
             <a:spAutoFit/>
           </a:bodyPr>
           <a:lstStyle/>
           <a:p>
             <a:pPr algn="l">
-              <a:defRPr sz="1300" b="1">
+              <a:defRPr sz="1200" b="0">
                 <a:solidFill>
                   <a:srgbClr val="F5F0E8"/>
                 </a:solidFill>
@@ -5048,253 +5493,64 @@
               </a:defRPr>
             </a:pPr>
             <a:r>
-              <a:rPr/>
-              <a:t>仮名加工情報・匿名加工情報の</a:t>
-            </a:r>
-            <a:br/>
-            <a:r>
-              <a:rPr/>
-              <a:t>取扱い明確化</a:t>
-            </a:r>
-          </a:p>
-        </p:txBody>
-      </p:sp>
-      <p:graphicFrame>
-        <p:nvGraphicFramePr>
-          <p:cNvPr id="9" name="Table 8"/>
-          <p:cNvGraphicFramePr>
-            <a:graphicFrameLocks noGrp="1"/>
-          </p:cNvGraphicFramePr>
-          <p:nvPr/>
-        </p:nvGraphicFramePr>
-        <p:xfrm>
-          <a:off x="3291840" y="1965960"/>
-          <a:ext cx="2743200" cy="1280160"/>
-        </p:xfrm>
-        <a:graphic>
-          <a:graphicData uri="http://schemas.openxmlformats.org/drawingml/2006/table">
-            <a:tbl>
-              <a:tblPr firstRow="1" bandRow="1">
-                <a:tableStyleId>{5C22544A-7EE6-4342-B048-85BDC9FD1C3A}</a:tableStyleId>
-              </a:tblPr>
-              <a:tblGrid>
-                <a:gridCol w="914400"/>
-                <a:gridCol w="1828800"/>
-              </a:tblGrid>
-              <a:tr h="320040">
-                <a:tc>
-                  <a:txBody>
-                    <a:bodyPr/>
-                    <a:lstStyle/>
-                    <a:p>
-                      <a:pPr>
-                        <a:defRPr sz="800" b="1">
-                          <a:solidFill>
-                            <a:srgbClr val="F5F0E8"/>
-                          </a:solidFill>
-                          <a:latin typeface="Calibri"/>
-                        </a:defRPr>
-                      </a:pPr>
-                      <a:r>
-                        <a:t>種類</a:t>
-                      </a:r>
-                    </a:p>
-                  </a:txBody>
-                  <a:tcPr>
-                    <a:solidFill>
-                      <a:srgbClr val="0D2B3E"/>
-                    </a:solidFill>
-                  </a:tcPr>
-                </a:tc>
-                <a:tc>
-                  <a:txBody>
-                    <a:bodyPr/>
-                    <a:lstStyle/>
-                    <a:p>
-                      <a:pPr>
-                        <a:defRPr sz="800" b="1">
-                          <a:solidFill>
-                            <a:srgbClr val="F5F0E8"/>
-                          </a:solidFill>
-                          <a:latin typeface="Calibri"/>
-                        </a:defRPr>
-                      </a:pPr>
-                      <a:r>
-                        <a:t>改正のポイント</a:t>
-                      </a:r>
-                    </a:p>
-                  </a:txBody>
-                  <a:tcPr>
-                    <a:solidFill>
-                      <a:srgbClr val="0D2B3E"/>
-                    </a:solidFill>
-                  </a:tcPr>
-                </a:tc>
-              </a:tr>
-              <a:tr h="320040">
-                <a:tc>
-                  <a:txBody>
-                    <a:bodyPr/>
-                    <a:lstStyle/>
-                    <a:p>
-                      <a:pPr>
-                        <a:defRPr sz="800">
-                          <a:solidFill>
-                            <a:srgbClr val="1A1A2E"/>
-                          </a:solidFill>
-                          <a:latin typeface="Calibri"/>
-                        </a:defRPr>
-                      </a:pPr>
-                      <a:r>
-                        <a:t>仮名加工情報</a:t>
-                      </a:r>
-                    </a:p>
-                  </a:txBody>
-                  <a:tcPr>
-                    <a:solidFill>
-                      <a:srgbClr val="E8F0F0"/>
-                    </a:solidFill>
-                  </a:tcPr>
-                </a:tc>
-                <a:tc>
-                  <a:txBody>
-                    <a:bodyPr/>
-                    <a:lstStyle/>
-                    <a:p>
-                      <a:pPr>
-                        <a:defRPr sz="800">
-                          <a:solidFill>
-                            <a:srgbClr val="1A1A2E"/>
-                          </a:solidFill>
-                          <a:latin typeface="Calibri"/>
-                        </a:defRPr>
-                      </a:pPr>
-                      <a:r>
-                        <a:t>自機関作成 → ICは必ずしも不要（オプトアウトで可）</a:t>
-                      </a:r>
-                    </a:p>
-                  </a:txBody>
-                  <a:tcPr>
-                    <a:solidFill>
-                      <a:srgbClr val="E8F0F0"/>
-                    </a:solidFill>
-                  </a:tcPr>
-                </a:tc>
-              </a:tr>
-              <a:tr h="320040">
-                <a:tc>
-                  <a:txBody>
-                    <a:bodyPr/>
-                    <a:lstStyle/>
-                    <a:p>
-                      <a:pPr>
-                        <a:defRPr sz="800">
-                          <a:solidFill>
-                            <a:srgbClr val="1A1A2E"/>
-                          </a:solidFill>
-                          <a:latin typeface="Calibri"/>
-                        </a:defRPr>
-                      </a:pPr>
-                      <a:r>
-                        <a:t>匿名加工情報</a:t>
-                      </a:r>
-                    </a:p>
-                  </a:txBody>
-                  <a:tcPr>
-                    <a:solidFill>
-                      <a:srgbClr val="F5F0E8"/>
-                    </a:solidFill>
-                  </a:tcPr>
-                </a:tc>
-                <a:tc>
-                  <a:txBody>
-                    <a:bodyPr/>
-                    <a:lstStyle/>
-                    <a:p>
-                      <a:pPr>
-                        <a:defRPr sz="800">
-                          <a:solidFill>
-                            <a:srgbClr val="1A1A2E"/>
-                          </a:solidFill>
-                          <a:latin typeface="Calibri"/>
-                        </a:defRPr>
-                      </a:pPr>
-                      <a:r>
-                        <a:t>「困難な場合」制限撤廃 → 幅広く利用可能</a:t>
-                      </a:r>
-                    </a:p>
-                  </a:txBody>
-                  <a:tcPr>
-                    <a:solidFill>
-                      <a:srgbClr val="F5F0E8"/>
-                    </a:solidFill>
-                  </a:tcPr>
-                </a:tc>
-              </a:tr>
-              <a:tr h="320040">
-                <a:tc>
-                  <a:txBody>
-                    <a:bodyPr/>
-                    <a:lstStyle/>
-                    <a:p>
-                      <a:pPr>
-                        <a:defRPr sz="800">
-                          <a:solidFill>
-                            <a:srgbClr val="1A1A2E"/>
-                          </a:solidFill>
-                          <a:latin typeface="Calibri"/>
-                        </a:defRPr>
-                      </a:pPr>
-                      <a:r>
-                        <a:t>個人関連情報</a:t>
-                      </a:r>
-                    </a:p>
-                  </a:txBody>
-                  <a:tcPr>
-                    <a:solidFill>
-                      <a:srgbClr val="E8F0F0"/>
-                    </a:solidFill>
-                  </a:tcPr>
-                </a:tc>
-                <a:tc>
-                  <a:txBody>
-                    <a:bodyPr/>
-                    <a:lstStyle/>
-                    <a:p>
-                      <a:pPr>
-                        <a:defRPr sz="800">
-                          <a:solidFill>
-                            <a:srgbClr val="1A1A2E"/>
-                          </a:solidFill>
-                          <a:latin typeface="Calibri"/>
-                        </a:defRPr>
-                      </a:pPr>
-                      <a:r>
-                        <a:t>個人情報保護法に沿った取扱いを明確化</a:t>
-                      </a:r>
-                    </a:p>
-                  </a:txBody>
-                  <a:tcPr>
-                    <a:solidFill>
-                      <a:srgbClr val="E8F0F0"/>
-                    </a:solidFill>
-                  </a:tcPr>
-                </a:tc>
-              </a:tr>
-            </a:tbl>
-          </a:graphicData>
-        </a:graphic>
-      </p:graphicFrame>
-      <p:sp>
-        <p:nvSpPr>
-          <p:cNvPr id="10" name="TextBox 9"/>
+              <a:t>匿名加工情報</a:t>
+            </a:r>
+          </a:p>
+        </p:txBody>
+      </p:sp>
+      <p:sp>
+        <p:nvSpPr>
+          <p:cNvPr id="13" name="Rectangle 12"/>
+          <p:cNvSpPr/>
+          <p:nvPr/>
+        </p:nvSpPr>
+        <p:spPr>
+          <a:xfrm>
+            <a:off x="5029200" y="2926080"/>
+            <a:ext cx="3657600" cy="411480"/>
+          </a:xfrm>
+          <a:prstGeom prst="rect">
+            <a:avLst/>
+          </a:prstGeom>
+          <a:solidFill>
+            <a:srgbClr val="E89B3B"/>
+          </a:solidFill>
+          <a:ln>
+            <a:noFill/>
+          </a:ln>
+        </p:spPr>
+        <p:style>
+          <a:lnRef idx="1">
+            <a:schemeClr val="accent1"/>
+          </a:lnRef>
+          <a:fillRef idx="3">
+            <a:schemeClr val="accent1"/>
+          </a:fillRef>
+          <a:effectRef idx="2">
+            <a:schemeClr val="accent1"/>
+          </a:effectRef>
+          <a:fontRef idx="minor">
+            <a:schemeClr val="lt1"/>
+          </a:fontRef>
+        </p:style>
+        <p:txBody>
+          <a:bodyPr rtlCol="0" anchor="ctr"/>
+          <a:lstStyle/>
+          <a:p>
+            <a:pPr algn="ctr"/>
+          </a:p>
+        </p:txBody>
+      </p:sp>
+      <p:sp>
+        <p:nvSpPr>
+          <p:cNvPr id="14" name="TextBox 13"/>
           <p:cNvSpPr txBox="1"/>
           <p:nvPr/>
         </p:nvSpPr>
         <p:spPr>
           <a:xfrm>
-            <a:off x="6400800" y="1097280"/>
-            <a:ext cx="731520" cy="304799"/>
+            <a:off x="5029200" y="2944368"/>
+            <a:ext cx="3657600" cy="365760"/>
           </a:xfrm>
           <a:prstGeom prst="rect">
             <a:avLst/>
@@ -5302,36 +5558,35 @@
           <a:noFill/>
         </p:spPr>
         <p:txBody>
-          <a:bodyPr wrap="square">
+          <a:bodyPr wrap="square" lIns="45720" rIns="45720" tIns="27432" bIns="27432">
             <a:spAutoFit/>
           </a:bodyPr>
           <a:lstStyle/>
           <a:p>
-            <a:pPr algn="l">
+            <a:pPr algn="ctr">
               <a:defRPr sz="1200" b="1">
                 <a:solidFill>
-                  <a:srgbClr val="E89B3B"/>
+                  <a:srgbClr val="0D2B3E"/>
                 </a:solidFill>
                 <a:latin typeface="Calibri"/>
               </a:defRPr>
             </a:pPr>
             <a:r>
-              <a:rPr/>
-              <a:t>柱3</a:t>
-            </a:r>
-          </a:p>
-        </p:txBody>
-      </p:sp>
-      <p:sp>
-        <p:nvSpPr>
-          <p:cNvPr id="11" name="TextBox 10"/>
+              <a:t>同意不要（制限撤廃）</a:t>
+            </a:r>
+          </a:p>
+        </p:txBody>
+      </p:sp>
+      <p:sp>
+        <p:nvSpPr>
+          <p:cNvPr id="15" name="TextBox 14"/>
           <p:cNvSpPr txBox="1"/>
           <p:nvPr/>
         </p:nvSpPr>
         <p:spPr>
           <a:xfrm>
-            <a:off x="6400800" y="1420367"/>
-            <a:ext cx="2377440" cy="457200"/>
+            <a:off x="457200" y="3429000"/>
+            <a:ext cx="4114800" cy="365760"/>
           </a:xfrm>
           <a:prstGeom prst="rect">
             <a:avLst/>
@@ -5339,13 +5594,13 @@
           <a:noFill/>
         </p:spPr>
         <p:txBody>
-          <a:bodyPr wrap="square">
+          <a:bodyPr wrap="square" lIns="45720" rIns="45720" tIns="27432" bIns="27432">
             <a:spAutoFit/>
           </a:bodyPr>
           <a:lstStyle/>
           <a:p>
             <a:pPr algn="l">
-              <a:defRPr sz="1300" b="1">
+              <a:defRPr sz="1200" b="0">
                 <a:solidFill>
                   <a:srgbClr val="F5F0E8"/>
                 </a:solidFill>
@@ -5353,27 +5608,64 @@
               </a:defRPr>
             </a:pPr>
             <a:r>
-              <a:rPr/>
-              <a:t>包括同意からオプトアウトへの</a:t>
-            </a:r>
-            <a:br/>
-            <a:r>
-              <a:rPr/>
-              <a:t>移行ルール</a:t>
-            </a:r>
-          </a:p>
-        </p:txBody>
-      </p:sp>
-      <p:sp>
-        <p:nvSpPr>
-          <p:cNvPr id="12" name="TextBox 11"/>
+              <a:t>仮名加工情報（自機関作成）</a:t>
+            </a:r>
+          </a:p>
+        </p:txBody>
+      </p:sp>
+      <p:sp>
+        <p:nvSpPr>
+          <p:cNvPr id="16" name="Rectangle 15"/>
+          <p:cNvSpPr/>
+          <p:nvPr/>
+        </p:nvSpPr>
+        <p:spPr>
+          <a:xfrm>
+            <a:off x="5029200" y="3429000"/>
+            <a:ext cx="3657600" cy="411480"/>
+          </a:xfrm>
+          <a:prstGeom prst="rect">
+            <a:avLst/>
+          </a:prstGeom>
+          <a:solidFill>
+            <a:srgbClr val="4EB8A9"/>
+          </a:solidFill>
+          <a:ln>
+            <a:noFill/>
+          </a:ln>
+        </p:spPr>
+        <p:style>
+          <a:lnRef idx="1">
+            <a:schemeClr val="accent1"/>
+          </a:lnRef>
+          <a:fillRef idx="3">
+            <a:schemeClr val="accent1"/>
+          </a:fillRef>
+          <a:effectRef idx="2">
+            <a:schemeClr val="accent1"/>
+          </a:effectRef>
+          <a:fontRef idx="minor">
+            <a:schemeClr val="lt1"/>
+          </a:fontRef>
+        </p:style>
+        <p:txBody>
+          <a:bodyPr rtlCol="0" anchor="ctr"/>
+          <a:lstStyle/>
+          <a:p>
+            <a:pPr algn="ctr"/>
+          </a:p>
+        </p:txBody>
+      </p:sp>
+      <p:sp>
+        <p:nvSpPr>
+          <p:cNvPr id="17" name="TextBox 16"/>
           <p:cNvSpPr txBox="1"/>
           <p:nvPr/>
         </p:nvSpPr>
         <p:spPr>
           <a:xfrm>
-            <a:off x="6400800" y="1965960"/>
-            <a:ext cx="2377440" cy="914400"/>
+            <a:off x="5029200" y="3447288"/>
+            <a:ext cx="3657600" cy="365760"/>
           </a:xfrm>
           <a:prstGeom prst="rect">
             <a:avLst/>
@@ -5381,46 +5673,35 @@
           <a:noFill/>
         </p:spPr>
         <p:txBody>
-          <a:bodyPr wrap="square">
+          <a:bodyPr wrap="square" lIns="45720" rIns="45720" tIns="27432" bIns="27432">
             <a:spAutoFit/>
           </a:bodyPr>
           <a:lstStyle/>
           <a:p>
-            <a:pPr algn="l">
-              <a:defRPr sz="1000" b="0">
-                <a:solidFill>
-                  <a:srgbClr val="7A8A9A"/>
+            <a:pPr algn="ctr">
+              <a:defRPr sz="1200" b="1">
+                <a:solidFill>
+                  <a:srgbClr val="0D2B3E"/>
                 </a:solidFill>
                 <a:latin typeface="Calibri"/>
               </a:defRPr>
             </a:pPr>
             <a:r>
-              <a:rPr/>
-              <a:t>改正前: 包括同意の扱いが不明確</a:t>
-            </a:r>
-            <a:br/>
-            <a:r>
-              <a:rPr/>
-              <a:t>改正後: 包括同意 + オプトアウト</a:t>
-            </a:r>
-            <a:br/>
-            <a:r>
-              <a:rPr/>
-              <a:t>= 新たなICなしで研究利用可能</a:t>
-            </a:r>
-          </a:p>
-        </p:txBody>
-      </p:sp>
-      <p:sp>
-        <p:nvSpPr>
-          <p:cNvPr id="13" name="TextBox 12"/>
+              <a:t>オプトアウトでOK</a:t>
+            </a:r>
+          </a:p>
+        </p:txBody>
+      </p:sp>
+      <p:sp>
+        <p:nvSpPr>
+          <p:cNvPr id="18" name="TextBox 17"/>
           <p:cNvSpPr txBox="1"/>
           <p:nvPr/>
         </p:nvSpPr>
         <p:spPr>
           <a:xfrm>
-            <a:off x="365760" y="4663440"/>
-            <a:ext cx="5486400" cy="274320"/>
+            <a:off x="457200" y="3931920"/>
+            <a:ext cx="4114800" cy="365760"/>
           </a:xfrm>
           <a:prstGeom prst="rect">
             <a:avLst/>
@@ -5428,22 +5709,215 @@
           <a:noFill/>
         </p:spPr>
         <p:txBody>
-          <a:bodyPr wrap="square">
+          <a:bodyPr wrap="square" lIns="45720" rIns="45720" tIns="27432" bIns="27432">
             <a:spAutoFit/>
           </a:bodyPr>
           <a:lstStyle/>
           <a:p>
             <a:pPr algn="l">
-              <a:defRPr sz="800" b="0">
-                <a:solidFill>
-                  <a:srgbClr val="7A8A9A"/>
+              <a:defRPr sz="1200" b="0">
+                <a:solidFill>
+                  <a:srgbClr val="F5F0E8"/>
                 </a:solidFill>
                 <a:latin typeface="Calibri"/>
               </a:defRPr>
             </a:pPr>
             <a:r>
-              <a:rPr/>
-              <a:t>事象4: 新しい内容の提示</a:t>
+              <a:t>包括同意取得済み</a:t>
+            </a:r>
+          </a:p>
+        </p:txBody>
+      </p:sp>
+      <p:sp>
+        <p:nvSpPr>
+          <p:cNvPr id="19" name="Rectangle 18"/>
+          <p:cNvSpPr/>
+          <p:nvPr/>
+        </p:nvSpPr>
+        <p:spPr>
+          <a:xfrm>
+            <a:off x="5029200" y="3931920"/>
+            <a:ext cx="3657600" cy="411480"/>
+          </a:xfrm>
+          <a:prstGeom prst="rect">
+            <a:avLst/>
+          </a:prstGeom>
+          <a:solidFill>
+            <a:srgbClr val="4EB8A9"/>
+          </a:solidFill>
+          <a:ln>
+            <a:noFill/>
+          </a:ln>
+        </p:spPr>
+        <p:style>
+          <a:lnRef idx="1">
+            <a:schemeClr val="accent1"/>
+          </a:lnRef>
+          <a:fillRef idx="3">
+            <a:schemeClr val="accent1"/>
+          </a:fillRef>
+          <a:effectRef idx="2">
+            <a:schemeClr val="accent1"/>
+          </a:effectRef>
+          <a:fontRef idx="minor">
+            <a:schemeClr val="lt1"/>
+          </a:fontRef>
+        </p:style>
+        <p:txBody>
+          <a:bodyPr rtlCol="0" anchor="ctr"/>
+          <a:lstStyle/>
+          <a:p>
+            <a:pPr algn="ctr"/>
+          </a:p>
+        </p:txBody>
+      </p:sp>
+      <p:sp>
+        <p:nvSpPr>
+          <p:cNvPr id="20" name="TextBox 19"/>
+          <p:cNvSpPr txBox="1"/>
+          <p:nvPr/>
+        </p:nvSpPr>
+        <p:spPr>
+          <a:xfrm>
+            <a:off x="5029200" y="3950208"/>
+            <a:ext cx="3657600" cy="365760"/>
+          </a:xfrm>
+          <a:prstGeom prst="rect">
+            <a:avLst/>
+          </a:prstGeom>
+          <a:noFill/>
+        </p:spPr>
+        <p:txBody>
+          <a:bodyPr wrap="square" lIns="45720" rIns="45720" tIns="27432" bIns="27432">
+            <a:spAutoFit/>
+          </a:bodyPr>
+          <a:lstStyle/>
+          <a:p>
+            <a:pPr algn="ctr">
+              <a:defRPr sz="1200" b="1">
+                <a:solidFill>
+                  <a:srgbClr val="0D2B3E"/>
+                </a:solidFill>
+                <a:latin typeface="Calibri"/>
+              </a:defRPr>
+            </a:pPr>
+            <a:r>
+              <a:t>範囲内ならオプトアウト</a:t>
+            </a:r>
+          </a:p>
+        </p:txBody>
+      </p:sp>
+      <p:sp>
+        <p:nvSpPr>
+          <p:cNvPr id="21" name="TextBox 20"/>
+          <p:cNvSpPr txBox="1"/>
+          <p:nvPr/>
+        </p:nvSpPr>
+        <p:spPr>
+          <a:xfrm>
+            <a:off x="457200" y="4434840"/>
+            <a:ext cx="4114800" cy="365760"/>
+          </a:xfrm>
+          <a:prstGeom prst="rect">
+            <a:avLst/>
+          </a:prstGeom>
+          <a:noFill/>
+        </p:spPr>
+        <p:txBody>
+          <a:bodyPr wrap="square" lIns="45720" rIns="45720" tIns="27432" bIns="27432">
+            <a:spAutoFit/>
+          </a:bodyPr>
+          <a:lstStyle/>
+          <a:p>
+            <a:pPr algn="l">
+              <a:defRPr sz="1200" b="0">
+                <a:solidFill>
+                  <a:srgbClr val="F5F0E8"/>
+                </a:solidFill>
+                <a:latin typeface="Calibri"/>
+              </a:defRPr>
+            </a:pPr>
+            <a:r>
+              <a:t>その他の既存情報</a:t>
+            </a:r>
+          </a:p>
+        </p:txBody>
+      </p:sp>
+      <p:sp>
+        <p:nvSpPr>
+          <p:cNvPr id="22" name="Rectangle 21"/>
+          <p:cNvSpPr/>
+          <p:nvPr/>
+        </p:nvSpPr>
+        <p:spPr>
+          <a:xfrm>
+            <a:off x="5029200" y="4434840"/>
+            <a:ext cx="3657600" cy="411480"/>
+          </a:xfrm>
+          <a:prstGeom prst="rect">
+            <a:avLst/>
+          </a:prstGeom>
+          <a:solidFill>
+            <a:srgbClr val="4EB8A9"/>
+          </a:solidFill>
+          <a:ln>
+            <a:noFill/>
+          </a:ln>
+        </p:spPr>
+        <p:style>
+          <a:lnRef idx="1">
+            <a:schemeClr val="accent1"/>
+          </a:lnRef>
+          <a:fillRef idx="3">
+            <a:schemeClr val="accent1"/>
+          </a:fillRef>
+          <a:effectRef idx="2">
+            <a:schemeClr val="accent1"/>
+          </a:effectRef>
+          <a:fontRef idx="minor">
+            <a:schemeClr val="lt1"/>
+          </a:fontRef>
+        </p:style>
+        <p:txBody>
+          <a:bodyPr rtlCol="0" anchor="ctr"/>
+          <a:lstStyle/>
+          <a:p>
+            <a:pPr algn="ctr"/>
+          </a:p>
+        </p:txBody>
+      </p:sp>
+      <p:sp>
+        <p:nvSpPr>
+          <p:cNvPr id="23" name="TextBox 22"/>
+          <p:cNvSpPr txBox="1"/>
+          <p:nvPr/>
+        </p:nvSpPr>
+        <p:spPr>
+          <a:xfrm>
+            <a:off x="5029200" y="4453128"/>
+            <a:ext cx="3657600" cy="365760"/>
+          </a:xfrm>
+          <a:prstGeom prst="rect">
+            <a:avLst/>
+          </a:prstGeom>
+          <a:noFill/>
+        </p:spPr>
+        <p:txBody>
+          <a:bodyPr wrap="square" lIns="45720" rIns="45720" tIns="27432" bIns="27432">
+            <a:spAutoFit/>
+          </a:bodyPr>
+          <a:lstStyle/>
+          <a:p>
+            <a:pPr algn="ctr">
+              <a:defRPr sz="1200" b="1">
+                <a:solidFill>
+                  <a:srgbClr val="0D2B3E"/>
+                </a:solidFill>
+                <a:latin typeface="Calibri"/>
+              </a:defRPr>
+            </a:pPr>
+            <a:r>
+              <a:t>オプトアウトが基本</a:t>
             </a:r>
           </a:p>
         </p:txBody>
@@ -5456,7 +5930,7 @@
 </p:sld>
 </file>
 
-<file path=ppt/slides/slide5.xml><?xml version="1.0" encoding="utf-8"?>
+<file path=ppt/slides/slide6.xml><?xml version="1.0" encoding="utf-8"?>
 <p:sld xmlns:a="http://schemas.openxmlformats.org/drawingml/2006/main" xmlns:p="http://schemas.openxmlformats.org/presentationml/2006/main" xmlns:r="http://schemas.openxmlformats.org/officeDocument/2006/relationships">
   <p:cSld>
     <p:bg>
@@ -5476,20 +5950,56 @@
       <p:grpSpPr/>
       <p:sp>
         <p:nvSpPr>
-          <p:cNvPr id="2" name="Rectangle 1"/>
+          <p:cNvPr id="2" name="TextBox 1"/>
+          <p:cNvSpPr txBox="1"/>
+          <p:nvPr/>
+        </p:nvSpPr>
+        <p:spPr>
+          <a:xfrm>
+            <a:off x="457200" y="182880"/>
+            <a:ext cx="8229600" cy="457200"/>
+          </a:xfrm>
+          <a:prstGeom prst="rect">
+            <a:avLst/>
+          </a:prstGeom>
+          <a:noFill/>
+        </p:spPr>
+        <p:txBody>
+          <a:bodyPr wrap="square" lIns="45720" rIns="45720" tIns="27432" bIns="27432">
+            <a:spAutoFit/>
+          </a:bodyPr>
+          <a:lstStyle/>
+          <a:p>
+            <a:pPr algn="l">
+              <a:defRPr sz="2400" b="1">
+                <a:solidFill>
+                  <a:srgbClr val="1A1A2E"/>
+                </a:solidFill>
+                <a:latin typeface="Calibri"/>
+              </a:defRPr>
+            </a:pPr>
+            <a:r>
+              <a:t>ミニ研究計画書ワーク</a:t>
+            </a:r>
+          </a:p>
+        </p:txBody>
+      </p:sp>
+      <p:sp>
+        <p:nvSpPr>
+          <p:cNvPr id="3" name="Rectangle 2"/>
           <p:cNvSpPr/>
           <p:nvPr/>
         </p:nvSpPr>
         <p:spPr>
           <a:xfrm>
-            <a:off x="365760" y="274320"/>
-            <a:ext cx="2286000" cy="73152"/>
+            <a:off x="457200" y="658368"/>
+            <a:ext cx="1828800" cy="54864"/>
           </a:xfrm>
           <a:prstGeom prst="rect">
             <a:avLst/>
           </a:prstGeom>
           <a:solidFill>
-            <a:srgbClr val="4EB8A9"/>
+            <a:srgbClr val="E89B3B"/>
           </a:solidFill>
           <a:ln>
             <a:noFill/>
@@ -5513,22 +6023,20 @@
           <a:bodyPr rtlCol="0" anchor="ctr"/>
           <a:lstStyle/>
           <a:p>
-            <a:pPr algn="ctr">
-              <a:defRPr/>
-            </a:pPr>
-          </a:p>
-        </p:txBody>
-      </p:sp>
-      <p:sp>
-        <p:nvSpPr>
-          <p:cNvPr id="3" name="TextBox 2"/>
+            <a:pPr algn="ctr"/>
+          </a:p>
+        </p:txBody>
+      </p:sp>
+      <p:sp>
+        <p:nvSpPr>
+          <p:cNvPr id="4" name="TextBox 3"/>
           <p:cNvSpPr txBox="1"/>
           <p:nvPr/>
         </p:nvSpPr>
         <p:spPr>
           <a:xfrm>
-            <a:off x="365760" y="457200"/>
-            <a:ext cx="8229600" cy="482600"/>
+            <a:off x="457200" y="914400"/>
+            <a:ext cx="8229600" cy="274320"/>
           </a:xfrm>
           <a:prstGeom prst="rect">
             <a:avLst/>
@@ -5536,493 +6044,35 @@
           <a:noFill/>
         </p:spPr>
         <p:txBody>
-          <a:bodyPr wrap="square">
+          <a:bodyPr wrap="square" lIns="45720" rIns="45720" tIns="27432" bIns="27432">
             <a:spAutoFit/>
           </a:bodyPr>
           <a:lstStyle/>
           <a:p>
             <a:pPr algn="l">
-              <a:defRPr sz="2200" b="1">
-                <a:solidFill>
-                  <a:srgbClr val="1A1A2E"/>
+              <a:defRPr sz="1300" b="0">
+                <a:solidFill>
+                  <a:srgbClr val="7A8A9A"/>
                 </a:solidFill>
                 <a:latin typeface="Calibri"/>
               </a:defRPr>
             </a:pPr>
             <a:r>
-              <a:rPr/>
-              <a:t>同意の3類型を整理する</a:t>
-            </a:r>
-          </a:p>
-        </p:txBody>
-      </p:sp>
-      <p:graphicFrame>
-        <p:nvGraphicFramePr>
-          <p:cNvPr id="4" name="Table 3"/>
-          <p:cNvGraphicFramePr>
-            <a:graphicFrameLocks noGrp="1"/>
-          </p:cNvGraphicFramePr>
-          <p:nvPr/>
-        </p:nvGraphicFramePr>
-        <p:xfrm>
-          <a:off x="274320" y="1005840"/>
-          <a:ext cx="5120640" cy="1280160"/>
-        </p:xfrm>
-        <a:graphic>
-          <a:graphicData uri="http://schemas.openxmlformats.org/drawingml/2006/table">
-            <a:tbl>
-              <a:tblPr firstRow="1" bandRow="1">
-                <a:tableStyleId>{5C22544A-7EE6-4342-B048-85BDC9FD1C3A}</a:tableStyleId>
-              </a:tblPr>
-              <a:tblGrid>
-                <a:gridCol w="1005840"/>
-                <a:gridCol w="1463040"/>
-                <a:gridCol w="1371600"/>
-                <a:gridCol w="1280160"/>
-              </a:tblGrid>
-              <a:tr h="320040">
-                <a:tc>
-                  <a:txBody>
-                    <a:bodyPr/>
-                    <a:lstStyle/>
-                    <a:p>
-                      <a:pPr>
-                        <a:defRPr sz="800" b="1">
-                          <a:solidFill>
-                            <a:srgbClr val="F5F0E8"/>
-                          </a:solidFill>
-                          <a:latin typeface="Calibri"/>
-                        </a:defRPr>
-                      </a:pPr>
-                      <a:r>
-                        <a:t>同意の種類</a:t>
-                      </a:r>
-                    </a:p>
-                  </a:txBody>
-                  <a:tcPr>
-                    <a:solidFill>
-                      <a:srgbClr val="0D2B3E"/>
-                    </a:solidFill>
-                  </a:tcPr>
-                </a:tc>
-                <a:tc>
-                  <a:txBody>
-                    <a:bodyPr/>
-                    <a:lstStyle/>
-                    <a:p>
-                      <a:pPr>
-                        <a:defRPr sz="800" b="1">
-                          <a:solidFill>
-                            <a:srgbClr val="F5F0E8"/>
-                          </a:solidFill>
-                          <a:latin typeface="Calibri"/>
-                        </a:defRPr>
-                      </a:pPr>
-                      <a:r>
-                        <a:t>何をするか</a:t>
-                      </a:r>
-                    </a:p>
-                  </a:txBody>
-                  <a:tcPr>
-                    <a:solidFill>
-                      <a:srgbClr val="0D2B3E"/>
-                    </a:solidFill>
-                  </a:tcPr>
-                </a:tc>
-                <a:tc>
-                  <a:txBody>
-                    <a:bodyPr/>
-                    <a:lstStyle/>
-                    <a:p>
-                      <a:pPr>
-                        <a:defRPr sz="800" b="1">
-                          <a:solidFill>
-                            <a:srgbClr val="F5F0E8"/>
-                          </a:solidFill>
-                          <a:latin typeface="Calibri"/>
-                        </a:defRPr>
-                      </a:pPr>
-                      <a:r>
-                        <a:t>いつ使うか</a:t>
-                      </a:r>
-                    </a:p>
-                  </a:txBody>
-                  <a:tcPr>
-                    <a:solidFill>
-                      <a:srgbClr val="0D2B3E"/>
-                    </a:solidFill>
-                  </a:tcPr>
-                </a:tc>
-                <a:tc>
-                  <a:txBody>
-                    <a:bodyPr/>
-                    <a:lstStyle/>
-                    <a:p>
-                      <a:pPr>
-                        <a:defRPr sz="800" b="1">
-                          <a:solidFill>
-                            <a:srgbClr val="F5F0E8"/>
-                          </a:solidFill>
-                          <a:latin typeface="Calibri"/>
-                        </a:defRPr>
-                      </a:pPr>
-                      <a:r>
-                        <a:t>改正での位置づけ</a:t>
-                      </a:r>
-                    </a:p>
-                  </a:txBody>
-                  <a:tcPr>
-                    <a:solidFill>
-                      <a:srgbClr val="0D2B3E"/>
-                    </a:solidFill>
-                  </a:tcPr>
-                </a:tc>
-              </a:tr>
-              <a:tr h="320040">
-                <a:tc>
-                  <a:txBody>
-                    <a:bodyPr/>
-                    <a:lstStyle/>
-                    <a:p>
-                      <a:pPr>
-                        <a:defRPr sz="800">
-                          <a:solidFill>
-                            <a:srgbClr val="1A1A2E"/>
-                          </a:solidFill>
-                          <a:latin typeface="Calibri"/>
-                        </a:defRPr>
-                      </a:pPr>
-                      <a:r>
-                        <a:t>IC</a:t>
-                      </a:r>
-                    </a:p>
-                  </a:txBody>
-                  <a:tcPr>
-                    <a:solidFill>
-                      <a:srgbClr val="E8F0F0"/>
-                    </a:solidFill>
-                  </a:tcPr>
-                </a:tc>
-                <a:tc>
-                  <a:txBody>
-                    <a:bodyPr/>
-                    <a:lstStyle/>
-                    <a:p>
-                      <a:pPr>
-                        <a:defRPr sz="800">
-                          <a:solidFill>
-                            <a:srgbClr val="1A1A2E"/>
-                          </a:solidFill>
-                          <a:latin typeface="Calibri"/>
-                        </a:defRPr>
-                      </a:pPr>
-                      <a:r>
-                        <a:t>研究内容を説明し書面同意を取得</a:t>
-                      </a:r>
-                    </a:p>
-                  </a:txBody>
-                  <a:tcPr>
-                    <a:solidFill>
-                      <a:srgbClr val="E8F0F0"/>
-                    </a:solidFill>
-                  </a:tcPr>
-                </a:tc>
-                <a:tc>
-                  <a:txBody>
-                    <a:bodyPr/>
-                    <a:lstStyle/>
-                    <a:p>
-                      <a:pPr>
-                        <a:defRPr sz="800">
-                          <a:solidFill>
-                            <a:srgbClr val="1A1A2E"/>
-                          </a:solidFill>
-                          <a:latin typeface="Calibri"/>
-                        </a:defRPr>
-                      </a:pPr>
-                      <a:r>
-                        <a:t>侵襲を伴う研究、新規試料採取</a:t>
-                      </a:r>
-                    </a:p>
-                  </a:txBody>
-                  <a:tcPr>
-                    <a:solidFill>
-                      <a:srgbClr val="E8F0F0"/>
-                    </a:solidFill>
-                  </a:tcPr>
-                </a:tc>
-                <a:tc>
-                  <a:txBody>
-                    <a:bodyPr/>
-                    <a:lstStyle/>
-                    <a:p>
-                      <a:pPr>
-                        <a:defRPr sz="800">
-                          <a:solidFill>
-                            <a:srgbClr val="1A1A2E"/>
-                          </a:solidFill>
-                          <a:latin typeface="Calibri"/>
-                        </a:defRPr>
-                      </a:pPr>
-                      <a:r>
-                        <a:t>引き続き必要な場面あり</a:t>
-                      </a:r>
-                    </a:p>
-                  </a:txBody>
-                  <a:tcPr>
-                    <a:solidFill>
-                      <a:srgbClr val="E8F0F0"/>
-                    </a:solidFill>
-                  </a:tcPr>
-                </a:tc>
-              </a:tr>
-              <a:tr h="320040">
-                <a:tc>
-                  <a:txBody>
-                    <a:bodyPr/>
-                    <a:lstStyle/>
-                    <a:p>
-                      <a:pPr>
-                        <a:defRPr sz="800">
-                          <a:solidFill>
-                            <a:srgbClr val="1A1A2E"/>
-                          </a:solidFill>
-                          <a:latin typeface="Calibri"/>
-                        </a:defRPr>
-                      </a:pPr>
-                      <a:r>
-                        <a:t>オプトアウト</a:t>
-                      </a:r>
-                    </a:p>
-                  </a:txBody>
-                  <a:tcPr>
-                    <a:solidFill>
-                      <a:srgbClr val="F5F0E8"/>
-                    </a:solidFill>
-                  </a:tcPr>
-                </a:tc>
-                <a:tc>
-                  <a:txBody>
-                    <a:bodyPr/>
-                    <a:lstStyle/>
-                    <a:p>
-                      <a:pPr>
-                        <a:defRPr sz="800">
-                          <a:solidFill>
-                            <a:srgbClr val="1A1A2E"/>
-                          </a:solidFill>
-                          <a:latin typeface="Calibri"/>
-                        </a:defRPr>
-                      </a:pPr>
-                      <a:r>
-                        <a:t>研究情報を公開し拒否機会を保障</a:t>
-                      </a:r>
-                    </a:p>
-                  </a:txBody>
-                  <a:tcPr>
-                    <a:solidFill>
-                      <a:srgbClr val="F5F0E8"/>
-                    </a:solidFill>
-                  </a:tcPr>
-                </a:tc>
-                <a:tc>
-                  <a:txBody>
-                    <a:bodyPr/>
-                    <a:lstStyle/>
-                    <a:p>
-                      <a:pPr>
-                        <a:defRPr sz="800">
-                          <a:solidFill>
-                            <a:srgbClr val="1A1A2E"/>
-                          </a:solidFill>
-                          <a:latin typeface="Calibri"/>
-                        </a:defRPr>
-                      </a:pPr>
-                      <a:r>
-                        <a:t>既存試料・情報、仮名加工情報</a:t>
-                      </a:r>
-                    </a:p>
-                  </a:txBody>
-                  <a:tcPr>
-                    <a:solidFill>
-                      <a:srgbClr val="F5F0E8"/>
-                    </a:solidFill>
-                  </a:tcPr>
-                </a:tc>
-                <a:tc>
-                  <a:txBody>
-                    <a:bodyPr/>
-                    <a:lstStyle/>
-                    <a:p>
-                      <a:pPr>
-                        <a:defRPr sz="800">
-                          <a:solidFill>
-                            <a:srgbClr val="1A1A2E"/>
-                          </a:solidFill>
-                          <a:latin typeface="Calibri"/>
-                        </a:defRPr>
-                      </a:pPr>
-                      <a:r>
-                        <a:t>改正で適用範囲が拡大</a:t>
-                      </a:r>
-                    </a:p>
-                  </a:txBody>
-                  <a:tcPr>
-                    <a:solidFill>
-                      <a:srgbClr val="F5F0E8"/>
-                    </a:solidFill>
-                  </a:tcPr>
-                </a:tc>
-              </a:tr>
-              <a:tr h="320040">
-                <a:tc>
-                  <a:txBody>
-                    <a:bodyPr/>
-                    <a:lstStyle/>
-                    <a:p>
-                      <a:pPr>
-                        <a:defRPr sz="800">
-                          <a:solidFill>
-                            <a:srgbClr val="1A1A2E"/>
-                          </a:solidFill>
-                          <a:latin typeface="Calibri"/>
-                        </a:defRPr>
-                      </a:pPr>
-                      <a:r>
-                        <a:t>包括同意</a:t>
-                      </a:r>
-                    </a:p>
-                  </a:txBody>
-                  <a:tcPr>
-                    <a:solidFill>
-                      <a:srgbClr val="E8F0F0"/>
-                    </a:solidFill>
-                  </a:tcPr>
-                </a:tc>
-                <a:tc>
-                  <a:txBody>
-                    <a:bodyPr/>
-                    <a:lstStyle/>
-                    <a:p>
-                      <a:pPr>
-                        <a:defRPr sz="800">
-                          <a:solidFill>
-                            <a:srgbClr val="1A1A2E"/>
-                          </a:solidFill>
-                          <a:latin typeface="Calibri"/>
-                        </a:defRPr>
-                      </a:pPr>
-                      <a:r>
-                        <a:t>将来の研究利用含む広範な同意</a:t>
-                      </a:r>
-                    </a:p>
-                  </a:txBody>
-                  <a:tcPr>
-                    <a:solidFill>
-                      <a:srgbClr val="E8F0F0"/>
-                    </a:solidFill>
-                  </a:tcPr>
-                </a:tc>
-                <a:tc>
-                  <a:txBody>
-                    <a:bodyPr/>
-                    <a:lstStyle/>
-                    <a:p>
-                      <a:pPr>
-                        <a:defRPr sz="800">
-                          <a:solidFill>
-                            <a:srgbClr val="1A1A2E"/>
-                          </a:solidFill>
-                          <a:latin typeface="Calibri"/>
-                        </a:defRPr>
-                      </a:pPr>
-                      <a:r>
-                        <a:t>バイオバンク、大規模コホート</a:t>
-                      </a:r>
-                    </a:p>
-                  </a:txBody>
-                  <a:tcPr>
-                    <a:solidFill>
-                      <a:srgbClr val="E8F0F0"/>
-                    </a:solidFill>
-                  </a:tcPr>
-                </a:tc>
-                <a:tc>
-                  <a:txBody>
-                    <a:bodyPr/>
-                    <a:lstStyle/>
-                    <a:p>
-                      <a:pPr>
-                        <a:defRPr sz="800">
-                          <a:solidFill>
-                            <a:srgbClr val="1A1A2E"/>
-                          </a:solidFill>
-                          <a:latin typeface="Calibri"/>
-                        </a:defRPr>
-                      </a:pPr>
-                      <a:r>
-                        <a:t>単独では不十分→オプトアウトと組合せ</a:t>
-                      </a:r>
-                    </a:p>
-                  </a:txBody>
-                  <a:tcPr>
-                    <a:solidFill>
-                      <a:srgbClr val="E8F0F0"/>
-                    </a:solidFill>
-                  </a:tcPr>
-                </a:tc>
-              </a:tr>
-            </a:tbl>
-          </a:graphicData>
-        </a:graphic>
-      </p:graphicFrame>
-      <p:sp>
-        <p:nvSpPr>
-          <p:cNvPr id="5" name="TextBox 4"/>
-          <p:cNvSpPr txBox="1"/>
-          <p:nvPr/>
-        </p:nvSpPr>
-        <p:spPr>
-          <a:xfrm>
-            <a:off x="5669280" y="1005840"/>
-            <a:ext cx="3200400" cy="322579"/>
-          </a:xfrm>
-          <a:prstGeom prst="rect">
-            <a:avLst/>
-          </a:prstGeom>
-          <a:noFill/>
-        </p:spPr>
-        <p:txBody>
-          <a:bodyPr wrap="square">
-            <a:spAutoFit/>
-          </a:bodyPr>
-          <a:lstStyle/>
-          <a:p>
-            <a:pPr algn="l">
-              <a:defRPr sz="1300" b="1">
-                <a:solidFill>
-                  <a:srgbClr val="1A1A2E"/>
-                </a:solidFill>
-                <a:latin typeface="Calibri"/>
-              </a:defRPr>
-            </a:pPr>
-            <a:r>
-              <a:rPr/>
-              <a:t>判断フローチャート</a:t>
-            </a:r>
-          </a:p>
-        </p:txBody>
-      </p:sp>
-      <p:sp>
-        <p:nvSpPr>
-          <p:cNvPr id="6" name="Rectangle 5"/>
+              <a:t>ペアワーク 4分 — シナリオを1つ選んで骨子を書く</a:t>
+            </a:r>
+          </a:p>
+        </p:txBody>
+      </p:sp>
+      <p:sp>
+        <p:nvSpPr>
+          <p:cNvPr id="5" name="Rectangle 4"/>
           <p:cNvSpPr/>
           <p:nvPr/>
         </p:nvSpPr>
         <p:spPr>
           <a:xfrm>
-            <a:off x="5669280" y="1371600"/>
-            <a:ext cx="3200400" cy="2926080"/>
+            <a:off x="731520" y="1371600"/>
+            <a:ext cx="7680960" cy="822960"/>
           </a:xfrm>
           <a:prstGeom prst="rect">
             <a:avLst/>
@@ -6054,9 +6104,43 @@
           <a:bodyPr rtlCol="0" anchor="ctr"/>
           <a:lstStyle/>
           <a:p>
-            <a:pPr algn="ctr">
-              <a:defRPr/>
+            <a:pPr algn="ctr"/>
+          </a:p>
+        </p:txBody>
+      </p:sp>
+      <p:sp>
+        <p:nvSpPr>
+          <p:cNvPr id="6" name="TextBox 5"/>
+          <p:cNvSpPr txBox="1"/>
+          <p:nvPr/>
+        </p:nvSpPr>
+        <p:spPr>
+          <a:xfrm>
+            <a:off x="914400" y="1417320"/>
+            <a:ext cx="2286000" cy="365760"/>
+          </a:xfrm>
+          <a:prstGeom prst="rect">
+            <a:avLst/>
+          </a:prstGeom>
+          <a:noFill/>
+        </p:spPr>
+        <p:txBody>
+          <a:bodyPr wrap="square" lIns="45720" rIns="45720" tIns="27432" bIns="27432">
+            <a:spAutoFit/>
+          </a:bodyPr>
+          <a:lstStyle/>
+          <a:p>
+            <a:pPr algn="l">
+              <a:defRPr sz="1500" b="1">
+                <a:solidFill>
+                  <a:srgbClr val="E89B3B"/>
+                </a:solidFill>
+                <a:latin typeface="Calibri"/>
+              </a:defRPr>
             </a:pPr>
+            <a:r>
+              <a:t>A: カルテ後方視</a:t>
+            </a:r>
           </a:p>
         </p:txBody>
       </p:sp>
@@ -6068,8 +6152,8 @@
         </p:nvSpPr>
         <p:spPr>
           <a:xfrm>
-            <a:off x="5806440" y="1463040"/>
-            <a:ext cx="2926080" cy="2743200"/>
+            <a:off x="914400" y="1737360"/>
+            <a:ext cx="7315200" cy="365760"/>
           </a:xfrm>
           <a:prstGeom prst="rect">
             <a:avLst/>
@@ -6077,13 +6161,13 @@
           <a:noFill/>
         </p:spPr>
         <p:txBody>
-          <a:bodyPr wrap="square">
+          <a:bodyPr wrap="square" lIns="45720" rIns="45720" tIns="27432" bIns="27432">
             <a:spAutoFit/>
           </a:bodyPr>
           <a:lstStyle/>
           <a:p>
             <a:pPr algn="l">
-              <a:defRPr sz="900" b="0">
+              <a:defRPr sz="1200" b="0">
                 <a:solidFill>
                   <a:srgbClr val="1A1A2E"/>
                 </a:solidFill>
@@ -6091,65 +6175,66 @@
               </a:defRPr>
             </a:pPr>
             <a:r>
-              <a:rPr/>
-              <a:t>研究で使うデータは？</a:t>
-            </a:r>
-            <a:br/>
-            <a:br/>
-            <a:r>
-              <a:rPr/>
-              <a:t>├ 新規採取・侵襲あり</a:t>
-            </a:r>
-            <a:br/>
-            <a:r>
-              <a:rPr/>
-              <a:t>│  → IC必須</a:t>
-            </a:r>
-            <a:br/>
-            <a:br/>
-            <a:r>
-              <a:rPr/>
-              <a:t>├ 既存の試料・情報</a:t>
-            </a:r>
-            <a:br/>
-            <a:r>
-              <a:rPr/>
-              <a:t>│  ├ 匿名加工情報 → 同意不要</a:t>
-            </a:r>
-            <a:br/>
-            <a:r>
-              <a:rPr/>
-              <a:t>│  ├ 仮名加工（自機関）→ オプトアウト</a:t>
-            </a:r>
-            <a:br/>
-            <a:r>
-              <a:rPr/>
-              <a:t>│  └ その他 → オプトアウトが基本</a:t>
-            </a:r>
-            <a:br/>
-            <a:br/>
-            <a:r>
-              <a:rPr/>
-              <a:t>└ 包括同意取得済み</a:t>
-            </a:r>
-            <a:br/>
-            <a:r>
-              <a:rPr/>
-              <a:t>   → 範囲内特定 + オプトアウト → 利用可</a:t>
-            </a:r>
-          </a:p>
-        </p:txBody>
-      </p:sp>
-      <p:sp>
-        <p:nvSpPr>
-          <p:cNvPr id="8" name="TextBox 7"/>
+              <a:t>自施設の糖尿病患者500名のカルテデータを後方視的に解析したい</a:t>
+            </a:r>
+          </a:p>
+        </p:txBody>
+      </p:sp>
+      <p:sp>
+        <p:nvSpPr>
+          <p:cNvPr id="8" name="Rectangle 7"/>
+          <p:cNvSpPr/>
+          <p:nvPr/>
+        </p:nvSpPr>
+        <p:spPr>
+          <a:xfrm>
+            <a:off x="731520" y="2377440"/>
+            <a:ext cx="7680960" cy="822960"/>
+          </a:xfrm>
+          <a:prstGeom prst="rect">
+            <a:avLst/>
+          </a:prstGeom>
+          <a:solidFill>
+            <a:srgbClr val="E8F0F0"/>
+          </a:solidFill>
+          <a:ln w="12700">
+            <a:solidFill>
+              <a:srgbClr val="4EB8A9"/>
+            </a:solidFill>
+          </a:ln>
+        </p:spPr>
+        <p:style>
+          <a:lnRef idx="1">
+            <a:schemeClr val="accent1"/>
+          </a:lnRef>
+          <a:fillRef idx="3">
+            <a:schemeClr val="accent1"/>
+          </a:fillRef>
+          <a:effectRef idx="2">
+            <a:schemeClr val="accent1"/>
+          </a:effectRef>
+          <a:fontRef idx="minor">
+            <a:schemeClr val="lt1"/>
+          </a:fontRef>
+        </p:style>
+        <p:txBody>
+          <a:bodyPr rtlCol="0" anchor="ctr"/>
+          <a:lstStyle/>
+          <a:p>
+            <a:pPr algn="ctr"/>
+          </a:p>
+        </p:txBody>
+      </p:sp>
+      <p:sp>
+        <p:nvSpPr>
+          <p:cNvPr id="9" name="TextBox 8"/>
           <p:cNvSpPr txBox="1"/>
           <p:nvPr/>
         </p:nvSpPr>
         <p:spPr>
           <a:xfrm>
-            <a:off x="365760" y="4663440"/>
-            <a:ext cx="5486400" cy="274320"/>
+            <a:off x="914400" y="2423160"/>
+            <a:ext cx="2286000" cy="365760"/>
           </a:xfrm>
           <a:prstGeom prst="rect">
             <a:avLst/>
@@ -6157,22 +6242,246 @@
           <a:noFill/>
         </p:spPr>
         <p:txBody>
-          <a:bodyPr wrap="square">
+          <a:bodyPr wrap="square" lIns="45720" rIns="45720" tIns="27432" bIns="27432">
             <a:spAutoFit/>
           </a:bodyPr>
           <a:lstStyle/>
           <a:p>
             <a:pPr algn="l">
-              <a:defRPr sz="800" b="0">
-                <a:solidFill>
-                  <a:srgbClr val="7A8A9A"/>
+              <a:defRPr sz="1500" b="1">
+                <a:solidFill>
+                  <a:srgbClr val="E89B3B"/>
                 </a:solidFill>
                 <a:latin typeface="Calibri"/>
               </a:defRPr>
             </a:pPr>
             <a:r>
-              <a:rPr/>
-              <a:t>事象5: 学習の指針を与える</a:t>
+              <a:t>B: バイオバンク</a:t>
+            </a:r>
+          </a:p>
+        </p:txBody>
+      </p:sp>
+      <p:sp>
+        <p:nvSpPr>
+          <p:cNvPr id="10" name="TextBox 9"/>
+          <p:cNvSpPr txBox="1"/>
+          <p:nvPr/>
+        </p:nvSpPr>
+        <p:spPr>
+          <a:xfrm>
+            <a:off x="914400" y="2743200"/>
+            <a:ext cx="7315200" cy="365760"/>
+          </a:xfrm>
+          <a:prstGeom prst="rect">
+            <a:avLst/>
+          </a:prstGeom>
+          <a:noFill/>
+        </p:spPr>
+        <p:txBody>
+          <a:bodyPr wrap="square" lIns="45720" rIns="45720" tIns="27432" bIns="27432">
+            <a:spAutoFit/>
+          </a:bodyPr>
+          <a:lstStyle/>
+          <a:p>
+            <a:pPr algn="l">
+              <a:defRPr sz="1200" b="0">
+                <a:solidFill>
+                  <a:srgbClr val="1A1A2E"/>
+                </a:solidFill>
+                <a:latin typeface="Calibri"/>
+              </a:defRPr>
+            </a:pPr>
+            <a:r>
+              <a:t>包括同意取得済みの血液検体で新しいバイオマーカーを探索したい</a:t>
+            </a:r>
+          </a:p>
+        </p:txBody>
+      </p:sp>
+      <p:sp>
+        <p:nvSpPr>
+          <p:cNvPr id="11" name="Rectangle 10"/>
+          <p:cNvSpPr/>
+          <p:nvPr/>
+        </p:nvSpPr>
+        <p:spPr>
+          <a:xfrm>
+            <a:off x="731520" y="3383280"/>
+            <a:ext cx="7680960" cy="822960"/>
+          </a:xfrm>
+          <a:prstGeom prst="rect">
+            <a:avLst/>
+          </a:prstGeom>
+          <a:solidFill>
+            <a:srgbClr val="E8F0F0"/>
+          </a:solidFill>
+          <a:ln w="12700">
+            <a:solidFill>
+              <a:srgbClr val="4EB8A9"/>
+            </a:solidFill>
+          </a:ln>
+        </p:spPr>
+        <p:style>
+          <a:lnRef idx="1">
+            <a:schemeClr val="accent1"/>
+          </a:lnRef>
+          <a:fillRef idx="3">
+            <a:schemeClr val="accent1"/>
+          </a:fillRef>
+          <a:effectRef idx="2">
+            <a:schemeClr val="accent1"/>
+          </a:effectRef>
+          <a:fontRef idx="minor">
+            <a:schemeClr val="lt1"/>
+          </a:fontRef>
+        </p:style>
+        <p:txBody>
+          <a:bodyPr rtlCol="0" anchor="ctr"/>
+          <a:lstStyle/>
+          <a:p>
+            <a:pPr algn="ctr"/>
+          </a:p>
+        </p:txBody>
+      </p:sp>
+      <p:sp>
+        <p:nvSpPr>
+          <p:cNvPr id="12" name="TextBox 11"/>
+          <p:cNvSpPr txBox="1"/>
+          <p:nvPr/>
+        </p:nvSpPr>
+        <p:spPr>
+          <a:xfrm>
+            <a:off x="914400" y="3429000"/>
+            <a:ext cx="2286000" cy="365760"/>
+          </a:xfrm>
+          <a:prstGeom prst="rect">
+            <a:avLst/>
+          </a:prstGeom>
+          <a:noFill/>
+        </p:spPr>
+        <p:txBody>
+          <a:bodyPr wrap="square" lIns="45720" rIns="45720" tIns="27432" bIns="27432">
+            <a:spAutoFit/>
+          </a:bodyPr>
+          <a:lstStyle/>
+          <a:p>
+            <a:pPr algn="l">
+              <a:defRPr sz="1500" b="1">
+                <a:solidFill>
+                  <a:srgbClr val="E89B3B"/>
+                </a:solidFill>
+                <a:latin typeface="Calibri"/>
+              </a:defRPr>
+            </a:pPr>
+            <a:r>
+              <a:t>C: AI画像解析</a:t>
+            </a:r>
+          </a:p>
+        </p:txBody>
+      </p:sp>
+      <p:sp>
+        <p:nvSpPr>
+          <p:cNvPr id="13" name="TextBox 12"/>
+          <p:cNvSpPr txBox="1"/>
+          <p:nvPr/>
+        </p:nvSpPr>
+        <p:spPr>
+          <a:xfrm>
+            <a:off x="914400" y="3749040"/>
+            <a:ext cx="7315200" cy="365760"/>
+          </a:xfrm>
+          <a:prstGeom prst="rect">
+            <a:avLst/>
+          </a:prstGeom>
+          <a:noFill/>
+        </p:spPr>
+        <p:txBody>
+          <a:bodyPr wrap="square" lIns="45720" rIns="45720" tIns="27432" bIns="27432">
+            <a:spAutoFit/>
+          </a:bodyPr>
+          <a:lstStyle/>
+          <a:p>
+            <a:pPr algn="l">
+              <a:defRPr sz="1200" b="0">
+                <a:solidFill>
+                  <a:srgbClr val="1A1A2E"/>
+                </a:solidFill>
+                <a:latin typeface="Calibri"/>
+              </a:defRPr>
+            </a:pPr>
+            <a:r>
+              <a:t>匿名化済みの画像データでAI診断ツールの精度を検証したい</a:t>
+            </a:r>
+          </a:p>
+        </p:txBody>
+      </p:sp>
+      <p:sp>
+        <p:nvSpPr>
+          <p:cNvPr id="14" name="TextBox 13"/>
+          <p:cNvSpPr txBox="1"/>
+          <p:nvPr/>
+        </p:nvSpPr>
+        <p:spPr>
+          <a:xfrm>
+            <a:off x="731520" y="4389120"/>
+            <a:ext cx="2743200" cy="274320"/>
+          </a:xfrm>
+          <a:prstGeom prst="rect">
+            <a:avLst/>
+          </a:prstGeom>
+          <a:noFill/>
+        </p:spPr>
+        <p:txBody>
+          <a:bodyPr wrap="square" lIns="45720" rIns="45720" tIns="27432" bIns="27432">
+            <a:spAutoFit/>
+          </a:bodyPr>
+          <a:lstStyle/>
+          <a:p>
+            <a:pPr algn="l">
+              <a:defRPr sz="1300" b="1">
+                <a:solidFill>
+                  <a:srgbClr val="E89B3B"/>
+                </a:solidFill>
+                <a:latin typeface="Calibri"/>
+              </a:defRPr>
+            </a:pPr>
+            <a:r>
+              <a:t>決めるべきこと:</a:t>
+            </a:r>
+          </a:p>
+        </p:txBody>
+      </p:sp>
+      <p:sp>
+        <p:nvSpPr>
+          <p:cNvPr id="15" name="TextBox 14"/>
+          <p:cNvSpPr txBox="1"/>
+          <p:nvPr/>
+        </p:nvSpPr>
+        <p:spPr>
+          <a:xfrm>
+            <a:off x="3200400" y="4389120"/>
+            <a:ext cx="5943600" cy="274320"/>
+          </a:xfrm>
+          <a:prstGeom prst="rect">
+            <a:avLst/>
+          </a:prstGeom>
+          <a:noFill/>
+        </p:spPr>
+        <p:txBody>
+          <a:bodyPr wrap="square" lIns="45720" rIns="45720" tIns="27432" bIns="27432">
+            <a:spAutoFit/>
+          </a:bodyPr>
+          <a:lstStyle/>
+          <a:p>
+            <a:pPr algn="l">
+              <a:defRPr sz="1200" b="0">
+                <a:solidFill>
+                  <a:srgbClr val="1A1A2E"/>
+                </a:solidFill>
+                <a:latin typeface="Calibri"/>
+              </a:defRPr>
+            </a:pPr>
+            <a:r>
+              <a:t>データの種類（個人情報/仮名加工/匿名加工）× 同意の方法（IC/オプトアウト/不要）</a:t>
             </a:r>
           </a:p>
         </p:txBody>
@@ -6185,7 +6494,7 @@
 </p:sld>
 </file>
 
-<file path=ppt/slides/slide6.xml><?xml version="1.0" encoding="utf-8"?>
+<file path=ppt/slides/slide7.xml><?xml version="1.0" encoding="utf-8"?>
 <p:sld xmlns:a="http://schemas.openxmlformats.org/drawingml/2006/main" xmlns:p="http://schemas.openxmlformats.org/presentationml/2006/main" xmlns:r="http://schemas.openxmlformats.org/officeDocument/2006/relationships">
   <p:cSld>
     <p:bg>
@@ -6205,14 +6514,50 @@
       <p:grpSpPr/>
       <p:sp>
         <p:nvSpPr>
-          <p:cNvPr id="2" name="Rectangle 1"/>
+          <p:cNvPr id="2" name="TextBox 1"/>
+          <p:cNvSpPr txBox="1"/>
+          <p:nvPr/>
+        </p:nvSpPr>
+        <p:spPr>
+          <a:xfrm>
+            <a:off x="457200" y="182880"/>
+            <a:ext cx="8229600" cy="457200"/>
+          </a:xfrm>
+          <a:prstGeom prst="rect">
+            <a:avLst/>
+          </a:prstGeom>
+          <a:noFill/>
+        </p:spPr>
+        <p:txBody>
+          <a:bodyPr wrap="square" lIns="45720" rIns="45720" tIns="27432" bIns="27432">
+            <a:spAutoFit/>
+          </a:bodyPr>
+          <a:lstStyle/>
+          <a:p>
+            <a:pPr algn="l">
+              <a:defRPr sz="2200" b="1">
+                <a:solidFill>
+                  <a:srgbClr val="F5F0E8"/>
+                </a:solidFill>
+                <a:latin typeface="Calibri"/>
+              </a:defRPr>
+            </a:pPr>
+            <a:r>
+              <a:t>各シナリオの正解</a:t>
+            </a:r>
+          </a:p>
+        </p:txBody>
+      </p:sp>
+      <p:sp>
+        <p:nvSpPr>
+          <p:cNvPr id="3" name="Rectangle 2"/>
           <p:cNvSpPr/>
           <p:nvPr/>
         </p:nvSpPr>
         <p:spPr>
           <a:xfrm>
-            <a:off x="365760" y="274320"/>
-            <a:ext cx="2286000" cy="73152"/>
+            <a:off x="457200" y="658368"/>
+            <a:ext cx="1828800" cy="54864"/>
           </a:xfrm>
           <a:prstGeom prst="rect">
             <a:avLst/>
@@ -6242,96 +6587,20 @@
           <a:bodyPr rtlCol="0" anchor="ctr"/>
           <a:lstStyle/>
           <a:p>
-            <a:pPr algn="ctr">
-              <a:defRPr/>
-            </a:pPr>
-          </a:p>
-        </p:txBody>
-      </p:sp>
-      <p:sp>
-        <p:nvSpPr>
-          <p:cNvPr id="3" name="TextBox 2"/>
-          <p:cNvSpPr txBox="1"/>
-          <p:nvPr/>
-        </p:nvSpPr>
-        <p:spPr>
-          <a:xfrm>
-            <a:off x="365760" y="502920"/>
-            <a:ext cx="8229600" cy="518159"/>
-          </a:xfrm>
-          <a:prstGeom prst="rect">
-            <a:avLst/>
-          </a:prstGeom>
-          <a:noFill/>
-        </p:spPr>
-        <p:txBody>
-          <a:bodyPr wrap="square">
-            <a:spAutoFit/>
-          </a:bodyPr>
-          <a:lstStyle/>
-          <a:p>
-            <a:pPr algn="l">
-              <a:defRPr sz="2400" b="1">
-                <a:solidFill>
-                  <a:srgbClr val="F5F0E8"/>
-                </a:solidFill>
-                <a:latin typeface="Calibri"/>
-              </a:defRPr>
-            </a:pPr>
-            <a:r>
-              <a:rPr/>
-              <a:t>ミニ研究計画書ワーク</a:t>
-            </a:r>
-          </a:p>
-        </p:txBody>
-      </p:sp>
-      <p:sp>
-        <p:nvSpPr>
-          <p:cNvPr id="4" name="TextBox 3"/>
-          <p:cNvSpPr txBox="1"/>
-          <p:nvPr/>
-        </p:nvSpPr>
-        <p:spPr>
-          <a:xfrm>
-            <a:off x="365760" y="1039367"/>
-            <a:ext cx="8229600" cy="322579"/>
-          </a:xfrm>
-          <a:prstGeom prst="rect">
-            <a:avLst/>
-          </a:prstGeom>
-          <a:noFill/>
-        </p:spPr>
-        <p:txBody>
-          <a:bodyPr wrap="square">
-            <a:spAutoFit/>
-          </a:bodyPr>
-          <a:lstStyle/>
-          <a:p>
-            <a:pPr algn="l">
-              <a:defRPr sz="1300" b="0">
-                <a:solidFill>
-                  <a:srgbClr val="E89B3B"/>
-                </a:solidFill>
-                <a:latin typeface="Calibri"/>
-              </a:defRPr>
-            </a:pPr>
-            <a:r>
-              <a:rPr/>
-              <a:t>ペアワーク（4分）: シナリオを1つ選び、研究計画書の骨子を作成</a:t>
-            </a:r>
-          </a:p>
-        </p:txBody>
-      </p:sp>
-      <p:sp>
-        <p:nvSpPr>
-          <p:cNvPr id="5" name="Rectangle 4"/>
+            <a:pPr algn="ctr"/>
+          </a:p>
+        </p:txBody>
+      </p:sp>
+      <p:sp>
+        <p:nvSpPr>
+          <p:cNvPr id="4" name="Rectangle 3"/>
           <p:cNvSpPr/>
           <p:nvPr/>
         </p:nvSpPr>
         <p:spPr>
           <a:xfrm>
-            <a:off x="365760" y="1463040"/>
-            <a:ext cx="2697480" cy="1554480"/>
+            <a:off x="457200" y="914400"/>
+            <a:ext cx="8229600" cy="1097280"/>
           </a:xfrm>
           <a:prstGeom prst="rect">
             <a:avLst/>
@@ -6341,7 +6610,7 @@
           </a:solidFill>
           <a:ln w="12700">
             <a:solidFill>
-              <a:srgbClr val="4EB8A9"/>
+              <a:srgbClr val="E89B3B"/>
             </a:solidFill>
           </a:ln>
         </p:spPr>
@@ -6363,9 +6632,43 @@
           <a:bodyPr rtlCol="0" anchor="ctr"/>
           <a:lstStyle/>
           <a:p>
-            <a:pPr algn="ctr">
-              <a:defRPr/>
+            <a:pPr algn="ctr"/>
+          </a:p>
+        </p:txBody>
+      </p:sp>
+      <p:sp>
+        <p:nvSpPr>
+          <p:cNvPr id="5" name="TextBox 4"/>
+          <p:cNvSpPr txBox="1"/>
+          <p:nvPr/>
+        </p:nvSpPr>
+        <p:spPr>
+          <a:xfrm>
+            <a:off x="640080" y="960120"/>
+            <a:ext cx="2743200" cy="320040"/>
+          </a:xfrm>
+          <a:prstGeom prst="rect">
+            <a:avLst/>
+          </a:prstGeom>
+          <a:noFill/>
+        </p:spPr>
+        <p:txBody>
+          <a:bodyPr wrap="square" lIns="45720" rIns="45720" tIns="27432" bIns="27432">
+            <a:spAutoFit/>
+          </a:bodyPr>
+          <a:lstStyle/>
+          <a:p>
+            <a:pPr algn="l">
+              <a:defRPr sz="1400" b="1">
+                <a:solidFill>
+                  <a:srgbClr val="E89B3B"/>
+                </a:solidFill>
+                <a:latin typeface="Calibri"/>
+              </a:defRPr>
             </a:pPr>
+            <a:r>
+              <a:t>A: カルテ後方視</a:t>
+            </a:r>
           </a:p>
         </p:txBody>
       </p:sp>
@@ -6377,8 +6680,8 @@
         </p:nvSpPr>
         <p:spPr>
           <a:xfrm>
-            <a:off x="502920" y="1554480"/>
-            <a:ext cx="2423160" cy="287020"/>
+            <a:off x="640080" y="1280160"/>
+            <a:ext cx="7772400" cy="320040"/>
           </a:xfrm>
           <a:prstGeom prst="rect">
             <a:avLst/>
@@ -6386,22 +6689,21 @@
           <a:noFill/>
         </p:spPr>
         <p:txBody>
-          <a:bodyPr wrap="square">
+          <a:bodyPr wrap="square" lIns="45720" rIns="45720" tIns="27432" bIns="27432">
             <a:spAutoFit/>
           </a:bodyPr>
           <a:lstStyle/>
           <a:p>
             <a:pPr algn="l">
-              <a:defRPr sz="1100" b="1">
-                <a:solidFill>
-                  <a:srgbClr val="E89B3B"/>
+              <a:defRPr sz="1300" b="0">
+                <a:solidFill>
+                  <a:srgbClr val="F5F0E8"/>
                 </a:solidFill>
                 <a:latin typeface="Calibri"/>
               </a:defRPr>
             </a:pPr>
             <a:r>
-              <a:rPr/>
-              <a:t>A: カルテ後方視的研究</a:t>
+              <a:t>仮名加工情報に加工 → オプトアウトでOK</a:t>
             </a:r>
           </a:p>
         </p:txBody>
@@ -6414,8 +6716,8 @@
         </p:nvSpPr>
         <p:spPr>
           <a:xfrm>
-            <a:off x="502920" y="1874519"/>
-            <a:ext cx="2423160" cy="1005840"/>
+            <a:off x="640080" y="1645920"/>
+            <a:ext cx="7772400" cy="274320"/>
           </a:xfrm>
           <a:prstGeom prst="rect">
             <a:avLst/>
@@ -6423,32 +6725,21 @@
           <a:noFill/>
         </p:spPr>
         <p:txBody>
-          <a:bodyPr wrap="square">
+          <a:bodyPr wrap="square" lIns="45720" rIns="45720" tIns="27432" bIns="27432">
             <a:spAutoFit/>
           </a:bodyPr>
           <a:lstStyle/>
           <a:p>
             <a:pPr algn="l">
-              <a:defRPr sz="900" b="0">
-                <a:solidFill>
-                  <a:srgbClr val="F5F0E8"/>
+              <a:defRPr sz="1100" b="0">
+                <a:solidFill>
+                  <a:srgbClr val="7A8A9A"/>
                 </a:solidFill>
                 <a:latin typeface="Calibri"/>
               </a:defRPr>
             </a:pPr>
             <a:r>
-              <a:rPr/>
-              <a:t>糖尿病患者の治療アウトカムを</a:t>
-            </a:r>
-            <a:br/>
-            <a:r>
-              <a:rPr/>
-              <a:t>過去5年分のカルテデータで解析。</a:t>
-            </a:r>
-            <a:br/>
-            <a:r>
-              <a:rPr/>
-              <a:t>対象: 自施設約500名。侵襲なし。</a:t>
+              <a:t>改正で: 現行ではICが必要なケースも → 簡素化</a:t>
             </a:r>
           </a:p>
         </p:txBody>
@@ -6461,8 +6752,8 @@
         </p:nvSpPr>
         <p:spPr>
           <a:xfrm>
-            <a:off x="3246120" y="1463040"/>
-            <a:ext cx="2697480" cy="1554480"/>
+            <a:off x="457200" y="2194560"/>
+            <a:ext cx="8229600" cy="1097280"/>
           </a:xfrm>
           <a:prstGeom prst="rect">
             <a:avLst/>
@@ -6472,7 +6763,7 @@
           </a:solidFill>
           <a:ln w="12700">
             <a:solidFill>
-              <a:srgbClr val="4EB8A9"/>
+              <a:srgbClr val="E89B3B"/>
             </a:solidFill>
           </a:ln>
         </p:spPr>
@@ -6494,9 +6785,7 @@
           <a:bodyPr rtlCol="0" anchor="ctr"/>
           <a:lstStyle/>
           <a:p>
-            <a:pPr algn="ctr">
-              <a:defRPr/>
-            </a:pPr>
+            <a:pPr algn="ctr"/>
           </a:p>
         </p:txBody>
       </p:sp>
@@ -6508,8 +6797,8 @@
         </p:nvSpPr>
         <p:spPr>
           <a:xfrm>
-            <a:off x="3383279" y="1554480"/>
-            <a:ext cx="2423160" cy="287020"/>
+            <a:off x="640080" y="2240279"/>
+            <a:ext cx="2743200" cy="320040"/>
           </a:xfrm>
           <a:prstGeom prst="rect">
             <a:avLst/>
@@ -6517,13 +6806,13 @@
           <a:noFill/>
         </p:spPr>
         <p:txBody>
-          <a:bodyPr wrap="square">
+          <a:bodyPr wrap="square" lIns="45720" rIns="45720" tIns="27432" bIns="27432">
             <a:spAutoFit/>
           </a:bodyPr>
           <a:lstStyle/>
           <a:p>
             <a:pPr algn="l">
-              <a:defRPr sz="1100" b="1">
+              <a:defRPr sz="1400" b="1">
                 <a:solidFill>
                   <a:srgbClr val="E89B3B"/>
                 </a:solidFill>
@@ -6531,8 +6820,7 @@
               </a:defRPr>
             </a:pPr>
             <a:r>
-              <a:rPr/>
-              <a:t>B: 多施設バイオバンク研究</a:t>
+              <a:t>B: バイオバンク</a:t>
             </a:r>
           </a:p>
         </p:txBody>
@@ -6545,8 +6833,8 @@
         </p:nvSpPr>
         <p:spPr>
           <a:xfrm>
-            <a:off x="3383279" y="1874519"/>
-            <a:ext cx="2423160" cy="1005840"/>
+            <a:off x="640080" y="2560320"/>
+            <a:ext cx="7772400" cy="320040"/>
           </a:xfrm>
           <a:prstGeom prst="rect">
             <a:avLst/>
@@ -6554,13 +6842,13 @@
           <a:noFill/>
         </p:spPr>
         <p:txBody>
-          <a:bodyPr wrap="square">
+          <a:bodyPr wrap="square" lIns="45720" rIns="45720" tIns="27432" bIns="27432">
             <a:spAutoFit/>
           </a:bodyPr>
           <a:lstStyle/>
           <a:p>
             <a:pPr algn="l">
-              <a:defRPr sz="900" b="0">
+              <a:defRPr sz="1300" b="0">
                 <a:solidFill>
                   <a:srgbClr val="F5F0E8"/>
                 </a:solidFill>
@@ -6568,32 +6856,57 @@
               </a:defRPr>
             </a:pPr>
             <a:r>
-              <a:rPr/>
-              <a:t>バイオバンク保管の血液検体</a:t>
-            </a:r>
-            <a:br/>
-            <a:r>
-              <a:rPr/>
-              <a:t>（包括同意取得済み）で</a:t>
-            </a:r>
-            <a:br/>
-            <a:r>
-              <a:rPr/>
-              <a:t>新バイオマーカー探索。</a:t>
-            </a:r>
-          </a:p>
-        </p:txBody>
-      </p:sp>
-      <p:sp>
-        <p:nvSpPr>
-          <p:cNvPr id="11" name="Rectangle 10"/>
+              <a:t>包括同意の範囲内 → オプトアウト手続き</a:t>
+            </a:r>
+          </a:p>
+        </p:txBody>
+      </p:sp>
+      <p:sp>
+        <p:nvSpPr>
+          <p:cNvPr id="11" name="TextBox 10"/>
+          <p:cNvSpPr txBox="1"/>
+          <p:nvPr/>
+        </p:nvSpPr>
+        <p:spPr>
+          <a:xfrm>
+            <a:off x="640080" y="2926080"/>
+            <a:ext cx="7772400" cy="274320"/>
+          </a:xfrm>
+          <a:prstGeom prst="rect">
+            <a:avLst/>
+          </a:prstGeom>
+          <a:noFill/>
+        </p:spPr>
+        <p:txBody>
+          <a:bodyPr wrap="square" lIns="45720" rIns="45720" tIns="27432" bIns="27432">
+            <a:spAutoFit/>
+          </a:bodyPr>
+          <a:lstStyle/>
+          <a:p>
+            <a:pPr algn="l">
+              <a:defRPr sz="1100" b="0">
+                <a:solidFill>
+                  <a:srgbClr val="7A8A9A"/>
+                </a:solidFill>
+                <a:latin typeface="Calibri"/>
+              </a:defRPr>
+            </a:pPr>
+            <a:r>
+              <a:t>改正で: 包括同意だけでは不十分 → 組合せが明確化</a:t>
+            </a:r>
+          </a:p>
+        </p:txBody>
+      </p:sp>
+      <p:sp>
+        <p:nvSpPr>
+          <p:cNvPr id="12" name="Rectangle 11"/>
           <p:cNvSpPr/>
           <p:nvPr/>
         </p:nvSpPr>
         <p:spPr>
           <a:xfrm>
-            <a:off x="6126480" y="1463040"/>
-            <a:ext cx="2697480" cy="1554480"/>
+            <a:off x="457200" y="3474720"/>
+            <a:ext cx="8229600" cy="1097280"/>
           </a:xfrm>
           <a:prstGeom prst="rect">
             <a:avLst/>
@@ -6603,7 +6916,7 @@
           </a:solidFill>
           <a:ln w="12700">
             <a:solidFill>
-              <a:srgbClr val="4EB8A9"/>
+              <a:srgbClr val="E89B3B"/>
             </a:solidFill>
           </a:ln>
         </p:spPr>
@@ -6625,22 +6938,20 @@
           <a:bodyPr rtlCol="0" anchor="ctr"/>
           <a:lstStyle/>
           <a:p>
-            <a:pPr algn="ctr">
-              <a:defRPr/>
-            </a:pPr>
-          </a:p>
-        </p:txBody>
-      </p:sp>
-      <p:sp>
-        <p:nvSpPr>
-          <p:cNvPr id="12" name="TextBox 11"/>
+            <a:pPr algn="ctr"/>
+          </a:p>
+        </p:txBody>
+      </p:sp>
+      <p:sp>
+        <p:nvSpPr>
+          <p:cNvPr id="13" name="TextBox 12"/>
           <p:cNvSpPr txBox="1"/>
           <p:nvPr/>
         </p:nvSpPr>
         <p:spPr>
           <a:xfrm>
-            <a:off x="6263640" y="1554480"/>
-            <a:ext cx="2423160" cy="287020"/>
+            <a:off x="640080" y="3520439"/>
+            <a:ext cx="2743200" cy="320040"/>
           </a:xfrm>
           <a:prstGeom prst="rect">
             <a:avLst/>
@@ -6648,13 +6959,13 @@
           <a:noFill/>
         </p:spPr>
         <p:txBody>
-          <a:bodyPr wrap="square">
+          <a:bodyPr wrap="square" lIns="45720" rIns="45720" tIns="27432" bIns="27432">
             <a:spAutoFit/>
           </a:bodyPr>
           <a:lstStyle/>
           <a:p>
             <a:pPr algn="l">
-              <a:defRPr sz="1100" b="1">
+              <a:defRPr sz="1400" b="1">
                 <a:solidFill>
                   <a:srgbClr val="E89B3B"/>
                 </a:solidFill>
@@ -6662,22 +6973,21 @@
               </a:defRPr>
             </a:pPr>
             <a:r>
-              <a:rPr/>
-              <a:t>C: AI診断支援ツール精度評価</a:t>
-            </a:r>
-          </a:p>
-        </p:txBody>
-      </p:sp>
-      <p:sp>
-        <p:nvSpPr>
-          <p:cNvPr id="13" name="TextBox 12"/>
+              <a:t>C: AI画像解析</a:t>
+            </a:r>
+          </a:p>
+        </p:txBody>
+      </p:sp>
+      <p:sp>
+        <p:nvSpPr>
+          <p:cNvPr id="14" name="TextBox 13"/>
           <p:cNvSpPr txBox="1"/>
           <p:nvPr/>
         </p:nvSpPr>
         <p:spPr>
           <a:xfrm>
-            <a:off x="6263640" y="1874519"/>
-            <a:ext cx="2423160" cy="1005840"/>
+            <a:off x="640080" y="3840480"/>
+            <a:ext cx="7772400" cy="320040"/>
           </a:xfrm>
           <a:prstGeom prst="rect">
             <a:avLst/>
@@ -6685,13 +6995,13 @@
           <a:noFill/>
         </p:spPr>
         <p:txBody>
-          <a:bodyPr wrap="square">
+          <a:bodyPr wrap="square" lIns="45720" rIns="45720" tIns="27432" bIns="27432">
             <a:spAutoFit/>
           </a:bodyPr>
           <a:lstStyle/>
           <a:p>
             <a:pPr algn="l">
-              <a:defRPr sz="900" b="0">
+              <a:defRPr sz="1300" b="0">
                 <a:solidFill>
                   <a:srgbClr val="F5F0E8"/>
                 </a:solidFill>
@@ -6699,32 +7009,21 @@
               </a:defRPr>
             </a:pPr>
             <a:r>
-              <a:rPr/>
-              <a:t>既存画像データ（匿名化済み）で</a:t>
-            </a:r>
-            <a:br/>
-            <a:r>
-              <a:rPr/>
-              <a:t>AI診断ツールの精度を検証。</a:t>
-            </a:r>
-            <a:br/>
-            <a:r>
-              <a:rPr/>
-              <a:t>他施設からのデータ提供あり。</a:t>
-            </a:r>
-          </a:p>
-        </p:txBody>
-      </p:sp>
-      <p:sp>
-        <p:nvSpPr>
-          <p:cNvPr id="14" name="TextBox 13"/>
+              <a:t>匿名加工情報 → 同意不要</a:t>
+            </a:r>
+          </a:p>
+        </p:txBody>
+      </p:sp>
+      <p:sp>
+        <p:nvSpPr>
+          <p:cNvPr id="15" name="TextBox 14"/>
           <p:cNvSpPr txBox="1"/>
           <p:nvPr/>
         </p:nvSpPr>
         <p:spPr>
           <a:xfrm>
-            <a:off x="365760" y="3200400"/>
-            <a:ext cx="1828800" cy="287020"/>
+            <a:off x="640080" y="4206240"/>
+            <a:ext cx="7772400" cy="274320"/>
           </a:xfrm>
           <a:prstGeom prst="rect">
             <a:avLst/>
@@ -6732,142 +7031,21 @@
           <a:noFill/>
         </p:spPr>
         <p:txBody>
-          <a:bodyPr wrap="square">
+          <a:bodyPr wrap="square" lIns="45720" rIns="45720" tIns="27432" bIns="27432">
             <a:spAutoFit/>
           </a:bodyPr>
           <a:lstStyle/>
           <a:p>
             <a:pPr algn="l">
-              <a:defRPr sz="1100" b="1">
-                <a:solidFill>
-                  <a:srgbClr val="E89B3B"/>
+              <a:defRPr sz="1100" b="0">
+                <a:solidFill>
+                  <a:srgbClr val="7A8A9A"/>
                 </a:solidFill>
                 <a:latin typeface="Calibri"/>
               </a:defRPr>
             </a:pPr>
             <a:r>
-              <a:rPr/>
-              <a:t>記入シート項目:</a:t>
-            </a:r>
-          </a:p>
-        </p:txBody>
-      </p:sp>
-      <p:sp>
-        <p:nvSpPr>
-          <p:cNvPr id="15" name="TextBox 14"/>
-          <p:cNvSpPr txBox="1"/>
-          <p:nvPr/>
-        </p:nvSpPr>
-        <p:spPr>
-          <a:xfrm>
-            <a:off x="457200" y="3520440"/>
-            <a:ext cx="8229600" cy="1097280"/>
-          </a:xfrm>
-          <a:prstGeom prst="rect">
-            <a:avLst/>
-          </a:prstGeom>
-          <a:noFill/>
-        </p:spPr>
-        <p:txBody>
-          <a:bodyPr wrap="square">
-            <a:spAutoFit/>
-          </a:bodyPr>
-          <a:lstStyle/>
-          <a:p>
-            <a:pPr>
-              <a:defRPr sz="1000">
-                <a:solidFill>
-                  <a:srgbClr val="F5F0E8"/>
-                </a:solidFill>
-                <a:latin typeface="Calibri"/>
-              </a:defRPr>
-              <a:buChar char="●"/>
-            </a:pPr>
-            <a:r>
-              <a:rPr/>
-              <a:t>研究タイトル / 研究デザイン / 対象者</a:t>
-            </a:r>
-          </a:p>
-          <a:p>
-            <a:pPr>
-              <a:defRPr sz="1000">
-                <a:solidFill>
-                  <a:srgbClr val="F5F0E8"/>
-                </a:solidFill>
-                <a:latin typeface="Calibri"/>
-              </a:defRPr>
-              <a:buChar char="●"/>
-            </a:pPr>
-            <a:r>
-              <a:rPr/>
-              <a:t>データの種類（個人情報/仮名加工/匿名加工）★</a:t>
-            </a:r>
-          </a:p>
-          <a:p>
-            <a:pPr>
-              <a:defRPr sz="1000">
-                <a:solidFill>
-                  <a:srgbClr val="F5F0E8"/>
-                </a:solidFill>
-                <a:latin typeface="Calibri"/>
-              </a:defRPr>
-              <a:buChar char="●"/>
-            </a:pPr>
-            <a:r>
-              <a:rPr/>
-              <a:t>同意の方法（IC/オプトアウト/不要）★</a:t>
-            </a:r>
-          </a:p>
-          <a:p>
-            <a:pPr>
-              <a:defRPr sz="1000">
-                <a:solidFill>
-                  <a:srgbClr val="F5F0E8"/>
-                </a:solidFill>
-                <a:latin typeface="Calibri"/>
-              </a:defRPr>
-              <a:buChar char="●"/>
-            </a:pPr>
-            <a:r>
-              <a:rPr/>
-              <a:t>改正で変わるポイント / 倫理審査の要否</a:t>
-            </a:r>
-          </a:p>
-        </p:txBody>
-      </p:sp>
-      <p:sp>
-        <p:nvSpPr>
-          <p:cNvPr id="16" name="TextBox 15"/>
-          <p:cNvSpPr txBox="1"/>
-          <p:nvPr/>
-        </p:nvSpPr>
-        <p:spPr>
-          <a:xfrm>
-            <a:off x="365760" y="4663440"/>
-            <a:ext cx="5486400" cy="274320"/>
-          </a:xfrm>
-          <a:prstGeom prst="rect">
-            <a:avLst/>
-          </a:prstGeom>
-          <a:noFill/>
-        </p:spPr>
-        <p:txBody>
-          <a:bodyPr wrap="square">
-            <a:spAutoFit/>
-          </a:bodyPr>
-          <a:lstStyle/>
-          <a:p>
-            <a:pPr algn="l">
-              <a:defRPr sz="800" b="0">
-                <a:solidFill>
-                  <a:srgbClr val="7A8A9A"/>
-                </a:solidFill>
-                <a:latin typeface="Calibri"/>
-              </a:defRPr>
-            </a:pPr>
-            <a:r>
-              <a:rPr/>
-              <a:t>事象6: 練習の機会を設ける</a:t>
+              <a:t>改正で: 「困難な場合」の制限が撤廃 → より自由に</a:t>
             </a:r>
           </a:p>
         </p:txBody>
@@ -6880,7 +7058,7 @@
 </p:sld>
 </file>
 
-<file path=ppt/slides/slide7.xml><?xml version="1.0" encoding="utf-8"?>
+<file path=ppt/slides/slide8.xml><?xml version="1.0" encoding="utf-8"?>
 <p:sld xmlns:a="http://schemas.openxmlformats.org/drawingml/2006/main" xmlns:p="http://schemas.openxmlformats.org/presentationml/2006/main" xmlns:r="http://schemas.openxmlformats.org/officeDocument/2006/relationships">
   <p:cSld>
     <p:bg>
@@ -6900,14 +7078,50 @@
       <p:grpSpPr/>
       <p:sp>
         <p:nvSpPr>
-          <p:cNvPr id="2" name="Rectangle 1"/>
+          <p:cNvPr id="2" name="TextBox 1"/>
+          <p:cNvSpPr txBox="1"/>
+          <p:nvPr/>
+        </p:nvSpPr>
+        <p:spPr>
+          <a:xfrm>
+            <a:off x="457200" y="182880"/>
+            <a:ext cx="8229600" cy="457200"/>
+          </a:xfrm>
+          <a:prstGeom prst="rect">
+            <a:avLst/>
+          </a:prstGeom>
+          <a:noFill/>
+        </p:spPr>
+        <p:txBody>
+          <a:bodyPr wrap="square" lIns="45720" rIns="45720" tIns="27432" bIns="27432">
+            <a:spAutoFit/>
+          </a:bodyPr>
+          <a:lstStyle/>
+          <a:p>
+            <a:pPr algn="l">
+              <a:defRPr sz="2400" b="1">
+                <a:solidFill>
+                  <a:srgbClr val="1A1A2E"/>
+                </a:solidFill>
+                <a:latin typeface="Calibri"/>
+              </a:defRPr>
+            </a:pPr>
+            <a:r>
+              <a:t>3つの変更、3つのアクション</a:t>
+            </a:r>
+          </a:p>
+        </p:txBody>
+      </p:sp>
+      <p:sp>
+        <p:nvSpPr>
+          <p:cNvPr id="3" name="Rectangle 2"/>
           <p:cNvSpPr/>
           <p:nvPr/>
         </p:nvSpPr>
         <p:spPr>
           <a:xfrm>
-            <a:off x="365760" y="274320"/>
-            <a:ext cx="2286000" cy="73152"/>
+            <a:off x="457200" y="658368"/>
+            <a:ext cx="1828800" cy="54864"/>
           </a:xfrm>
           <a:prstGeom prst="rect">
             <a:avLst/>
@@ -6937,22 +7151,20 @@
           <a:bodyPr rtlCol="0" anchor="ctr"/>
           <a:lstStyle/>
           <a:p>
-            <a:pPr algn="ctr">
-              <a:defRPr/>
-            </a:pPr>
-          </a:p>
-        </p:txBody>
-      </p:sp>
-      <p:sp>
-        <p:nvSpPr>
-          <p:cNvPr id="3" name="TextBox 2"/>
+            <a:pPr algn="ctr"/>
+          </a:p>
+        </p:txBody>
+      </p:sp>
+      <p:sp>
+        <p:nvSpPr>
+          <p:cNvPr id="4" name="TextBox 3"/>
           <p:cNvSpPr txBox="1"/>
           <p:nvPr/>
         </p:nvSpPr>
         <p:spPr>
           <a:xfrm>
-            <a:off x="365760" y="457200"/>
-            <a:ext cx="8229600" cy="482600"/>
+            <a:off x="457200" y="914400"/>
+            <a:ext cx="4114800" cy="274320"/>
           </a:xfrm>
           <a:prstGeom prst="rect">
             <a:avLst/>
@@ -6960,456 +7172,80 @@
           <a:noFill/>
         </p:spPr>
         <p:txBody>
-          <a:bodyPr wrap="square">
+          <a:bodyPr wrap="square" lIns="45720" rIns="45720" tIns="27432" bIns="27432">
             <a:spAutoFit/>
           </a:bodyPr>
           <a:lstStyle/>
           <a:p>
             <a:pPr algn="l">
-              <a:defRPr sz="2200" b="1">
-                <a:solidFill>
-                  <a:srgbClr val="1A1A2E"/>
+              <a:defRPr sz="1400" b="1">
+                <a:solidFill>
+                  <a:srgbClr val="E89B3B"/>
                 </a:solidFill>
                 <a:latin typeface="Calibri"/>
               </a:defRPr>
             </a:pPr>
             <a:r>
-              <a:rPr/>
-              <a:t>フィードバック — 各シナリオの答え合わせ</a:t>
-            </a:r>
-          </a:p>
-        </p:txBody>
-      </p:sp>
-      <p:graphicFrame>
-        <p:nvGraphicFramePr>
-          <p:cNvPr id="4" name="Table 3"/>
-          <p:cNvGraphicFramePr>
-            <a:graphicFrameLocks noGrp="1"/>
-          </p:cNvGraphicFramePr>
-          <p:nvPr/>
-        </p:nvGraphicFramePr>
-        <p:xfrm>
-          <a:off x="274320" y="1097280"/>
-          <a:ext cx="8595360" cy="1463040"/>
-        </p:xfrm>
-        <a:graphic>
-          <a:graphicData uri="http://schemas.openxmlformats.org/drawingml/2006/table">
-            <a:tbl>
-              <a:tblPr firstRow="1" bandRow="1">
-                <a:tableStyleId>{5C22544A-7EE6-4342-B048-85BDC9FD1C3A}</a:tableStyleId>
-              </a:tblPr>
-              <a:tblGrid>
-                <a:gridCol w="1371600"/>
-                <a:gridCol w="2194560"/>
-                <a:gridCol w="2194560"/>
-                <a:gridCol w="2834640"/>
-              </a:tblGrid>
-              <a:tr h="365760">
-                <a:tc>
-                  <a:txBody>
-                    <a:bodyPr/>
-                    <a:lstStyle/>
-                    <a:p>
-                      <a:pPr>
-                        <a:defRPr sz="900" b="1">
-                          <a:solidFill>
-                            <a:srgbClr val="F5F0E8"/>
-                          </a:solidFill>
-                          <a:latin typeface="Calibri"/>
-                        </a:defRPr>
-                      </a:pPr>
-                      <a:r>
-                        <a:t>シナリオ</a:t>
-                      </a:r>
-                    </a:p>
-                  </a:txBody>
-                  <a:tcPr>
-                    <a:solidFill>
-                      <a:srgbClr val="0D2B3E"/>
-                    </a:solidFill>
-                  </a:tcPr>
-                </a:tc>
-                <a:tc>
-                  <a:txBody>
-                    <a:bodyPr/>
-                    <a:lstStyle/>
-                    <a:p>
-                      <a:pPr>
-                        <a:defRPr sz="900" b="1">
-                          <a:solidFill>
-                            <a:srgbClr val="F5F0E8"/>
-                          </a:solidFill>
-                          <a:latin typeface="Calibri"/>
-                        </a:defRPr>
-                      </a:pPr>
-                      <a:r>
-                        <a:t>データの種類</a:t>
-                      </a:r>
-                    </a:p>
-                  </a:txBody>
-                  <a:tcPr>
-                    <a:solidFill>
-                      <a:srgbClr val="0D2B3E"/>
-                    </a:solidFill>
-                  </a:tcPr>
-                </a:tc>
-                <a:tc>
-                  <a:txBody>
-                    <a:bodyPr/>
-                    <a:lstStyle/>
-                    <a:p>
-                      <a:pPr>
-                        <a:defRPr sz="900" b="1">
-                          <a:solidFill>
-                            <a:srgbClr val="F5F0E8"/>
-                          </a:solidFill>
-                          <a:latin typeface="Calibri"/>
-                        </a:defRPr>
-                      </a:pPr>
-                      <a:r>
-                        <a:t>同意の方法</a:t>
-                      </a:r>
-                    </a:p>
-                  </a:txBody>
-                  <a:tcPr>
-                    <a:solidFill>
-                      <a:srgbClr val="0D2B3E"/>
-                    </a:solidFill>
-                  </a:tcPr>
-                </a:tc>
-                <a:tc>
-                  <a:txBody>
-                    <a:bodyPr/>
-                    <a:lstStyle/>
-                    <a:p>
-                      <a:pPr>
-                        <a:defRPr sz="900" b="1">
-                          <a:solidFill>
-                            <a:srgbClr val="F5F0E8"/>
-                          </a:solidFill>
-                          <a:latin typeface="Calibri"/>
-                        </a:defRPr>
-                      </a:pPr>
-                      <a:r>
-                        <a:t>改正で変わること</a:t>
-                      </a:r>
-                    </a:p>
-                  </a:txBody>
-                  <a:tcPr>
-                    <a:solidFill>
-                      <a:srgbClr val="0D2B3E"/>
-                    </a:solidFill>
-                  </a:tcPr>
-                </a:tc>
-              </a:tr>
-              <a:tr h="365760">
-                <a:tc>
-                  <a:txBody>
-                    <a:bodyPr/>
-                    <a:lstStyle/>
-                    <a:p>
-                      <a:pPr>
-                        <a:defRPr sz="900">
-                          <a:solidFill>
-                            <a:srgbClr val="1A1A2E"/>
-                          </a:solidFill>
-                          <a:latin typeface="Calibri"/>
-                        </a:defRPr>
-                      </a:pPr>
-                      <a:r>
-                        <a:t>A: カルテ後方視</a:t>
-                      </a:r>
-                    </a:p>
-                  </a:txBody>
-                  <a:tcPr>
-                    <a:solidFill>
-                      <a:srgbClr val="E8F0F0"/>
-                    </a:solidFill>
-                  </a:tcPr>
-                </a:tc>
-                <a:tc>
-                  <a:txBody>
-                    <a:bodyPr/>
-                    <a:lstStyle/>
-                    <a:p>
-                      <a:pPr>
-                        <a:defRPr sz="900">
-                          <a:solidFill>
-                            <a:srgbClr val="1A1A2E"/>
-                          </a:solidFill>
-                          <a:latin typeface="Calibri"/>
-                        </a:defRPr>
-                      </a:pPr>
-                      <a:r>
-                        <a:t>既存個人情報→仮名加工推奨</a:t>
-                      </a:r>
-                    </a:p>
-                  </a:txBody>
-                  <a:tcPr>
-                    <a:solidFill>
-                      <a:srgbClr val="E8F0F0"/>
-                    </a:solidFill>
-                  </a:tcPr>
-                </a:tc>
-                <a:tc>
-                  <a:txBody>
-                    <a:bodyPr/>
-                    <a:lstStyle/>
-                    <a:p>
-                      <a:pPr>
-                        <a:defRPr sz="900">
-                          <a:solidFill>
-                            <a:srgbClr val="1A1A2E"/>
-                          </a:solidFill>
-                          <a:latin typeface="Calibri"/>
-                        </a:defRPr>
-                      </a:pPr>
-                      <a:r>
-                        <a:t>オプトアウトでOK</a:t>
-                      </a:r>
-                    </a:p>
-                  </a:txBody>
-                  <a:tcPr>
-                    <a:solidFill>
-                      <a:srgbClr val="E8F0F0"/>
-                    </a:solidFill>
-                  </a:tcPr>
-                </a:tc>
-                <a:tc>
-                  <a:txBody>
-                    <a:bodyPr/>
-                    <a:lstStyle/>
-                    <a:p>
-                      <a:pPr>
-                        <a:defRPr sz="900">
-                          <a:solidFill>
-                            <a:srgbClr val="1A1A2E"/>
-                          </a:solidFill>
-                          <a:latin typeface="Calibri"/>
-                        </a:defRPr>
-                      </a:pPr>
-                      <a:r>
-                        <a:t>現行ではIC必要だったケースが簡素化</a:t>
-                      </a:r>
-                    </a:p>
-                  </a:txBody>
-                  <a:tcPr>
-                    <a:solidFill>
-                      <a:srgbClr val="E8F0F0"/>
-                    </a:solidFill>
-                  </a:tcPr>
-                </a:tc>
-              </a:tr>
-              <a:tr h="365760">
-                <a:tc>
-                  <a:txBody>
-                    <a:bodyPr/>
-                    <a:lstStyle/>
-                    <a:p>
-                      <a:pPr>
-                        <a:defRPr sz="900">
-                          <a:solidFill>
-                            <a:srgbClr val="1A1A2E"/>
-                          </a:solidFill>
-                          <a:latin typeface="Calibri"/>
-                        </a:defRPr>
-                      </a:pPr>
-                      <a:r>
-                        <a:t>B: バイオバンク</a:t>
-                      </a:r>
-                    </a:p>
-                  </a:txBody>
-                  <a:tcPr>
-                    <a:solidFill>
-                      <a:srgbClr val="F5F0E8"/>
-                    </a:solidFill>
-                  </a:tcPr>
-                </a:tc>
-                <a:tc>
-                  <a:txBody>
-                    <a:bodyPr/>
-                    <a:lstStyle/>
-                    <a:p>
-                      <a:pPr>
-                        <a:defRPr sz="900">
-                          <a:solidFill>
-                            <a:srgbClr val="1A1A2E"/>
-                          </a:solidFill>
-                          <a:latin typeface="Calibri"/>
-                        </a:defRPr>
-                      </a:pPr>
-                      <a:r>
-                        <a:t>包括同意取得済みの試料</a:t>
-                      </a:r>
-                    </a:p>
-                  </a:txBody>
-                  <a:tcPr>
-                    <a:solidFill>
-                      <a:srgbClr val="F5F0E8"/>
-                    </a:solidFill>
-                  </a:tcPr>
-                </a:tc>
-                <a:tc>
-                  <a:txBody>
-                    <a:bodyPr/>
-                    <a:lstStyle/>
-                    <a:p>
-                      <a:pPr>
-                        <a:defRPr sz="900">
-                          <a:solidFill>
-                            <a:srgbClr val="1A1A2E"/>
-                          </a:solidFill>
-                          <a:latin typeface="Calibri"/>
-                        </a:defRPr>
-                      </a:pPr>
-                      <a:r>
-                        <a:t>包括同意+オプトアウト</a:t>
-                      </a:r>
-                    </a:p>
-                  </a:txBody>
-                  <a:tcPr>
-                    <a:solidFill>
-                      <a:srgbClr val="F5F0E8"/>
-                    </a:solidFill>
-                  </a:tcPr>
-                </a:tc>
-                <a:tc>
-                  <a:txBody>
-                    <a:bodyPr/>
-                    <a:lstStyle/>
-                    <a:p>
-                      <a:pPr>
-                        <a:defRPr sz="900">
-                          <a:solidFill>
-                            <a:srgbClr val="1A1A2E"/>
-                          </a:solidFill>
-                          <a:latin typeface="Calibri"/>
-                        </a:defRPr>
-                      </a:pPr>
-                      <a:r>
-                        <a:t>包括同意だけでは不十分が明確化</a:t>
-                      </a:r>
-                    </a:p>
-                  </a:txBody>
-                  <a:tcPr>
-                    <a:solidFill>
-                      <a:srgbClr val="F5F0E8"/>
-                    </a:solidFill>
-                  </a:tcPr>
-                </a:tc>
-              </a:tr>
-              <a:tr h="365760">
-                <a:tc>
-                  <a:txBody>
-                    <a:bodyPr/>
-                    <a:lstStyle/>
-                    <a:p>
-                      <a:pPr>
-                        <a:defRPr sz="900">
-                          <a:solidFill>
-                            <a:srgbClr val="1A1A2E"/>
-                          </a:solidFill>
-                          <a:latin typeface="Calibri"/>
-                        </a:defRPr>
-                      </a:pPr>
-                      <a:r>
-                        <a:t>C: AI画像データ</a:t>
-                      </a:r>
-                    </a:p>
-                  </a:txBody>
-                  <a:tcPr>
-                    <a:solidFill>
-                      <a:srgbClr val="E8F0F0"/>
-                    </a:solidFill>
-                  </a:tcPr>
-                </a:tc>
-                <a:tc>
-                  <a:txBody>
-                    <a:bodyPr/>
-                    <a:lstStyle/>
-                    <a:p>
-                      <a:pPr>
-                        <a:defRPr sz="900">
-                          <a:solidFill>
-                            <a:srgbClr val="1A1A2E"/>
-                          </a:solidFill>
-                          <a:latin typeface="Calibri"/>
-                        </a:defRPr>
-                      </a:pPr>
-                      <a:r>
-                        <a:t>匿名加工情報</a:t>
-                      </a:r>
-                    </a:p>
-                  </a:txBody>
-                  <a:tcPr>
-                    <a:solidFill>
-                      <a:srgbClr val="E8F0F0"/>
-                    </a:solidFill>
-                  </a:tcPr>
-                </a:tc>
-                <a:tc>
-                  <a:txBody>
-                    <a:bodyPr/>
-                    <a:lstStyle/>
-                    <a:p>
-                      <a:pPr>
-                        <a:defRPr sz="900">
-                          <a:solidFill>
-                            <a:srgbClr val="1A1A2E"/>
-                          </a:solidFill>
-                          <a:latin typeface="Calibri"/>
-                        </a:defRPr>
-                      </a:pPr>
-                      <a:r>
-                        <a:t>同意不要</a:t>
-                      </a:r>
-                    </a:p>
-                  </a:txBody>
-                  <a:tcPr>
-                    <a:solidFill>
-                      <a:srgbClr val="E8F0F0"/>
-                    </a:solidFill>
-                  </a:tcPr>
-                </a:tc>
-                <a:tc>
-                  <a:txBody>
-                    <a:bodyPr/>
-                    <a:lstStyle/>
-                    <a:p>
-                      <a:pPr>
-                        <a:defRPr sz="900">
-                          <a:solidFill>
-                            <a:srgbClr val="1A1A2E"/>
-                          </a:solidFill>
-                          <a:latin typeface="Calibri"/>
-                        </a:defRPr>
-                      </a:pPr>
-                      <a:r>
-                        <a:t>「困難な場合」制限が撤廃</a:t>
-                      </a:r>
-                    </a:p>
-                  </a:txBody>
-                  <a:tcPr>
-                    <a:solidFill>
-                      <a:srgbClr val="E8F0F0"/>
-                    </a:solidFill>
-                  </a:tcPr>
-                </a:tc>
-              </a:tr>
-            </a:tbl>
-          </a:graphicData>
-        </a:graphic>
-      </p:graphicFrame>
-      <p:sp>
-        <p:nvSpPr>
-          <p:cNvPr id="5" name="TextBox 4"/>
+              <a:t>覚えておくこと</a:t>
+            </a:r>
+          </a:p>
+        </p:txBody>
+      </p:sp>
+      <p:sp>
+        <p:nvSpPr>
+          <p:cNvPr id="5" name="Rectangle 4"/>
+          <p:cNvSpPr/>
+          <p:nvPr/>
+        </p:nvSpPr>
+        <p:spPr>
+          <a:xfrm>
+            <a:off x="457200" y="1280160"/>
+            <a:ext cx="3931920" cy="411480"/>
+          </a:xfrm>
+          <a:prstGeom prst="rect">
+            <a:avLst/>
+          </a:prstGeom>
+          <a:solidFill>
+            <a:srgbClr val="E8F0F0"/>
+          </a:solidFill>
+          <a:ln w="12700">
+            <a:solidFill>
+              <a:srgbClr val="4EB8A9"/>
+            </a:solidFill>
+          </a:ln>
+        </p:spPr>
+        <p:style>
+          <a:lnRef idx="1">
+            <a:schemeClr val="accent1"/>
+          </a:lnRef>
+          <a:fillRef idx="3">
+            <a:schemeClr val="accent1"/>
+          </a:fillRef>
+          <a:effectRef idx="2">
+            <a:schemeClr val="accent1"/>
+          </a:effectRef>
+          <a:fontRef idx="minor">
+            <a:schemeClr val="lt1"/>
+          </a:fontRef>
+        </p:style>
+        <p:txBody>
+          <a:bodyPr rtlCol="0" anchor="ctr"/>
+          <a:lstStyle/>
+          <a:p>
+            <a:pPr algn="ctr"/>
+          </a:p>
+        </p:txBody>
+      </p:sp>
+      <p:sp>
+        <p:nvSpPr>
+          <p:cNvPr id="6" name="TextBox 5"/>
           <p:cNvSpPr txBox="1"/>
           <p:nvPr/>
         </p:nvSpPr>
         <p:spPr>
           <a:xfrm>
-            <a:off x="365760" y="2926080"/>
-            <a:ext cx="4572000" cy="340360"/>
+            <a:off x="640080" y="1307592"/>
+            <a:ext cx="3657600" cy="365760"/>
           </a:xfrm>
           <a:prstGeom prst="rect">
             <a:avLst/>
@@ -7417,13 +7253,13 @@
           <a:noFill/>
         </p:spPr>
         <p:txBody>
-          <a:bodyPr wrap="square">
+          <a:bodyPr wrap="square" lIns="45720" rIns="45720" tIns="27432" bIns="27432">
             <a:spAutoFit/>
           </a:bodyPr>
           <a:lstStyle/>
           <a:p>
             <a:pPr algn="l">
-              <a:defRPr sz="1400" b="1">
+              <a:defRPr sz="1100" b="0">
                 <a:solidFill>
                   <a:srgbClr val="1A1A2E"/>
                 </a:solidFill>
@@ -7431,22 +7267,66 @@
               </a:defRPr>
             </a:pPr>
             <a:r>
-              <a:rPr/>
-              <a:t>振り返りの問い</a:t>
-            </a:r>
-          </a:p>
-        </p:txBody>
-      </p:sp>
-      <p:sp>
-        <p:nvSpPr>
-          <p:cNvPr id="6" name="TextBox 5"/>
+              <a:t>1. 同意手続きの二元化（IC + オプトアウト）</a:t>
+            </a:r>
+          </a:p>
+        </p:txBody>
+      </p:sp>
+      <p:sp>
+        <p:nvSpPr>
+          <p:cNvPr id="7" name="Rectangle 6"/>
+          <p:cNvSpPr/>
+          <p:nvPr/>
+        </p:nvSpPr>
+        <p:spPr>
+          <a:xfrm>
+            <a:off x="457200" y="1783080"/>
+            <a:ext cx="3931920" cy="411480"/>
+          </a:xfrm>
+          <a:prstGeom prst="rect">
+            <a:avLst/>
+          </a:prstGeom>
+          <a:solidFill>
+            <a:srgbClr val="E8F0F0"/>
+          </a:solidFill>
+          <a:ln w="12700">
+            <a:solidFill>
+              <a:srgbClr val="4EB8A9"/>
+            </a:solidFill>
+          </a:ln>
+        </p:spPr>
+        <p:style>
+          <a:lnRef idx="1">
+            <a:schemeClr val="accent1"/>
+          </a:lnRef>
+          <a:fillRef idx="3">
+            <a:schemeClr val="accent1"/>
+          </a:fillRef>
+          <a:effectRef idx="2">
+            <a:schemeClr val="accent1"/>
+          </a:effectRef>
+          <a:fontRef idx="minor">
+            <a:schemeClr val="lt1"/>
+          </a:fontRef>
+        </p:style>
+        <p:txBody>
+          <a:bodyPr rtlCol="0" anchor="ctr"/>
+          <a:lstStyle/>
+          <a:p>
+            <a:pPr algn="ctr"/>
+          </a:p>
+        </p:txBody>
+      </p:sp>
+      <p:sp>
+        <p:nvSpPr>
+          <p:cNvPr id="8" name="TextBox 7"/>
           <p:cNvSpPr txBox="1"/>
           <p:nvPr/>
         </p:nvSpPr>
         <p:spPr>
           <a:xfrm>
-            <a:off x="457200" y="3291840"/>
-            <a:ext cx="8229600" cy="822960"/>
+            <a:off x="640080" y="1810512"/>
+            <a:ext cx="3657600" cy="365760"/>
           </a:xfrm>
           <a:prstGeom prst="rect">
             <a:avLst/>
@@ -7454,52 +7334,80 @@
           <a:noFill/>
         </p:spPr>
         <p:txBody>
-          <a:bodyPr wrap="square">
+          <a:bodyPr wrap="square" lIns="45720" rIns="45720" tIns="27432" bIns="27432">
             <a:spAutoFit/>
           </a:bodyPr>
           <a:lstStyle/>
           <a:p>
-            <a:pPr>
-              <a:defRPr sz="1200">
+            <a:pPr algn="l">
+              <a:defRPr sz="1100" b="0">
                 <a:solidFill>
                   <a:srgbClr val="1A1A2E"/>
                 </a:solidFill>
                 <a:latin typeface="Calibri"/>
               </a:defRPr>
-              <a:buChar char="●"/>
             </a:pPr>
             <a:r>
-              <a:rPr/>
-              <a:t>あなたが選んだシナリオで、改正前後で手続きはどう変わりましたか？</a:t>
-            </a:r>
-          </a:p>
-          <a:p>
-            <a:pPr>
-              <a:defRPr sz="1200">
-                <a:solidFill>
-                  <a:srgbClr val="1A1A2E"/>
-                </a:solidFill>
-                <a:latin typeface="Calibri"/>
-              </a:defRPr>
-              <a:buChar char="●"/>
-            </a:pPr>
-            <a:r>
-              <a:rPr/>
-              <a:t>その変更は研究を進めやすくする方向？ 慎重にする方向？</a:t>
-            </a:r>
-          </a:p>
-        </p:txBody>
-      </p:sp>
-      <p:sp>
-        <p:nvSpPr>
-          <p:cNvPr id="7" name="TextBox 6"/>
+              <a:t>2. 仮名加工情報はオプトアウトでOK</a:t>
+            </a:r>
+          </a:p>
+        </p:txBody>
+      </p:sp>
+      <p:sp>
+        <p:nvSpPr>
+          <p:cNvPr id="9" name="Rectangle 8"/>
+          <p:cNvSpPr/>
+          <p:nvPr/>
+        </p:nvSpPr>
+        <p:spPr>
+          <a:xfrm>
+            <a:off x="457200" y="2286000"/>
+            <a:ext cx="3931920" cy="411480"/>
+          </a:xfrm>
+          <a:prstGeom prst="rect">
+            <a:avLst/>
+          </a:prstGeom>
+          <a:solidFill>
+            <a:srgbClr val="E8F0F0"/>
+          </a:solidFill>
+          <a:ln w="12700">
+            <a:solidFill>
+              <a:srgbClr val="4EB8A9"/>
+            </a:solidFill>
+          </a:ln>
+        </p:spPr>
+        <p:style>
+          <a:lnRef idx="1">
+            <a:schemeClr val="accent1"/>
+          </a:lnRef>
+          <a:fillRef idx="3">
+            <a:schemeClr val="accent1"/>
+          </a:fillRef>
+          <a:effectRef idx="2">
+            <a:schemeClr val="accent1"/>
+          </a:effectRef>
+          <a:fontRef idx="minor">
+            <a:schemeClr val="lt1"/>
+          </a:fontRef>
+        </p:style>
+        <p:txBody>
+          <a:bodyPr rtlCol="0" anchor="ctr"/>
+          <a:lstStyle/>
+          <a:p>
+            <a:pPr algn="ctr"/>
+          </a:p>
+        </p:txBody>
+      </p:sp>
+      <p:sp>
+        <p:nvSpPr>
+          <p:cNvPr id="10" name="TextBox 9"/>
           <p:cNvSpPr txBox="1"/>
           <p:nvPr/>
         </p:nvSpPr>
         <p:spPr>
           <a:xfrm>
-            <a:off x="365760" y="4663440"/>
-            <a:ext cx="5486400" cy="274320"/>
+            <a:off x="640080" y="2313432"/>
+            <a:ext cx="3657600" cy="365760"/>
           </a:xfrm>
           <a:prstGeom prst="rect">
             <a:avLst/>
@@ -7507,62 +7415,71 @@
           <a:noFill/>
         </p:spPr>
         <p:txBody>
-          <a:bodyPr wrap="square">
+          <a:bodyPr wrap="square" lIns="45720" rIns="45720" tIns="27432" bIns="27432">
             <a:spAutoFit/>
           </a:bodyPr>
           <a:lstStyle/>
           <a:p>
             <a:pPr algn="l">
-              <a:defRPr sz="800" b="0">
-                <a:solidFill>
-                  <a:srgbClr val="7A8A9A"/>
+              <a:defRPr sz="1100" b="0">
+                <a:solidFill>
+                  <a:srgbClr val="1A1A2E"/>
                 </a:solidFill>
                 <a:latin typeface="Calibri"/>
               </a:defRPr>
             </a:pPr>
             <a:r>
-              <a:rPr/>
-              <a:t>事象7-8: フィードバック + 学習成果の評価</a:t>
-            </a:r>
-          </a:p>
-        </p:txBody>
-      </p:sp>
-    </p:spTree>
-  </p:cSld>
-  <p:clrMapOvr>
-    <a:masterClrMapping/>
-  </p:clrMapOvr>
-</p:sld>
-</file>
-
-<file path=ppt/slides/slide8.xml><?xml version="1.0" encoding="utf-8"?>
-<p:sld xmlns:a="http://schemas.openxmlformats.org/drawingml/2006/main" xmlns:p="http://schemas.openxmlformats.org/presentationml/2006/main" xmlns:r="http://schemas.openxmlformats.org/officeDocument/2006/relationships">
-  <p:cSld>
-    <p:bg>
-      <p:bgPr>
-        <a:solidFill>
-          <a:srgbClr val="0D2B3E"/>
-        </a:solidFill>
-        <a:effectLst/>
-      </p:bgPr>
-    </p:bg>
-    <p:spTree>
-      <p:nvGrpSpPr>
-        <p:cNvPr id="1" name=""/>
-        <p:cNvGrpSpPr/>
-        <p:nvPr/>
-      </p:nvGrpSpPr>
-      <p:grpSpPr/>
-      <p:sp>
-        <p:nvSpPr>
-          <p:cNvPr id="2" name="Rectangle 1"/>
+              <a:t>3. 匿名加工情報の利用制限を撤廃</a:t>
+            </a:r>
+          </a:p>
+        </p:txBody>
+      </p:sp>
+      <p:sp>
+        <p:nvSpPr>
+          <p:cNvPr id="11" name="TextBox 10"/>
+          <p:cNvSpPr txBox="1"/>
+          <p:nvPr/>
+        </p:nvSpPr>
+        <p:spPr>
+          <a:xfrm>
+            <a:off x="4754880" y="914400"/>
+            <a:ext cx="4114800" cy="274320"/>
+          </a:xfrm>
+          <a:prstGeom prst="rect">
+            <a:avLst/>
+          </a:prstGeom>
+          <a:noFill/>
+        </p:spPr>
+        <p:txBody>
+          <a:bodyPr wrap="square" lIns="45720" rIns="45720" tIns="27432" bIns="27432">
+            <a:spAutoFit/>
+          </a:bodyPr>
+          <a:lstStyle/>
+          <a:p>
+            <a:pPr algn="l">
+              <a:defRPr sz="1400" b="1">
+                <a:solidFill>
+                  <a:srgbClr val="E89B3B"/>
+                </a:solidFill>
+                <a:latin typeface="Calibri"/>
+              </a:defRPr>
+            </a:pPr>
+            <a:r>
+              <a:t>次のアクション</a:t>
+            </a:r>
+          </a:p>
+        </p:txBody>
+      </p:sp>
+      <p:sp>
+        <p:nvSpPr>
+          <p:cNvPr id="12" name="Rectangle 11"/>
           <p:cNvSpPr/>
           <p:nvPr/>
         </p:nvSpPr>
         <p:spPr>
           <a:xfrm>
-            <a:off x="365760" y="274320"/>
-            <a:ext cx="2286000" cy="73152"/>
+            <a:off x="4754880" y="1280160"/>
+            <a:ext cx="4114800" cy="548640"/>
           </a:xfrm>
           <a:prstGeom prst="rect">
             <a:avLst/>
@@ -7592,22 +7509,20 @@
           <a:bodyPr rtlCol="0" anchor="ctr"/>
           <a:lstStyle/>
           <a:p>
-            <a:pPr algn="ctr">
-              <a:defRPr/>
-            </a:pPr>
-          </a:p>
-        </p:txBody>
-      </p:sp>
-      <p:sp>
-        <p:nvSpPr>
-          <p:cNvPr id="3" name="TextBox 2"/>
+            <a:pPr algn="ctr"/>
+          </a:p>
+        </p:txBody>
+      </p:sp>
+      <p:sp>
+        <p:nvSpPr>
+          <p:cNvPr id="13" name="TextBox 12"/>
           <p:cNvSpPr txBox="1"/>
           <p:nvPr/>
         </p:nvSpPr>
         <p:spPr>
           <a:xfrm>
-            <a:off x="365760" y="502920"/>
-            <a:ext cx="8229600" cy="518159"/>
+            <a:off x="4892040" y="1298448"/>
+            <a:ext cx="1097280" cy="274320"/>
           </a:xfrm>
           <a:prstGeom prst="rect">
             <a:avLst/>
@@ -7615,36 +7530,35 @@
           <a:noFill/>
         </p:spPr>
         <p:txBody>
-          <a:bodyPr wrap="square">
+          <a:bodyPr wrap="square" lIns="45720" rIns="45720" tIns="27432" bIns="27432">
             <a:spAutoFit/>
           </a:bodyPr>
           <a:lstStyle/>
           <a:p>
             <a:pPr algn="l">
-              <a:defRPr sz="2400" b="1">
-                <a:solidFill>
-                  <a:srgbClr val="F5F0E8"/>
+              <a:defRPr sz="1100" b="1">
+                <a:solidFill>
+                  <a:srgbClr val="0D2B3E"/>
                 </a:solidFill>
                 <a:latin typeface="Calibri"/>
               </a:defRPr>
             </a:pPr>
             <a:r>
-              <a:rPr/>
-              <a:t>持ち帰り — 明日から使える3つのアクション</a:t>
-            </a:r>
-          </a:p>
-        </p:txBody>
-      </p:sp>
-      <p:sp>
-        <p:nvSpPr>
-          <p:cNvPr id="4" name="TextBox 3"/>
+              <a:t>今すぐ</a:t>
+            </a:r>
+          </a:p>
+        </p:txBody>
+      </p:sp>
+      <p:sp>
+        <p:nvSpPr>
+          <p:cNvPr id="14" name="TextBox 13"/>
           <p:cNvSpPr txBox="1"/>
           <p:nvPr/>
         </p:nvSpPr>
         <p:spPr>
           <a:xfrm>
-            <a:off x="365760" y="1097280"/>
-            <a:ext cx="4572000" cy="340360"/>
+            <a:off x="6035040" y="1298448"/>
+            <a:ext cx="2743200" cy="457200"/>
           </a:xfrm>
           <a:prstGeom prst="rect">
             <a:avLst/>
@@ -7652,36 +7566,80 @@
           <a:noFill/>
         </p:spPr>
         <p:txBody>
-          <a:bodyPr wrap="square">
+          <a:bodyPr wrap="square" lIns="45720" rIns="45720" tIns="27432" bIns="27432">
             <a:spAutoFit/>
           </a:bodyPr>
           <a:lstStyle/>
           <a:p>
             <a:pPr algn="l">
-              <a:defRPr sz="1400" b="1">
-                <a:solidFill>
-                  <a:srgbClr val="E89B3B"/>
+              <a:defRPr sz="1000" b="0">
+                <a:solidFill>
+                  <a:srgbClr val="0D2B3E"/>
                 </a:solidFill>
                 <a:latin typeface="Calibri"/>
               </a:defRPr>
             </a:pPr>
             <a:r>
-              <a:rPr/>
-              <a:t>今日のまとめ: 3つの変更</a:t>
-            </a:r>
-          </a:p>
-        </p:txBody>
-      </p:sp>
-      <p:sp>
-        <p:nvSpPr>
-          <p:cNvPr id="5" name="TextBox 4"/>
+              <a:t>自分の研究の同意手続きが改正でどう変わるか確認</a:t>
+            </a:r>
+          </a:p>
+        </p:txBody>
+      </p:sp>
+      <p:sp>
+        <p:nvSpPr>
+          <p:cNvPr id="15" name="Rectangle 14"/>
+          <p:cNvSpPr/>
+          <p:nvPr/>
+        </p:nvSpPr>
+        <p:spPr>
+          <a:xfrm>
+            <a:off x="4754880" y="1920239"/>
+            <a:ext cx="4114800" cy="548640"/>
+          </a:xfrm>
+          <a:prstGeom prst="rect">
+            <a:avLst/>
+          </a:prstGeom>
+          <a:solidFill>
+            <a:srgbClr val="E8F0F0"/>
+          </a:solidFill>
+          <a:ln w="12700">
+            <a:solidFill>
+              <a:srgbClr val="4EB8A9"/>
+            </a:solidFill>
+          </a:ln>
+        </p:spPr>
+        <p:style>
+          <a:lnRef idx="1">
+            <a:schemeClr val="accent1"/>
+          </a:lnRef>
+          <a:fillRef idx="3">
+            <a:schemeClr val="accent1"/>
+          </a:fillRef>
+          <a:effectRef idx="2">
+            <a:schemeClr val="accent1"/>
+          </a:effectRef>
+          <a:fontRef idx="minor">
+            <a:schemeClr val="lt1"/>
+          </a:fontRef>
+        </p:style>
+        <p:txBody>
+          <a:bodyPr rtlCol="0" anchor="ctr"/>
+          <a:lstStyle/>
+          <a:p>
+            <a:pPr algn="ctr"/>
+          </a:p>
+        </p:txBody>
+      </p:sp>
+      <p:sp>
+        <p:nvSpPr>
+          <p:cNvPr id="16" name="TextBox 15"/>
           <p:cNvSpPr txBox="1"/>
           <p:nvPr/>
         </p:nvSpPr>
         <p:spPr>
           <a:xfrm>
-            <a:off x="457200" y="1508760"/>
-            <a:ext cx="274320" cy="411479"/>
+            <a:off x="4892040" y="1938527"/>
+            <a:ext cx="1097280" cy="274320"/>
           </a:xfrm>
           <a:prstGeom prst="rect">
             <a:avLst/>
@@ -7689,36 +7647,35 @@
           <a:noFill/>
         </p:spPr>
         <p:txBody>
-          <a:bodyPr wrap="square">
+          <a:bodyPr wrap="square" lIns="45720" rIns="45720" tIns="27432" bIns="27432">
             <a:spAutoFit/>
           </a:bodyPr>
           <a:lstStyle/>
           <a:p>
             <a:pPr algn="l">
-              <a:defRPr sz="1800" b="1">
-                <a:solidFill>
-                  <a:srgbClr val="E89B3B"/>
+              <a:defRPr sz="1100" b="1">
+                <a:solidFill>
+                  <a:srgbClr val="1A1A2E"/>
                 </a:solidFill>
                 <a:latin typeface="Calibri"/>
               </a:defRPr>
             </a:pPr>
             <a:r>
-              <a:rPr/>
-              <a:t>1.</a:t>
-            </a:r>
-          </a:p>
-        </p:txBody>
-      </p:sp>
-      <p:sp>
-        <p:nvSpPr>
-          <p:cNvPr id="6" name="TextBox 5"/>
+              <a:t>今週中</a:t>
+            </a:r>
+          </a:p>
+        </p:txBody>
+      </p:sp>
+      <p:sp>
+        <p:nvSpPr>
+          <p:cNvPr id="17" name="TextBox 16"/>
           <p:cNvSpPr txBox="1"/>
           <p:nvPr/>
         </p:nvSpPr>
         <p:spPr>
           <a:xfrm>
-            <a:off x="822960" y="1536192"/>
-            <a:ext cx="7772400" cy="365760"/>
+            <a:off x="6035040" y="1938527"/>
+            <a:ext cx="2743200" cy="457200"/>
           </a:xfrm>
           <a:prstGeom prst="rect">
             <a:avLst/>
@@ -7726,36 +7683,80 @@
           <a:noFill/>
         </p:spPr>
         <p:txBody>
-          <a:bodyPr wrap="square">
+          <a:bodyPr wrap="square" lIns="45720" rIns="45720" tIns="27432" bIns="27432">
             <a:spAutoFit/>
           </a:bodyPr>
           <a:lstStyle/>
           <a:p>
             <a:pPr algn="l">
-              <a:defRPr sz="1300" b="0">
-                <a:solidFill>
-                  <a:srgbClr val="F5F0E8"/>
+              <a:defRPr sz="1000" b="0">
+                <a:solidFill>
+                  <a:srgbClr val="1A1A2E"/>
                 </a:solidFill>
                 <a:latin typeface="Calibri"/>
               </a:defRPr>
             </a:pPr>
             <a:r>
-              <a:rPr/>
-              <a:t>同意手続きの二元化 — IC とオプトアウトの2本柱にシンプル化</a:t>
-            </a:r>
-          </a:p>
-        </p:txBody>
-      </p:sp>
-      <p:sp>
-        <p:nvSpPr>
-          <p:cNvPr id="7" name="TextBox 6"/>
+              <a:t>倫理審査委員会に新指針への移行スケジュールを問い合わせ</a:t>
+            </a:r>
+          </a:p>
+        </p:txBody>
+      </p:sp>
+      <p:sp>
+        <p:nvSpPr>
+          <p:cNvPr id="18" name="Rectangle 17"/>
+          <p:cNvSpPr/>
+          <p:nvPr/>
+        </p:nvSpPr>
+        <p:spPr>
+          <a:xfrm>
+            <a:off x="4754880" y="2560320"/>
+            <a:ext cx="4114800" cy="548640"/>
+          </a:xfrm>
+          <a:prstGeom prst="rect">
+            <a:avLst/>
+          </a:prstGeom>
+          <a:solidFill>
+            <a:srgbClr val="E8F0F0"/>
+          </a:solidFill>
+          <a:ln w="12700">
+            <a:solidFill>
+              <a:srgbClr val="4EB8A9"/>
+            </a:solidFill>
+          </a:ln>
+        </p:spPr>
+        <p:style>
+          <a:lnRef idx="1">
+            <a:schemeClr val="accent1"/>
+          </a:lnRef>
+          <a:fillRef idx="3">
+            <a:schemeClr val="accent1"/>
+          </a:fillRef>
+          <a:effectRef idx="2">
+            <a:schemeClr val="accent1"/>
+          </a:effectRef>
+          <a:fontRef idx="minor">
+            <a:schemeClr val="lt1"/>
+          </a:fontRef>
+        </p:style>
+        <p:txBody>
+          <a:bodyPr rtlCol="0" anchor="ctr"/>
+          <a:lstStyle/>
+          <a:p>
+            <a:pPr algn="ctr"/>
+          </a:p>
+        </p:txBody>
+      </p:sp>
+      <p:sp>
+        <p:nvSpPr>
+          <p:cNvPr id="19" name="TextBox 18"/>
           <p:cNvSpPr txBox="1"/>
           <p:nvPr/>
         </p:nvSpPr>
         <p:spPr>
           <a:xfrm>
-            <a:off x="457200" y="2011680"/>
-            <a:ext cx="274320" cy="411479"/>
+            <a:off x="4892040" y="2578608"/>
+            <a:ext cx="1097280" cy="274320"/>
           </a:xfrm>
           <a:prstGeom prst="rect">
             <a:avLst/>
@@ -7763,36 +7764,35 @@
           <a:noFill/>
         </p:spPr>
         <p:txBody>
-          <a:bodyPr wrap="square">
+          <a:bodyPr wrap="square" lIns="45720" rIns="45720" tIns="27432" bIns="27432">
             <a:spAutoFit/>
           </a:bodyPr>
           <a:lstStyle/>
           <a:p>
             <a:pPr algn="l">
-              <a:defRPr sz="1800" b="1">
-                <a:solidFill>
-                  <a:srgbClr val="E89B3B"/>
+              <a:defRPr sz="1100" b="1">
+                <a:solidFill>
+                  <a:srgbClr val="1A1A2E"/>
                 </a:solidFill>
                 <a:latin typeface="Calibri"/>
               </a:defRPr>
             </a:pPr>
             <a:r>
-              <a:rPr/>
-              <a:t>2.</a:t>
-            </a:r>
-          </a:p>
-        </p:txBody>
-      </p:sp>
-      <p:sp>
-        <p:nvSpPr>
-          <p:cNvPr id="8" name="TextBox 7"/>
+              <a:t>来月</a:t>
+            </a:r>
+          </a:p>
+        </p:txBody>
+      </p:sp>
+      <p:sp>
+        <p:nvSpPr>
+          <p:cNvPr id="20" name="TextBox 19"/>
           <p:cNvSpPr txBox="1"/>
           <p:nvPr/>
         </p:nvSpPr>
         <p:spPr>
           <a:xfrm>
-            <a:off x="822960" y="2039112"/>
-            <a:ext cx="7772400" cy="365760"/>
+            <a:off x="6035040" y="2578608"/>
+            <a:ext cx="2743200" cy="457200"/>
           </a:xfrm>
           <a:prstGeom prst="rect">
             <a:avLst/>
@@ -7800,36 +7800,123 @@
           <a:noFill/>
         </p:spPr>
         <p:txBody>
-          <a:bodyPr wrap="square">
+          <a:bodyPr wrap="square" lIns="45720" rIns="45720" tIns="27432" bIns="27432">
             <a:spAutoFit/>
           </a:bodyPr>
           <a:lstStyle/>
           <a:p>
             <a:pPr algn="l">
-              <a:defRPr sz="1300" b="0">
-                <a:solidFill>
-                  <a:srgbClr val="F5F0E8"/>
+              <a:defRPr sz="1000" b="0">
+                <a:solidFill>
+                  <a:srgbClr val="1A1A2E"/>
                 </a:solidFill>
                 <a:latin typeface="Calibri"/>
               </a:defRPr>
             </a:pPr>
             <a:r>
-              <a:rPr/>
-              <a:t>仮名加工情報のオプトアウト利用 — 自機関作成ならICなしでOK</a:t>
-            </a:r>
-          </a:p>
-        </p:txBody>
-      </p:sp>
-      <p:sp>
-        <p:nvSpPr>
-          <p:cNvPr id="9" name="TextBox 8"/>
+              <a:t>新指針準拠の研究計画書ドラフトを書いてみる</a:t>
+            </a:r>
+          </a:p>
+        </p:txBody>
+      </p:sp>
+      <p:sp>
+        <p:nvSpPr>
+          <p:cNvPr id="21" name="Rectangle 20"/>
+          <p:cNvSpPr/>
+          <p:nvPr/>
+        </p:nvSpPr>
+        <p:spPr>
+          <a:xfrm>
+            <a:off x="457200" y="3474720"/>
+            <a:ext cx="54864" cy="548640"/>
+          </a:xfrm>
+          <a:prstGeom prst="rect">
+            <a:avLst/>
+          </a:prstGeom>
+          <a:solidFill>
+            <a:srgbClr val="E89B3B"/>
+          </a:solidFill>
+          <a:ln>
+            <a:noFill/>
+          </a:ln>
+        </p:spPr>
+        <p:style>
+          <a:lnRef idx="1">
+            <a:schemeClr val="accent1"/>
+          </a:lnRef>
+          <a:fillRef idx="3">
+            <a:schemeClr val="accent1"/>
+          </a:fillRef>
+          <a:effectRef idx="2">
+            <a:schemeClr val="accent1"/>
+          </a:effectRef>
+          <a:fontRef idx="minor">
+            <a:schemeClr val="lt1"/>
+          </a:fontRef>
+        </p:style>
+        <p:txBody>
+          <a:bodyPr rtlCol="0" anchor="ctr"/>
+          <a:lstStyle/>
+          <a:p>
+            <a:pPr algn="ctr"/>
+          </a:p>
+        </p:txBody>
+      </p:sp>
+      <p:sp>
+        <p:nvSpPr>
+          <p:cNvPr id="22" name="Rectangle 21"/>
+          <p:cNvSpPr/>
+          <p:nvPr/>
+        </p:nvSpPr>
+        <p:spPr>
+          <a:xfrm>
+            <a:off x="566928" y="3474720"/>
+            <a:ext cx="8119872" cy="548640"/>
+          </a:xfrm>
+          <a:prstGeom prst="rect">
+            <a:avLst/>
+          </a:prstGeom>
+          <a:solidFill>
+            <a:srgbClr val="FFFFFF"/>
+          </a:solidFill>
+          <a:ln w="12700">
+            <a:solidFill>
+              <a:srgbClr val="4EB8A9"/>
+            </a:solidFill>
+          </a:ln>
+        </p:spPr>
+        <p:style>
+          <a:lnRef idx="1">
+            <a:schemeClr val="accent1"/>
+          </a:lnRef>
+          <a:fillRef idx="3">
+            <a:schemeClr val="accent1"/>
+          </a:fillRef>
+          <a:effectRef idx="2">
+            <a:schemeClr val="accent1"/>
+          </a:effectRef>
+          <a:fontRef idx="minor">
+            <a:schemeClr val="lt1"/>
+          </a:fontRef>
+        </p:style>
+        <p:txBody>
+          <a:bodyPr rtlCol="0" anchor="ctr"/>
+          <a:lstStyle/>
+          <a:p>
+            <a:pPr algn="ctr"/>
+          </a:p>
+        </p:txBody>
+      </p:sp>
+      <p:sp>
+        <p:nvSpPr>
+          <p:cNvPr id="23" name="TextBox 22"/>
           <p:cNvSpPr txBox="1"/>
           <p:nvPr/>
         </p:nvSpPr>
         <p:spPr>
           <a:xfrm>
-            <a:off x="457200" y="2514600"/>
-            <a:ext cx="274320" cy="411479"/>
+            <a:off x="685800" y="3547872"/>
+            <a:ext cx="7863840" cy="402335"/>
           </a:xfrm>
           <a:prstGeom prst="rect">
             <a:avLst/>
@@ -7837,201 +7924,25 @@
           <a:noFill/>
         </p:spPr>
         <p:txBody>
-          <a:bodyPr wrap="square">
+          <a:bodyPr wrap="square" lIns="45720" rIns="45720" tIns="27432" bIns="27432">
             <a:spAutoFit/>
           </a:bodyPr>
           <a:lstStyle/>
           <a:p>
             <a:pPr algn="l">
-              <a:defRPr sz="1800" b="1">
-                <a:solidFill>
-                  <a:srgbClr val="E89B3B"/>
-                </a:solidFill>
-                <a:latin typeface="Calibri"/>
+              <a:defRPr sz="1200" b="0">
+                <a:solidFill>
+                  <a:srgbClr val="1A1A2E"/>
+                </a:solidFill>
+                <a:latin typeface="Georgia"/>
               </a:defRPr>
             </a:pPr>
             <a:r>
-              <a:rPr/>
-              <a:t>3.</a:t>
-            </a:r>
-          </a:p>
-        </p:txBody>
-      </p:sp>
-      <p:sp>
-        <p:nvSpPr>
-          <p:cNvPr id="10" name="TextBox 9"/>
-          <p:cNvSpPr txBox="1"/>
-          <p:nvPr/>
-        </p:nvSpPr>
-        <p:spPr>
-          <a:xfrm>
-            <a:off x="822960" y="2542032"/>
-            <a:ext cx="7772400" cy="365760"/>
-          </a:xfrm>
-          <a:prstGeom prst="rect">
-            <a:avLst/>
-          </a:prstGeom>
-          <a:noFill/>
-        </p:spPr>
-        <p:txBody>
-          <a:bodyPr wrap="square">
-            <a:spAutoFit/>
-          </a:bodyPr>
-          <a:lstStyle/>
-          <a:p>
-            <a:pPr algn="l">
-              <a:defRPr sz="1300" b="0">
-                <a:solidFill>
-                  <a:srgbClr val="F5F0E8"/>
-                </a:solidFill>
-                <a:latin typeface="Calibri"/>
-              </a:defRPr>
-            </a:pPr>
-            <a:r>
-              <a:rPr/>
-              <a:t>匿名加工情報の制限撤廃 — より幅広いデータ利活用が可能に</a:t>
-            </a:r>
-          </a:p>
-        </p:txBody>
-      </p:sp>
-      <p:sp>
-        <p:nvSpPr>
-          <p:cNvPr id="11" name="TextBox 10"/>
-          <p:cNvSpPr txBox="1"/>
-          <p:nvPr/>
-        </p:nvSpPr>
-        <p:spPr>
-          <a:xfrm>
-            <a:off x="365760" y="3200400"/>
-            <a:ext cx="4572000" cy="322579"/>
-          </a:xfrm>
-          <a:prstGeom prst="rect">
-            <a:avLst/>
-          </a:prstGeom>
-          <a:noFill/>
-        </p:spPr>
-        <p:txBody>
-          <a:bodyPr wrap="square">
-            <a:spAutoFit/>
-          </a:bodyPr>
-          <a:lstStyle/>
-          <a:p>
-            <a:pPr algn="l">
-              <a:defRPr sz="1300" b="1">
-                <a:solidFill>
-                  <a:srgbClr val="4EB8A9"/>
-                </a:solidFill>
-                <a:latin typeface="Calibri"/>
-              </a:defRPr>
-            </a:pPr>
-            <a:r>
-              <a:rPr/>
-              <a:t>あなたの次のアクション（1つ選んでください）</a:t>
-            </a:r>
-          </a:p>
-        </p:txBody>
-      </p:sp>
-      <p:sp>
-        <p:nvSpPr>
-          <p:cNvPr id="12" name="TextBox 11"/>
-          <p:cNvSpPr txBox="1"/>
-          <p:nvPr/>
-        </p:nvSpPr>
-        <p:spPr>
-          <a:xfrm>
-            <a:off x="457200" y="3566160"/>
-            <a:ext cx="8229600" cy="914400"/>
-          </a:xfrm>
-          <a:prstGeom prst="rect">
-            <a:avLst/>
-          </a:prstGeom>
-          <a:noFill/>
-        </p:spPr>
-        <p:txBody>
-          <a:bodyPr wrap="square">
-            <a:spAutoFit/>
-          </a:bodyPr>
-          <a:lstStyle/>
-          <a:p>
-            <a:pPr>
-              <a:defRPr sz="1100">
-                <a:solidFill>
-                  <a:srgbClr val="F5F0E8"/>
-                </a:solidFill>
-                <a:latin typeface="Calibri"/>
-              </a:defRPr>
-              <a:buChar char="☐"/>
-            </a:pPr>
-            <a:r>
-              <a:rPr/>
-              <a:t>今すぐ: 自分の研究の同意手続きが改正でどう変わるか確認する</a:t>
-            </a:r>
-          </a:p>
-          <a:p>
-            <a:pPr>
-              <a:defRPr sz="1100">
-                <a:solidFill>
-                  <a:srgbClr val="F5F0E8"/>
-                </a:solidFill>
-                <a:latin typeface="Calibri"/>
-              </a:defRPr>
-              <a:buChar char="☐"/>
-            </a:pPr>
-            <a:r>
-              <a:rPr/>
-              <a:t>今週中: 倫理審査委員会の事務局に新指針への移行スケジュールを問い合わせる</a:t>
-            </a:r>
-          </a:p>
-          <a:p>
-            <a:pPr>
-              <a:defRPr sz="1100">
-                <a:solidFill>
-                  <a:srgbClr val="F5F0E8"/>
-                </a:solidFill>
-                <a:latin typeface="Calibri"/>
-              </a:defRPr>
-              <a:buChar char="☐"/>
-            </a:pPr>
-            <a:r>
-              <a:rPr/>
-              <a:t>来月: 新指針に準拠した研究計画書のドラフトを書いてみる</a:t>
-            </a:r>
-          </a:p>
-        </p:txBody>
-      </p:sp>
-      <p:sp>
-        <p:nvSpPr>
-          <p:cNvPr id="13" name="TextBox 12"/>
-          <p:cNvSpPr txBox="1"/>
-          <p:nvPr/>
-        </p:nvSpPr>
-        <p:spPr>
-          <a:xfrm>
-            <a:off x="365760" y="4617720"/>
-            <a:ext cx="8229600" cy="274320"/>
-          </a:xfrm>
-          <a:prstGeom prst="rect">
-            <a:avLst/>
-          </a:prstGeom>
-          <a:noFill/>
-        </p:spPr>
-        <p:txBody>
-          <a:bodyPr wrap="square">
-            <a:spAutoFit/>
-          </a:bodyPr>
-          <a:lstStyle/>
-          <a:p>
-            <a:pPr algn="l">
-              <a:defRPr sz="800" b="0">
-                <a:solidFill>
-                  <a:srgbClr val="7A8A9A"/>
-                </a:solidFill>
-                <a:latin typeface="Calibri"/>
-              </a:defRPr>
-            </a:pPr>
-            <a:r>
-              <a:rPr/>
-              <a:t>※ 本教材は2026年3月27日時点の情報に基づいています。施行は2026年度中の予定。</a:t>
+              <a:t>改正は研究を「やりやすくする」方向。</a:t>
+            </a:r>
+            <a:br/>
+            <a:r>
+              <a:t>ただし手続きは変わるので、今のうちに準備を。</a:t>
             </a:r>
           </a:p>
         </p:txBody>

--- a/output/education/2026-03-27_ethics-guideline-revision/ethics-guideline-revision_slides_residents.pptx
+++ b/output/education/2026-03-27_ethics-guideline-revision/ethics-guideline-revision_slides_residents.pptx
@@ -3134,6 +3134,7 @@
               </a:defRPr>
             </a:pPr>
             <a:r>
+              <a:rPr/>
               <a:t>研究倫理指針が変わります</a:t>
             </a:r>
           </a:p>
@@ -3170,10 +3171,12 @@
               </a:defRPr>
             </a:pPr>
             <a:r>
+              <a:rPr/>
               <a:t>あなたの研究計画書</a:t>
             </a:r>
             <a:br/>
             <a:r>
+              <a:rPr/>
               <a:t>そのまま通りますか？</a:t>
             </a:r>
           </a:p>
@@ -3218,7 +3221,9 @@
           <a:bodyPr rtlCol="0" anchor="ctr"/>
           <a:lstStyle/>
           <a:p>
-            <a:pPr algn="ctr"/>
+            <a:pPr algn="ctr">
+              <a:defRPr/>
+            </a:pPr>
           </a:p>
         </p:txBody>
       </p:sp>
@@ -3254,6 +3259,7 @@
               <a:buChar char="●"/>
             </a:pPr>
             <a:r>
+              <a:rPr/>
               <a:t>文科省・厚労省・経産省の3省合同改正</a:t>
             </a:r>
           </a:p>
@@ -3268,6 +3274,7 @@
               <a:buChar char="●"/>
             </a:pPr>
             <a:r>
+              <a:rPr/>
               <a:t>パブコメ: 2025年12月〜2026年1月（終了済み）</a:t>
             </a:r>
           </a:p>
@@ -3282,6 +3289,7 @@
               <a:buChar char="●"/>
             </a:pPr>
             <a:r>
+              <a:rPr/>
               <a:t>2026年度中に施行予定</a:t>
             </a:r>
           </a:p>
@@ -3326,7 +3334,9 @@
           <a:bodyPr rtlCol="0" anchor="ctr"/>
           <a:lstStyle/>
           <a:p>
-            <a:pPr algn="ctr"/>
+            <a:pPr algn="ctr">
+              <a:defRPr/>
+            </a:pPr>
           </a:p>
         </p:txBody>
       </p:sp>
@@ -3371,7 +3381,9 @@
           <a:bodyPr rtlCol="0" anchor="ctr"/>
           <a:lstStyle/>
           <a:p>
-            <a:pPr algn="ctr"/>
+            <a:pPr algn="ctr">
+              <a:defRPr/>
+            </a:pPr>
           </a:p>
         </p:txBody>
       </p:sp>
@@ -3406,6 +3418,7 @@
               </a:defRPr>
             </a:pPr>
             <a:r>
+              <a:rPr/>
               <a:t>指針が「複雑かつ難解」で研究を停滞させていた → シンプルに再設計</a:t>
             </a:r>
           </a:p>
@@ -3446,7 +3459,7 @@
         <p:spPr>
           <a:xfrm>
             <a:off x="457200" y="274320"/>
-            <a:ext cx="8229600" cy="457200"/>
+            <a:ext cx="8229600" cy="484632"/>
           </a:xfrm>
           <a:prstGeom prst="rect">
             <a:avLst/>
@@ -3468,6 +3481,7 @@
               </a:defRPr>
             </a:pPr>
             <a:r>
+              <a:rPr/>
               <a:t>今日の学習目標（15分）</a:t>
             </a:r>
           </a:p>
@@ -3512,7 +3526,9 @@
           <a:bodyPr rtlCol="0" anchor="ctr"/>
           <a:lstStyle/>
           <a:p>
-            <a:pPr algn="ctr"/>
+            <a:pPr algn="ctr">
+              <a:defRPr/>
+            </a:pPr>
           </a:p>
         </p:txBody>
       </p:sp>
@@ -3557,7 +3573,9 @@
           <a:bodyPr rtlCol="0" anchor="ctr"/>
           <a:lstStyle/>
           <a:p>
-            <a:pPr algn="ctr"/>
+            <a:pPr algn="ctr">
+              <a:defRPr/>
+            </a:pPr>
           </a:p>
         </p:txBody>
       </p:sp>
@@ -3592,6 +3610,7 @@
               </a:defRPr>
             </a:pPr>
             <a:r>
+              <a:rPr/>
               <a:t>説明できる</a:t>
             </a:r>
           </a:p>
@@ -3628,6 +3647,7 @@
               </a:defRPr>
             </a:pPr>
             <a:r>
+              <a:rPr/>
               <a:t>改正の3つの柱を述べられる</a:t>
             </a:r>
           </a:p>
@@ -3674,7 +3694,9 @@
           <a:bodyPr rtlCol="0" anchor="ctr"/>
           <a:lstStyle/>
           <a:p>
-            <a:pPr algn="ctr"/>
+            <a:pPr algn="ctr">
+              <a:defRPr/>
+            </a:pPr>
           </a:p>
         </p:txBody>
       </p:sp>
@@ -3709,6 +3731,7 @@
               </a:defRPr>
             </a:pPr>
             <a:r>
+              <a:rPr/>
               <a:t>分析できる</a:t>
             </a:r>
           </a:p>
@@ -3745,6 +3768,7 @@
               </a:defRPr>
             </a:pPr>
             <a:r>
+              <a:rPr/>
               <a:t>自分の研究に影響する変更点を特定できる</a:t>
             </a:r>
           </a:p>
@@ -3791,7 +3815,9 @@
           <a:bodyPr rtlCol="0" anchor="ctr"/>
           <a:lstStyle/>
           <a:p>
-            <a:pPr algn="ctr"/>
+            <a:pPr algn="ctr">
+              <a:defRPr/>
+            </a:pPr>
           </a:p>
         </p:txBody>
       </p:sp>
@@ -3826,6 +3852,7 @@
               </a:defRPr>
             </a:pPr>
             <a:r>
+              <a:rPr/>
               <a:t>書ける</a:t>
             </a:r>
           </a:p>
@@ -3862,6 +3889,7 @@
               </a:defRPr>
             </a:pPr>
             <a:r>
+              <a:rPr/>
               <a:t>新指針に準拠した研究計画書の骨子を書き始められる</a:t>
             </a:r>
           </a:p>
@@ -3902,7 +3930,7 @@
         <p:spPr>
           <a:xfrm>
             <a:off x="457200" y="274320"/>
-            <a:ext cx="8229600" cy="457200"/>
+            <a:ext cx="8229600" cy="484632"/>
           </a:xfrm>
           <a:prstGeom prst="rect">
             <a:avLst/>
@@ -3924,6 +3952,7 @@
               </a:defRPr>
             </a:pPr>
             <a:r>
+              <a:rPr/>
               <a:t>Quick Poll</a:t>
             </a:r>
           </a:p>
@@ -3968,7 +3997,9 @@
           <a:bodyPr rtlCol="0" anchor="ctr"/>
           <a:lstStyle/>
           <a:p>
-            <a:pPr algn="ctr"/>
+            <a:pPr algn="ctr">
+              <a:defRPr/>
+            </a:pPr>
           </a:p>
         </p:txBody>
       </p:sp>
@@ -4013,7 +4044,9 @@
           <a:bodyPr rtlCol="0" anchor="ctr"/>
           <a:lstStyle/>
           <a:p>
-            <a:pPr algn="ctr"/>
+            <a:pPr algn="ctr">
+              <a:defRPr/>
+            </a:pPr>
           </a:p>
         </p:txBody>
       </p:sp>
@@ -4048,6 +4081,7 @@
               </a:defRPr>
             </a:pPr>
             <a:r>
+              <a:rPr/>
               <a:t>✋  倫理指針を読んだことがある人？</a:t>
             </a:r>
           </a:p>
@@ -4094,7 +4128,9 @@
           <a:bodyPr rtlCol="0" anchor="ctr"/>
           <a:lstStyle/>
           <a:p>
-            <a:pPr algn="ctr"/>
+            <a:pPr algn="ctr">
+              <a:defRPr/>
+            </a:pPr>
           </a:p>
         </p:txBody>
       </p:sp>
@@ -4129,6 +4165,7 @@
               </a:defRPr>
             </a:pPr>
             <a:r>
+              <a:rPr/>
               <a:t>✋  ICとオプトアウトの違いを説明できる人？</a:t>
             </a:r>
           </a:p>
@@ -4175,7 +4212,9 @@
           <a:bodyPr rtlCol="0" anchor="ctr"/>
           <a:lstStyle/>
           <a:p>
-            <a:pPr algn="ctr"/>
+            <a:pPr algn="ctr">
+              <a:defRPr/>
+            </a:pPr>
           </a:p>
         </p:txBody>
       </p:sp>
@@ -4210,6 +4249,7 @@
               </a:defRPr>
             </a:pPr>
             <a:r>
+              <a:rPr/>
               <a:t>✋  仮名加工情報を扱ったことがある人？</a:t>
             </a:r>
           </a:p>
@@ -4254,7 +4294,9 @@
           <a:bodyPr rtlCol="0" anchor="ctr"/>
           <a:lstStyle/>
           <a:p>
-            <a:pPr algn="ctr"/>
+            <a:pPr algn="ctr">
+              <a:defRPr/>
+            </a:pPr>
           </a:p>
         </p:txBody>
       </p:sp>
@@ -4299,7 +4341,9 @@
           <a:bodyPr rtlCol="0" anchor="ctr"/>
           <a:lstStyle/>
           <a:p>
-            <a:pPr algn="ctr"/>
+            <a:pPr algn="ctr">
+              <a:defRPr/>
+            </a:pPr>
           </a:p>
         </p:txBody>
       </p:sp>
@@ -4334,6 +4378,7 @@
               </a:defRPr>
             </a:pPr>
             <a:r>
+              <a:rPr/>
               <a:t>今日は「同意のとり方」と「個人情報の種類」の2軸で整理します。</a:t>
             </a:r>
           </a:p>
@@ -4396,6 +4441,7 @@
               </a:defRPr>
             </a:pPr>
             <a:r>
+              <a:rPr/>
               <a:t>改正の3つの柱</a:t>
             </a:r>
           </a:p>
@@ -4440,7 +4486,9 @@
           <a:bodyPr rtlCol="0" anchor="ctr"/>
           <a:lstStyle/>
           <a:p>
-            <a:pPr algn="ctr"/>
+            <a:pPr algn="ctr">
+              <a:defRPr/>
+            </a:pPr>
           </a:p>
         </p:txBody>
       </p:sp>
@@ -4485,7 +4533,9 @@
           <a:bodyPr rtlCol="0" anchor="ctr"/>
           <a:lstStyle/>
           <a:p>
-            <a:pPr algn="ctr"/>
+            <a:pPr algn="ctr">
+              <a:defRPr/>
+            </a:pPr>
           </a:p>
         </p:txBody>
       </p:sp>
@@ -4528,7 +4578,9 @@
           <a:bodyPr rtlCol="0" anchor="ctr"/>
           <a:lstStyle/>
           <a:p>
-            <a:pPr algn="ctr"/>
+            <a:pPr algn="ctr">
+              <a:defRPr/>
+            </a:pPr>
           </a:p>
         </p:txBody>
       </p:sp>
@@ -4563,6 +4615,7 @@
               </a:defRPr>
             </a:pPr>
             <a:r>
+              <a:rPr/>
               <a:t>1</a:t>
             </a:r>
           </a:p>
@@ -4599,6 +4652,7 @@
               </a:defRPr>
             </a:pPr>
             <a:r>
+              <a:rPr/>
               <a:t>同意手続きの簡素化</a:t>
             </a:r>
           </a:p>
@@ -4612,7 +4666,7 @@
         </p:nvSpPr>
         <p:spPr>
           <a:xfrm>
-            <a:off x="1371600" y="1417320"/>
+            <a:off x="1371600" y="1481328"/>
             <a:ext cx="6858000" cy="548640"/>
           </a:xfrm>
           <a:prstGeom prst="rect">
@@ -4635,10 +4689,12 @@
               </a:defRPr>
             </a:pPr>
             <a:r>
+              <a:rPr/>
               <a:t>ICとオプトアウトの二元化</a:t>
             </a:r>
             <a:br/>
             <a:r>
+              <a:rPr/>
               <a:t>場面ごとの分岐ルール → シンプルに</a:t>
             </a:r>
           </a:p>
@@ -4685,7 +4741,9 @@
           <a:bodyPr rtlCol="0" anchor="ctr"/>
           <a:lstStyle/>
           <a:p>
-            <a:pPr algn="ctr"/>
+            <a:pPr algn="ctr">
+              <a:defRPr/>
+            </a:pPr>
           </a:p>
         </p:txBody>
       </p:sp>
@@ -4728,7 +4786,9 @@
           <a:bodyPr rtlCol="0" anchor="ctr"/>
           <a:lstStyle/>
           <a:p>
-            <a:pPr algn="ctr"/>
+            <a:pPr algn="ctr">
+              <a:defRPr/>
+            </a:pPr>
           </a:p>
         </p:txBody>
       </p:sp>
@@ -4763,6 +4823,7 @@
               </a:defRPr>
             </a:pPr>
             <a:r>
+              <a:rPr/>
               <a:t>2</a:t>
             </a:r>
           </a:p>
@@ -4799,6 +4860,7 @@
               </a:defRPr>
             </a:pPr>
             <a:r>
+              <a:rPr/>
               <a:t>仮名加工情報の活用拡大</a:t>
             </a:r>
           </a:p>
@@ -4812,7 +4874,7 @@
         </p:nvSpPr>
         <p:spPr>
           <a:xfrm>
-            <a:off x="1371600" y="2788920"/>
+            <a:off x="1371600" y="2852928"/>
             <a:ext cx="6858000" cy="548640"/>
           </a:xfrm>
           <a:prstGeom prst="rect">
@@ -4835,10 +4897,12 @@
               </a:defRPr>
             </a:pPr>
             <a:r>
+              <a:rPr/>
               <a:t>自機関で作成 → ICなし（オプトアウト）でOK</a:t>
             </a:r>
             <a:br/>
             <a:r>
+              <a:rPr/>
               <a:t>匿名加工情報の利用制限を撤廃</a:t>
             </a:r>
           </a:p>
@@ -4885,7 +4949,9 @@
           <a:bodyPr rtlCol="0" anchor="ctr"/>
           <a:lstStyle/>
           <a:p>
-            <a:pPr algn="ctr"/>
+            <a:pPr algn="ctr">
+              <a:defRPr/>
+            </a:pPr>
           </a:p>
         </p:txBody>
       </p:sp>
@@ -4928,7 +4994,9 @@
           <a:bodyPr rtlCol="0" anchor="ctr"/>
           <a:lstStyle/>
           <a:p>
-            <a:pPr algn="ctr"/>
+            <a:pPr algn="ctr">
+              <a:defRPr/>
+            </a:pPr>
           </a:p>
         </p:txBody>
       </p:sp>
@@ -4963,6 +5031,7 @@
               </a:defRPr>
             </a:pPr>
             <a:r>
+              <a:rPr/>
               <a:t>3</a:t>
             </a:r>
           </a:p>
@@ -4999,6 +5068,7 @@
               </a:defRPr>
             </a:pPr>
             <a:r>
+              <a:rPr/>
               <a:t>包括同意のルール明確化</a:t>
             </a:r>
           </a:p>
@@ -5012,7 +5082,7 @@
         </p:nvSpPr>
         <p:spPr>
           <a:xfrm>
-            <a:off x="1371600" y="4160520"/>
+            <a:off x="1371600" y="4224527"/>
             <a:ext cx="6858000" cy="548640"/>
           </a:xfrm>
           <a:prstGeom prst="rect">
@@ -5035,10 +5105,12 @@
               </a:defRPr>
             </a:pPr>
             <a:r>
+              <a:rPr/>
               <a:t>包括同意だけでは不十分</a:t>
             </a:r>
             <a:br/>
             <a:r>
+              <a:rPr/>
               <a:t>+ オプトアウト手続きが必要に</a:t>
             </a:r>
           </a:p>
@@ -5101,6 +5173,7 @@
               </a:defRPr>
             </a:pPr>
             <a:r>
+              <a:rPr/>
               <a:t>あなたの研究、どの同意が必要？</a:t>
             </a:r>
           </a:p>
@@ -5145,7 +5218,9 @@
           <a:bodyPr rtlCol="0" anchor="ctr"/>
           <a:lstStyle/>
           <a:p>
-            <a:pPr algn="ctr"/>
+            <a:pPr algn="ctr">
+              <a:defRPr/>
+            </a:pPr>
           </a:p>
         </p:txBody>
       </p:sp>
@@ -5188,7 +5263,9 @@
           <a:bodyPr rtlCol="0" anchor="ctr"/>
           <a:lstStyle/>
           <a:p>
-            <a:pPr algn="ctr"/>
+            <a:pPr algn="ctr">
+              <a:defRPr/>
+            </a:pPr>
           </a:p>
         </p:txBody>
       </p:sp>
@@ -5223,6 +5300,7 @@
               </a:defRPr>
             </a:pPr>
             <a:r>
+              <a:rPr/>
               <a:t>研究で使うデータは？</a:t>
             </a:r>
           </a:p>
@@ -5267,7 +5345,9 @@
           <a:bodyPr rtlCol="0" anchor="ctr"/>
           <a:lstStyle/>
           <a:p>
-            <a:pPr algn="ctr"/>
+            <a:pPr algn="ctr">
+              <a:defRPr/>
+            </a:pPr>
           </a:p>
         </p:txBody>
       </p:sp>
@@ -5302,10 +5382,12 @@
               </a:defRPr>
             </a:pPr>
             <a:r>
+              <a:rPr/>
               <a:t>新規に採取する試料</a:t>
             </a:r>
             <a:br/>
             <a:r>
+              <a:rPr/>
               <a:t>侵襲を伴う</a:t>
             </a:r>
           </a:p>
@@ -5342,6 +5424,7 @@
               </a:defRPr>
             </a:pPr>
             <a:r>
+              <a:rPr/>
               <a:t>→ IC必須</a:t>
             </a:r>
           </a:p>
@@ -5386,7 +5469,9 @@
           <a:bodyPr rtlCol="0" anchor="ctr"/>
           <a:lstStyle/>
           <a:p>
-            <a:pPr algn="ctr"/>
+            <a:pPr algn="ctr">
+              <a:defRPr/>
+            </a:pPr>
           </a:p>
         </p:txBody>
       </p:sp>
@@ -5421,6 +5506,7 @@
               </a:defRPr>
             </a:pPr>
             <a:r>
+              <a:rPr/>
               <a:t>既存の試料・情報</a:t>
             </a:r>
           </a:p>
@@ -5457,6 +5543,7 @@
               </a:defRPr>
             </a:pPr>
             <a:r>
+              <a:rPr/>
               <a:t>→ 下へ</a:t>
             </a:r>
           </a:p>
@@ -5493,6 +5580,7 @@
               </a:defRPr>
             </a:pPr>
             <a:r>
+              <a:rPr/>
               <a:t>匿名加工情報</a:t>
             </a:r>
           </a:p>
@@ -5537,7 +5625,9 @@
           <a:bodyPr rtlCol="0" anchor="ctr"/>
           <a:lstStyle/>
           <a:p>
-            <a:pPr algn="ctr"/>
+            <a:pPr algn="ctr">
+              <a:defRPr/>
+            </a:pPr>
           </a:p>
         </p:txBody>
       </p:sp>
@@ -5572,6 +5662,7 @@
               </a:defRPr>
             </a:pPr>
             <a:r>
+              <a:rPr/>
               <a:t>同意不要（制限撤廃）</a:t>
             </a:r>
           </a:p>
@@ -5608,6 +5699,7 @@
               </a:defRPr>
             </a:pPr>
             <a:r>
+              <a:rPr/>
               <a:t>仮名加工情報（自機関作成）</a:t>
             </a:r>
           </a:p>
@@ -5652,7 +5744,9 @@
           <a:bodyPr rtlCol="0" anchor="ctr"/>
           <a:lstStyle/>
           <a:p>
-            <a:pPr algn="ctr"/>
+            <a:pPr algn="ctr">
+              <a:defRPr/>
+            </a:pPr>
           </a:p>
         </p:txBody>
       </p:sp>
@@ -5687,6 +5781,7 @@
               </a:defRPr>
             </a:pPr>
             <a:r>
+              <a:rPr/>
               <a:t>オプトアウトでOK</a:t>
             </a:r>
           </a:p>
@@ -5723,6 +5818,7 @@
               </a:defRPr>
             </a:pPr>
             <a:r>
+              <a:rPr/>
               <a:t>包括同意取得済み</a:t>
             </a:r>
           </a:p>
@@ -5767,7 +5863,9 @@
           <a:bodyPr rtlCol="0" anchor="ctr"/>
           <a:lstStyle/>
           <a:p>
-            <a:pPr algn="ctr"/>
+            <a:pPr algn="ctr">
+              <a:defRPr/>
+            </a:pPr>
           </a:p>
         </p:txBody>
       </p:sp>
@@ -5802,6 +5900,7 @@
               </a:defRPr>
             </a:pPr>
             <a:r>
+              <a:rPr/>
               <a:t>範囲内ならオプトアウト</a:t>
             </a:r>
           </a:p>
@@ -5838,6 +5937,7 @@
               </a:defRPr>
             </a:pPr>
             <a:r>
+              <a:rPr/>
               <a:t>その他の既存情報</a:t>
             </a:r>
           </a:p>
@@ -5882,7 +5982,9 @@
           <a:bodyPr rtlCol="0" anchor="ctr"/>
           <a:lstStyle/>
           <a:p>
-            <a:pPr algn="ctr"/>
+            <a:pPr algn="ctr">
+              <a:defRPr/>
+            </a:pPr>
           </a:p>
         </p:txBody>
       </p:sp>
@@ -5917,6 +6019,7 @@
               </a:defRPr>
             </a:pPr>
             <a:r>
+              <a:rPr/>
               <a:t>オプトアウトが基本</a:t>
             </a:r>
           </a:p>
@@ -5979,6 +6082,7 @@
               </a:defRPr>
             </a:pPr>
             <a:r>
+              <a:rPr/>
               <a:t>ミニ研究計画書ワーク</a:t>
             </a:r>
           </a:p>
@@ -6023,7 +6127,9 @@
           <a:bodyPr rtlCol="0" anchor="ctr"/>
           <a:lstStyle/>
           <a:p>
-            <a:pPr algn="ctr"/>
+            <a:pPr algn="ctr">
+              <a:defRPr/>
+            </a:pPr>
           </a:p>
         </p:txBody>
       </p:sp>
@@ -6036,7 +6142,7 @@
         <p:spPr>
           <a:xfrm>
             <a:off x="457200" y="914400"/>
-            <a:ext cx="8229600" cy="274320"/>
+            <a:ext cx="8229600" cy="322579"/>
           </a:xfrm>
           <a:prstGeom prst="rect">
             <a:avLst/>
@@ -6058,6 +6164,7 @@
               </a:defRPr>
             </a:pPr>
             <a:r>
+              <a:rPr/>
               <a:t>ペアワーク 4分 — シナリオを1つ選んで骨子を書く</a:t>
             </a:r>
           </a:p>
@@ -6104,7 +6211,9 @@
           <a:bodyPr rtlCol="0" anchor="ctr"/>
           <a:lstStyle/>
           <a:p>
-            <a:pPr algn="ctr"/>
+            <a:pPr algn="ctr">
+              <a:defRPr/>
+            </a:pPr>
           </a:p>
         </p:txBody>
       </p:sp>
@@ -6139,6 +6248,7 @@
               </a:defRPr>
             </a:pPr>
             <a:r>
+              <a:rPr/>
               <a:t>A: カルテ後方視</a:t>
             </a:r>
           </a:p>
@@ -6152,7 +6262,7 @@
         </p:nvSpPr>
         <p:spPr>
           <a:xfrm>
-            <a:off x="914400" y="1737360"/>
+            <a:off x="914400" y="1801368"/>
             <a:ext cx="7315200" cy="365760"/>
           </a:xfrm>
           <a:prstGeom prst="rect">
@@ -6175,6 +6285,7 @@
               </a:defRPr>
             </a:pPr>
             <a:r>
+              <a:rPr/>
               <a:t>自施設の糖尿病患者500名のカルテデータを後方視的に解析したい</a:t>
             </a:r>
           </a:p>
@@ -6221,7 +6332,9 @@
           <a:bodyPr rtlCol="0" anchor="ctr"/>
           <a:lstStyle/>
           <a:p>
-            <a:pPr algn="ctr"/>
+            <a:pPr algn="ctr">
+              <a:defRPr/>
+            </a:pPr>
           </a:p>
         </p:txBody>
       </p:sp>
@@ -6256,6 +6369,7 @@
               </a:defRPr>
             </a:pPr>
             <a:r>
+              <a:rPr/>
               <a:t>B: バイオバンク</a:t>
             </a:r>
           </a:p>
@@ -6269,7 +6383,7 @@
         </p:nvSpPr>
         <p:spPr>
           <a:xfrm>
-            <a:off x="914400" y="2743200"/>
+            <a:off x="914400" y="2807208"/>
             <a:ext cx="7315200" cy="365760"/>
           </a:xfrm>
           <a:prstGeom prst="rect">
@@ -6292,6 +6406,7 @@
               </a:defRPr>
             </a:pPr>
             <a:r>
+              <a:rPr/>
               <a:t>包括同意取得済みの血液検体で新しいバイオマーカーを探索したい</a:t>
             </a:r>
           </a:p>
@@ -6338,7 +6453,9 @@
           <a:bodyPr rtlCol="0" anchor="ctr"/>
           <a:lstStyle/>
           <a:p>
-            <a:pPr algn="ctr"/>
+            <a:pPr algn="ctr">
+              <a:defRPr/>
+            </a:pPr>
           </a:p>
         </p:txBody>
       </p:sp>
@@ -6373,6 +6490,7 @@
               </a:defRPr>
             </a:pPr>
             <a:r>
+              <a:rPr/>
               <a:t>C: AI画像解析</a:t>
             </a:r>
           </a:p>
@@ -6386,7 +6504,7 @@
         </p:nvSpPr>
         <p:spPr>
           <a:xfrm>
-            <a:off x="914400" y="3749040"/>
+            <a:off x="914400" y="3813048"/>
             <a:ext cx="7315200" cy="365760"/>
           </a:xfrm>
           <a:prstGeom prst="rect">
@@ -6409,6 +6527,7 @@
               </a:defRPr>
             </a:pPr>
             <a:r>
+              <a:rPr/>
               <a:t>匿名化済みの画像データでAI診断ツールの精度を検証したい</a:t>
             </a:r>
           </a:p>
@@ -6423,7 +6542,7 @@
         <p:spPr>
           <a:xfrm>
             <a:off x="731520" y="4389120"/>
-            <a:ext cx="2743200" cy="274320"/>
+            <a:ext cx="2743200" cy="322579"/>
           </a:xfrm>
           <a:prstGeom prst="rect">
             <a:avLst/>
@@ -6445,6 +6564,7 @@
               </a:defRPr>
             </a:pPr>
             <a:r>
+              <a:rPr/>
               <a:t>決めるべきこと:</a:t>
             </a:r>
           </a:p>
@@ -6459,7 +6579,7 @@
         <p:spPr>
           <a:xfrm>
             <a:off x="3200400" y="4389120"/>
-            <a:ext cx="5943600" cy="274320"/>
+            <a:ext cx="5943600" cy="304799"/>
           </a:xfrm>
           <a:prstGeom prst="rect">
             <a:avLst/>
@@ -6481,6 +6601,7 @@
               </a:defRPr>
             </a:pPr>
             <a:r>
+              <a:rPr/>
               <a:t>データの種類（個人情報/仮名加工/匿名加工）× 同意の方法（IC/オプトアウト/不要）</a:t>
             </a:r>
           </a:p>
@@ -6543,6 +6664,7 @@
               </a:defRPr>
             </a:pPr>
             <a:r>
+              <a:rPr/>
               <a:t>各シナリオの正解</a:t>
             </a:r>
           </a:p>
@@ -6587,7 +6709,9 @@
           <a:bodyPr rtlCol="0" anchor="ctr"/>
           <a:lstStyle/>
           <a:p>
-            <a:pPr algn="ctr"/>
+            <a:pPr algn="ctr">
+              <a:defRPr/>
+            </a:pPr>
           </a:p>
         </p:txBody>
       </p:sp>
@@ -6632,7 +6756,9 @@
           <a:bodyPr rtlCol="0" anchor="ctr"/>
           <a:lstStyle/>
           <a:p>
-            <a:pPr algn="ctr"/>
+            <a:pPr algn="ctr">
+              <a:defRPr/>
+            </a:pPr>
           </a:p>
         </p:txBody>
       </p:sp>
@@ -6667,6 +6793,7 @@
               </a:defRPr>
             </a:pPr>
             <a:r>
+              <a:rPr/>
               <a:t>A: カルテ後方視</a:t>
             </a:r>
           </a:p>
@@ -6681,7 +6808,7 @@
         <p:spPr>
           <a:xfrm>
             <a:off x="640080" y="1280160"/>
-            <a:ext cx="7772400" cy="320040"/>
+            <a:ext cx="7772400" cy="322579"/>
           </a:xfrm>
           <a:prstGeom prst="rect">
             <a:avLst/>
@@ -6703,6 +6830,7 @@
               </a:defRPr>
             </a:pPr>
             <a:r>
+              <a:rPr/>
               <a:t>仮名加工情報に加工 → オプトアウトでOK</a:t>
             </a:r>
           </a:p>
@@ -6717,7 +6845,7 @@
         <p:spPr>
           <a:xfrm>
             <a:off x="640080" y="1645920"/>
-            <a:ext cx="7772400" cy="274320"/>
+            <a:ext cx="7772400" cy="287020"/>
           </a:xfrm>
           <a:prstGeom prst="rect">
             <a:avLst/>
@@ -6739,6 +6867,7 @@
               </a:defRPr>
             </a:pPr>
             <a:r>
+              <a:rPr/>
               <a:t>改正で: 現行ではICが必要なケースも → 簡素化</a:t>
             </a:r>
           </a:p>
@@ -6785,7 +6914,9 @@
           <a:bodyPr rtlCol="0" anchor="ctr"/>
           <a:lstStyle/>
           <a:p>
-            <a:pPr algn="ctr"/>
+            <a:pPr algn="ctr">
+              <a:defRPr/>
+            </a:pPr>
           </a:p>
         </p:txBody>
       </p:sp>
@@ -6820,6 +6951,7 @@
               </a:defRPr>
             </a:pPr>
             <a:r>
+              <a:rPr/>
               <a:t>B: バイオバンク</a:t>
             </a:r>
           </a:p>
@@ -6834,7 +6966,7 @@
         <p:spPr>
           <a:xfrm>
             <a:off x="640080" y="2560320"/>
-            <a:ext cx="7772400" cy="320040"/>
+            <a:ext cx="7772400" cy="322579"/>
           </a:xfrm>
           <a:prstGeom prst="rect">
             <a:avLst/>
@@ -6856,6 +6988,7 @@
               </a:defRPr>
             </a:pPr>
             <a:r>
+              <a:rPr/>
               <a:t>包括同意の範囲内 → オプトアウト手続き</a:t>
             </a:r>
           </a:p>
@@ -6870,7 +7003,7 @@
         <p:spPr>
           <a:xfrm>
             <a:off x="640080" y="2926080"/>
-            <a:ext cx="7772400" cy="274320"/>
+            <a:ext cx="7772400" cy="287020"/>
           </a:xfrm>
           <a:prstGeom prst="rect">
             <a:avLst/>
@@ -6892,6 +7025,7 @@
               </a:defRPr>
             </a:pPr>
             <a:r>
+              <a:rPr/>
               <a:t>改正で: 包括同意だけでは不十分 → 組合せが明確化</a:t>
             </a:r>
           </a:p>
@@ -6938,7 +7072,9 @@
           <a:bodyPr rtlCol="0" anchor="ctr"/>
           <a:lstStyle/>
           <a:p>
-            <a:pPr algn="ctr"/>
+            <a:pPr algn="ctr">
+              <a:defRPr/>
+            </a:pPr>
           </a:p>
         </p:txBody>
       </p:sp>
@@ -6973,6 +7109,7 @@
               </a:defRPr>
             </a:pPr>
             <a:r>
+              <a:rPr/>
               <a:t>C: AI画像解析</a:t>
             </a:r>
           </a:p>
@@ -6987,7 +7124,7 @@
         <p:spPr>
           <a:xfrm>
             <a:off x="640080" y="3840480"/>
-            <a:ext cx="7772400" cy="320040"/>
+            <a:ext cx="7772400" cy="322579"/>
           </a:xfrm>
           <a:prstGeom prst="rect">
             <a:avLst/>
@@ -7009,6 +7146,7 @@
               </a:defRPr>
             </a:pPr>
             <a:r>
+              <a:rPr/>
               <a:t>匿名加工情報 → 同意不要</a:t>
             </a:r>
           </a:p>
@@ -7023,7 +7161,7 @@
         <p:spPr>
           <a:xfrm>
             <a:off x="640080" y="4206240"/>
-            <a:ext cx="7772400" cy="274320"/>
+            <a:ext cx="7772400" cy="287020"/>
           </a:xfrm>
           <a:prstGeom prst="rect">
             <a:avLst/>
@@ -7045,6 +7183,7 @@
               </a:defRPr>
             </a:pPr>
             <a:r>
+              <a:rPr/>
               <a:t>改正で: 「困難な場合」の制限が撤廃 → より自由に</a:t>
             </a:r>
           </a:p>
@@ -7107,6 +7246,7 @@
               </a:defRPr>
             </a:pPr>
             <a:r>
+              <a:rPr/>
               <a:t>3つの変更、3つのアクション</a:t>
             </a:r>
           </a:p>
@@ -7151,7 +7291,9 @@
           <a:bodyPr rtlCol="0" anchor="ctr"/>
           <a:lstStyle/>
           <a:p>
-            <a:pPr algn="ctr"/>
+            <a:pPr algn="ctr">
+              <a:defRPr/>
+            </a:pPr>
           </a:p>
         </p:txBody>
       </p:sp>
@@ -7164,7 +7306,7 @@
         <p:spPr>
           <a:xfrm>
             <a:off x="457200" y="914400"/>
-            <a:ext cx="4114800" cy="274320"/>
+            <a:ext cx="4114800" cy="340360"/>
           </a:xfrm>
           <a:prstGeom prst="rect">
             <a:avLst/>
@@ -7186,6 +7328,7 @@
               </a:defRPr>
             </a:pPr>
             <a:r>
+              <a:rPr/>
               <a:t>覚えておくこと</a:t>
             </a:r>
           </a:p>
@@ -7232,7 +7375,9 @@
           <a:bodyPr rtlCol="0" anchor="ctr"/>
           <a:lstStyle/>
           <a:p>
-            <a:pPr algn="ctr"/>
+            <a:pPr algn="ctr">
+              <a:defRPr/>
+            </a:pPr>
           </a:p>
         </p:txBody>
       </p:sp>
@@ -7267,6 +7412,7 @@
               </a:defRPr>
             </a:pPr>
             <a:r>
+              <a:rPr/>
               <a:t>1. 同意手続きの二元化（IC + オプトアウト）</a:t>
             </a:r>
           </a:p>
@@ -7313,7 +7459,9 @@
           <a:bodyPr rtlCol="0" anchor="ctr"/>
           <a:lstStyle/>
           <a:p>
-            <a:pPr algn="ctr"/>
+            <a:pPr algn="ctr">
+              <a:defRPr/>
+            </a:pPr>
           </a:p>
         </p:txBody>
       </p:sp>
@@ -7348,6 +7496,7 @@
               </a:defRPr>
             </a:pPr>
             <a:r>
+              <a:rPr/>
               <a:t>2. 仮名加工情報はオプトアウトでOK</a:t>
             </a:r>
           </a:p>
@@ -7394,7 +7543,9 @@
           <a:bodyPr rtlCol="0" anchor="ctr"/>
           <a:lstStyle/>
           <a:p>
-            <a:pPr algn="ctr"/>
+            <a:pPr algn="ctr">
+              <a:defRPr/>
+            </a:pPr>
           </a:p>
         </p:txBody>
       </p:sp>
@@ -7429,6 +7580,7 @@
               </a:defRPr>
             </a:pPr>
             <a:r>
+              <a:rPr/>
               <a:t>3. 匿名加工情報の利用制限を撤廃</a:t>
             </a:r>
           </a:p>
@@ -7443,7 +7595,7 @@
         <p:spPr>
           <a:xfrm>
             <a:off x="4754880" y="914400"/>
-            <a:ext cx="4114800" cy="274320"/>
+            <a:ext cx="4114800" cy="340360"/>
           </a:xfrm>
           <a:prstGeom prst="rect">
             <a:avLst/>
@@ -7465,6 +7617,7 @@
               </a:defRPr>
             </a:pPr>
             <a:r>
+              <a:rPr/>
               <a:t>次のアクション</a:t>
             </a:r>
           </a:p>
@@ -7509,7 +7662,9 @@
           <a:bodyPr rtlCol="0" anchor="ctr"/>
           <a:lstStyle/>
           <a:p>
-            <a:pPr algn="ctr"/>
+            <a:pPr algn="ctr">
+              <a:defRPr/>
+            </a:pPr>
           </a:p>
         </p:txBody>
       </p:sp>
@@ -7522,7 +7677,7 @@
         <p:spPr>
           <a:xfrm>
             <a:off x="4892040" y="1298448"/>
-            <a:ext cx="1097280" cy="274320"/>
+            <a:ext cx="1097280" cy="287020"/>
           </a:xfrm>
           <a:prstGeom prst="rect">
             <a:avLst/>
@@ -7544,6 +7699,7 @@
               </a:defRPr>
             </a:pPr>
             <a:r>
+              <a:rPr/>
               <a:t>今すぐ</a:t>
             </a:r>
           </a:p>
@@ -7580,6 +7736,7 @@
               </a:defRPr>
             </a:pPr>
             <a:r>
+              <a:rPr/>
               <a:t>自分の研究の同意手続きが改正でどう変わるか確認</a:t>
             </a:r>
           </a:p>
@@ -7626,7 +7783,9 @@
           <a:bodyPr rtlCol="0" anchor="ctr"/>
           <a:lstStyle/>
           <a:p>
-            <a:pPr algn="ctr"/>
+            <a:pPr algn="ctr">
+              <a:defRPr/>
+            </a:pPr>
           </a:p>
         </p:txBody>
       </p:sp>
@@ -7639,7 +7798,7 @@
         <p:spPr>
           <a:xfrm>
             <a:off x="4892040" y="1938527"/>
-            <a:ext cx="1097280" cy="274320"/>
+            <a:ext cx="1097280" cy="287020"/>
           </a:xfrm>
           <a:prstGeom prst="rect">
             <a:avLst/>
@@ -7661,6 +7820,7 @@
               </a:defRPr>
             </a:pPr>
             <a:r>
+              <a:rPr/>
               <a:t>今週中</a:t>
             </a:r>
           </a:p>
@@ -7697,6 +7857,7 @@
               </a:defRPr>
             </a:pPr>
             <a:r>
+              <a:rPr/>
               <a:t>倫理審査委員会に新指針への移行スケジュールを問い合わせ</a:t>
             </a:r>
           </a:p>
@@ -7743,7 +7904,9 @@
           <a:bodyPr rtlCol="0" anchor="ctr"/>
           <a:lstStyle/>
           <a:p>
-            <a:pPr algn="ctr"/>
+            <a:pPr algn="ctr">
+              <a:defRPr/>
+            </a:pPr>
           </a:p>
         </p:txBody>
       </p:sp>
@@ -7756,7 +7919,7 @@
         <p:spPr>
           <a:xfrm>
             <a:off x="4892040" y="2578608"/>
-            <a:ext cx="1097280" cy="274320"/>
+            <a:ext cx="1097280" cy="287020"/>
           </a:xfrm>
           <a:prstGeom prst="rect">
             <a:avLst/>
@@ -7778,6 +7941,7 @@
               </a:defRPr>
             </a:pPr>
             <a:r>
+              <a:rPr/>
               <a:t>来月</a:t>
             </a:r>
           </a:p>
@@ -7814,6 +7978,7 @@
               </a:defRPr>
             </a:pPr>
             <a:r>
+              <a:rPr/>
               <a:t>新指針準拠の研究計画書ドラフトを書いてみる</a:t>
             </a:r>
           </a:p>
@@ -7858,7 +8023,9 @@
           <a:bodyPr rtlCol="0" anchor="ctr"/>
           <a:lstStyle/>
           <a:p>
-            <a:pPr algn="ctr"/>
+            <a:pPr algn="ctr">
+              <a:defRPr/>
+            </a:pPr>
           </a:p>
         </p:txBody>
       </p:sp>
@@ -7903,7 +8070,9 @@
           <a:bodyPr rtlCol="0" anchor="ctr"/>
           <a:lstStyle/>
           <a:p>
-            <a:pPr algn="ctr"/>
+            <a:pPr algn="ctr">
+              <a:defRPr/>
+            </a:pPr>
           </a:p>
         </p:txBody>
       </p:sp>
@@ -7938,10 +8107,12 @@
               </a:defRPr>
             </a:pPr>
             <a:r>
+              <a:rPr/>
               <a:t>改正は研究を「やりやすくする」方向。</a:t>
             </a:r>
             <a:br/>
             <a:r>
+              <a:rPr/>
               <a:t>ただし手続きは変わるので、今のうちに準備を。</a:t>
             </a:r>
           </a:p>
